--- a/products/shopify-collective/shopify-collective-architecture.pptx
+++ b/products/shopify-collective/shopify-collective-architecture.pptx
@@ -2,24 +2,24 @@
 <file path=ppt/presentation.xml><?xml version="1.0" encoding="utf-8"?>
 <p:presentation xmlns:p="http://schemas.openxmlformats.org/presentationml/2006/main">
   <p:sldMasterIdLst>
-    <p:sldMasterId xmlns:r="http://schemas.openxmlformats.org/officeDocument/2006/relationships" id="2147483648" r:id="R0c5e7ab5de654cfe"/>
+    <p:sldMasterId xmlns:r="http://schemas.openxmlformats.org/officeDocument/2006/relationships" id="2147483648" r:id="R51944e5c7a8045be"/>
   </p:sldMasterIdLst>
   <p:notesMasterIdLst>
-    <p:notesMasterId xmlns:r="http://schemas.openxmlformats.org/officeDocument/2006/relationships" r:id="R38e856011e6c4ade"/>
+    <p:notesMasterId xmlns:r="http://schemas.openxmlformats.org/officeDocument/2006/relationships" r:id="R6a1ea0c9aeef4755"/>
   </p:notesMasterIdLst>
   <p:sldIdLst>
-    <p:sldId xmlns:r="http://schemas.openxmlformats.org/officeDocument/2006/relationships" id="256" r:id="R31087cd61c12496e"/>
-    <p:sldId xmlns:r="http://schemas.openxmlformats.org/officeDocument/2006/relationships" id="257" r:id="R199537638d194ec8"/>
-    <p:sldId xmlns:r="http://schemas.openxmlformats.org/officeDocument/2006/relationships" id="258" r:id="R848216ab1ca94803"/>
-    <p:sldId xmlns:r="http://schemas.openxmlformats.org/officeDocument/2006/relationships" id="259" r:id="R427164bfec2e45dd"/>
-    <p:sldId xmlns:r="http://schemas.openxmlformats.org/officeDocument/2006/relationships" id="260" r:id="Rd4eed284b6ff4d88"/>
-    <p:sldId xmlns:r="http://schemas.openxmlformats.org/officeDocument/2006/relationships" id="261" r:id="Rcb80f58969e841c4"/>
-    <p:sldId xmlns:r="http://schemas.openxmlformats.org/officeDocument/2006/relationships" id="262" r:id="Rc16afd4f0c5b4fd5"/>
-    <p:sldId xmlns:r="http://schemas.openxmlformats.org/officeDocument/2006/relationships" id="263" r:id="Rb19985502b074315"/>
-    <p:sldId xmlns:r="http://schemas.openxmlformats.org/officeDocument/2006/relationships" id="264" r:id="Rcac2aa086212480d"/>
-    <p:sldId xmlns:r="http://schemas.openxmlformats.org/officeDocument/2006/relationships" id="265" r:id="R93f24a344e3c463f"/>
-    <p:sldId xmlns:r="http://schemas.openxmlformats.org/officeDocument/2006/relationships" id="266" r:id="R86a6fb96284049b6"/>
-    <p:sldId xmlns:r="http://schemas.openxmlformats.org/officeDocument/2006/relationships" id="267" r:id="R7a037c20dbda4e85"/>
+    <p:sldId xmlns:r="http://schemas.openxmlformats.org/officeDocument/2006/relationships" id="256" r:id="Rd8eceb12717041c7"/>
+    <p:sldId xmlns:r="http://schemas.openxmlformats.org/officeDocument/2006/relationships" id="257" r:id="Rc4a9c78852b94e84"/>
+    <p:sldId xmlns:r="http://schemas.openxmlformats.org/officeDocument/2006/relationships" id="258" r:id="R6ce44563c81e4883"/>
+    <p:sldId xmlns:r="http://schemas.openxmlformats.org/officeDocument/2006/relationships" id="259" r:id="Rea29527003554e10"/>
+    <p:sldId xmlns:r="http://schemas.openxmlformats.org/officeDocument/2006/relationships" id="260" r:id="R0ad95ac5d2a04c7e"/>
+    <p:sldId xmlns:r="http://schemas.openxmlformats.org/officeDocument/2006/relationships" id="261" r:id="R35ec0a5e954f4127"/>
+    <p:sldId xmlns:r="http://schemas.openxmlformats.org/officeDocument/2006/relationships" id="262" r:id="R80638544a590418c"/>
+    <p:sldId xmlns:r="http://schemas.openxmlformats.org/officeDocument/2006/relationships" id="263" r:id="R2d57766b9d95409c"/>
+    <p:sldId xmlns:r="http://schemas.openxmlformats.org/officeDocument/2006/relationships" id="264" r:id="R5036fe157827464d"/>
+    <p:sldId xmlns:r="http://schemas.openxmlformats.org/officeDocument/2006/relationships" id="265" r:id="R0b2f4c89b79c4a27"/>
+    <p:sldId xmlns:r="http://schemas.openxmlformats.org/officeDocument/2006/relationships" id="266" r:id="R5a73d4b3bb4f4949"/>
+    <p:sldId xmlns:r="http://schemas.openxmlformats.org/officeDocument/2006/relationships" id="267" r:id="R472418ad34d24ac7"/>
   </p:sldIdLst>
   <p:sldSz cx="12192000" cy="6858000"/>
   <p:notesSz cx="6858000" cy="9144000"/>
@@ -1338,7 +1338,7 @@
   </p:cSld>
   <p:clrMap bg1="lt1" tx1="dk1" bg2="lt2" tx2="dk2" accent1="accent1" accent2="accent2" accent3="accent3" accent4="accent4" accent5="accent5" accent6="accent6" hlink="hlink" folHlink="folHlink"/>
   <p:sldLayoutIdLst>
-    <p:sldLayoutId xmlns:r="http://schemas.openxmlformats.org/officeDocument/2006/relationships" id="2147483649" r:id="R5bec867529c341ff"/>
+    <p:sldLayoutId xmlns:r="http://schemas.openxmlformats.org/officeDocument/2006/relationships" id="2147483649" r:id="Rf965b9b2a02e4d2f"/>
   </p:sldLayoutIdLst>
   <p:txStyles>
     <p:titleStyle>
@@ -1889,7 +1889,7 @@
           <p:cNvPr id="1" name="">
             <a:extLst xmlns:a="http://schemas.openxmlformats.org/drawingml/2006/main">
               <a:ext uri="{FF2B5EF4-FFF2-40B4-BE49-F238E27FC236}">
-                <a16:creationId xmlns:a16="http://schemas.microsoft.com/office/drawing/2014/main" id="{22333C3B-8E98-4469-8D7F-967814A4BD24}"/>
+                <a16:creationId xmlns:a16="http://schemas.microsoft.com/office/drawing/2014/main" id="{9725245A-08E3-4640-8999-EEDE96D7DDA9}"/>
               </a:ext>
             </a:extLst>
           </p:cNvPr>
@@ -1939,7 +1939,7 @@
           <p:cNvPr id="2" name="">
             <a:extLst xmlns:a="http://schemas.openxmlformats.org/drawingml/2006/main">
               <a:ext uri="{FF2B5EF4-FFF2-40B4-BE49-F238E27FC236}">
-                <a16:creationId xmlns:a16="http://schemas.microsoft.com/office/drawing/2014/main" id="{DBE7FD83-73E5-4D71-95C9-0E2B12B590D8}"/>
+                <a16:creationId xmlns:a16="http://schemas.microsoft.com/office/drawing/2014/main" id="{E43143CD-9E7B-4F3D-B606-ABA7B559E89F}"/>
               </a:ext>
             </a:extLst>
           </p:cNvPr>
@@ -2006,7 +2006,7 @@
           <p:cNvPr id="3" name="">
             <a:extLst xmlns:a="http://schemas.openxmlformats.org/drawingml/2006/main">
               <a:ext uri="{FF2B5EF4-FFF2-40B4-BE49-F238E27FC236}">
-                <a16:creationId xmlns:a16="http://schemas.microsoft.com/office/drawing/2014/main" id="{FC0DC742-65D4-4B96-801C-C436D951E81E}"/>
+                <a16:creationId xmlns:a16="http://schemas.microsoft.com/office/drawing/2014/main" id="{F01ABCDA-1DC8-4416-9BC0-F4C48D4A72E2}"/>
               </a:ext>
             </a:extLst>
           </p:cNvPr>
@@ -2046,7 +2046,7 @@
                   <a:srgbClr val="FFFFFF"/>
                 </a:solidFill>
               </a:rPr>
-              <a:t>Retailer and supplier workflows summarized from architecture.md.</a:t>
+              <a:t>Retailer and supplier workflows for product sync, orders, payments, and returns.</a:t>
             </a:r>
           </a:p>
         </p:txBody>
@@ -2056,57 +2056,7 @@
           <p:cNvPr id="4" name="">
             <a:extLst xmlns:a="http://schemas.openxmlformats.org/drawingml/2006/main">
               <a:ext uri="{FF2B5EF4-FFF2-40B4-BE49-F238E27FC236}">
-                <a16:creationId xmlns:a16="http://schemas.microsoft.com/office/drawing/2014/main" id="{40F0D491-5797-4D95-A37C-224400B3FD24}"/>
-              </a:ext>
-            </a:extLst>
-          </p:cNvPr>
-          <p:cNvSpPr>
-            <a:spLocks xmlns:a="http://schemas.openxmlformats.org/drawingml/2006/main" noGrp="1"/>
-          </p:cNvSpPr>
-          <p:nvPr/>
-        </p:nvSpPr>
-        <p:spPr>
-          <a:xfrm xmlns:a="http://schemas.openxmlformats.org/drawingml/2006/main">
-            <a:off x="647700" y="5962650"/>
-            <a:ext cx="8096250" cy="247650"/>
-          </a:xfrm>
-          <a:prstGeom xmlns:a="http://schemas.openxmlformats.org/drawingml/2006/main" prst="rect">
-            <a:avLst/>
-          </a:prstGeom>
-          <a:noFill xmlns:a="http://schemas.openxmlformats.org/drawingml/2006/main"/>
-          <a:ln xmlns:a="http://schemas.openxmlformats.org/drawingml/2006/main" w="0">
-            <a:noFill/>
-            <a:prstDash val="solid"/>
-          </a:ln>
-        </p:spPr>
-        <p:txBody>
-          <a:bodyPr xmlns:a="http://schemas.openxmlformats.org/drawingml/2006/main"/>
-          <a:lstStyle xmlns:a="http://schemas.openxmlformats.org/drawingml/2006/main"/>
-          <a:p xmlns:a="http://schemas.openxmlformats.org/drawingml/2006/main">
-            <a:pPr algn="l">
-              <a:defRPr sz="1050" b="0">
-                <a:solidFill>
-                  <a:srgbClr val="D8EEE6"/>
-                </a:solidFill>
-              </a:defRPr>
-            </a:pPr>
-            <a:r>
-              <a:rPr sz="1050" b="0">
-                <a:solidFill>
-                  <a:srgbClr val="D8EEE6"/>
-                </a:solidFill>
-              </a:rPr>
-              <a:t>Unofficial supplemental material. Content may change without notice.</a:t>
-            </a:r>
-          </a:p>
-        </p:txBody>
-      </p:sp>
-      <p:sp>
-        <p:nvSpPr>
-          <p:cNvPr id="5" name="">
-            <a:extLst xmlns:a="http://schemas.openxmlformats.org/drawingml/2006/main">
-              <a:ext uri="{FF2B5EF4-FFF2-40B4-BE49-F238E27FC236}">
-                <a16:creationId xmlns:a16="http://schemas.microsoft.com/office/drawing/2014/main" id="{95D9EC8C-9DDC-420D-9DA0-CA2D30852CD5}"/>
+                <a16:creationId xmlns:a16="http://schemas.microsoft.com/office/drawing/2014/main" id="{F659A39C-5B55-46FA-AAF2-4CBC6B3E2E9D}"/>
               </a:ext>
             </a:extLst>
           </p:cNvPr>
@@ -2154,7 +2104,7 @@
     </p:spTree>
     <p:extLst>
       <p:ext uri="{BB962C8B-B14F-4D97-AF65-F5344CB8AC3E}">
-        <p14:creationId xmlns:p14="http://schemas.microsoft.com/office/powerpoint/2010/main" val="1711410807"/>
+        <p14:creationId xmlns:p14="http://schemas.microsoft.com/office/powerpoint/2010/main" val="572290622"/>
       </p:ext>
     </p:extLst>
   </p:cSld>
@@ -2185,7 +2135,7 @@
           <p:cNvPr id="1" name="">
             <a:extLst xmlns:a="http://schemas.openxmlformats.org/drawingml/2006/main">
               <a:ext uri="{FF2B5EF4-FFF2-40B4-BE49-F238E27FC236}">
-                <a16:creationId xmlns:a16="http://schemas.microsoft.com/office/drawing/2014/main" id="{7535091B-672C-470A-A0D4-F4B0AFB8BBE5}"/>
+                <a16:creationId xmlns:a16="http://schemas.microsoft.com/office/drawing/2014/main" id="{E7BD62CE-F195-4928-97B5-F507E8E37487}"/>
               </a:ext>
             </a:extLst>
           </p:cNvPr>
@@ -2225,7 +2175,7 @@
                   <a:srgbClr val="004C3F"/>
                 </a:solidFill>
               </a:rPr>
-              <a:t>09 | FAQ: product and sync</a:t>
+              <a:t>09 | FAQ: orders and money</a:t>
             </a:r>
           </a:p>
         </p:txBody>
@@ -2235,7 +2185,7 @@
           <p:cNvPr id="2" name="">
             <a:extLst xmlns:a="http://schemas.openxmlformats.org/drawingml/2006/main">
               <a:ext uri="{FF2B5EF4-FFF2-40B4-BE49-F238E27FC236}">
-                <a16:creationId xmlns:a16="http://schemas.microsoft.com/office/drawing/2014/main" id="{5CB542C2-106B-4A33-8CE9-4DF4EC3CA5C8}"/>
+                <a16:creationId xmlns:a16="http://schemas.microsoft.com/office/drawing/2014/main" id="{E20BF794-E285-4A54-AD61-B860D2D96407}"/>
               </a:ext>
             </a:extLst>
           </p:cNvPr>
@@ -2275,7 +2225,7 @@
                   <a:srgbClr val="101820"/>
                 </a:solidFill>
               </a:rPr>
-              <a:t>Operational questions have clear source-of-truth answers</a:t>
+              <a:t>Order and payment FAQ depends on webhooks plus reconciliation</a:t>
             </a:r>
           </a:p>
         </p:txBody>
@@ -2285,7 +2235,7 @@
           <p:cNvPr id="3" name="">
             <a:extLst xmlns:a="http://schemas.openxmlformats.org/drawingml/2006/main">
               <a:ext uri="{FF2B5EF4-FFF2-40B4-BE49-F238E27FC236}">
-                <a16:creationId xmlns:a16="http://schemas.microsoft.com/office/drawing/2014/main" id="{76EFB45E-EB48-462C-B36B-ACF701FCA85D}"/>
+                <a16:creationId xmlns:a16="http://schemas.microsoft.com/office/drawing/2014/main" id="{D9A72A76-EABB-4F44-BA8F-50A068247B31}"/>
               </a:ext>
             </a:extLst>
           </p:cNvPr>
@@ -2325,7 +2275,7 @@
                   <a:srgbClr val="52615B"/>
                 </a:solidFill>
               </a:rPr>
-              <a:t>Most product questions resolve by separating supplier-managed fields from retailer-facing presentation.</a:t>
+              <a:t>External systems should use webhooks as the change feed and payment adjustments for final money movement.</a:t>
             </a:r>
           </a:p>
         </p:txBody>
@@ -2335,7 +2285,7 @@
           <p:cNvPr id="4" name="">
             <a:extLst xmlns:a="http://schemas.openxmlformats.org/drawingml/2006/main">
               <a:ext uri="{FF2B5EF4-FFF2-40B4-BE49-F238E27FC236}">
-                <a16:creationId xmlns:a16="http://schemas.microsoft.com/office/drawing/2014/main" id="{23880F8B-DC10-4609-953C-68BA3ABFAAA5}"/>
+                <a16:creationId xmlns:a16="http://schemas.microsoft.com/office/drawing/2014/main" id="{32D46EA3-2485-427D-9AE9-04946D3AF11C}"/>
               </a:ext>
             </a:extLst>
           </p:cNvPr>
@@ -2366,7 +2316,7 @@
           <p:cNvPr id="5" name="">
             <a:extLst xmlns:a="http://schemas.openxmlformats.org/drawingml/2006/main">
               <a:ext uri="{FF2B5EF4-FFF2-40B4-BE49-F238E27FC236}">
-                <a16:creationId xmlns:a16="http://schemas.microsoft.com/office/drawing/2014/main" id="{16EB1C86-1671-426C-80B5-6CFC493751E3}"/>
+                <a16:creationId xmlns:a16="http://schemas.microsoft.com/office/drawing/2014/main" id="{DB95EEC0-A72E-4FE8-8D6F-749A59FED0AC}"/>
               </a:ext>
             </a:extLst>
           </p:cNvPr>
@@ -2406,7 +2356,7 @@
                   <a:srgbClr val="004C3F"/>
                 </a:solidFill>
               </a:rPr>
-              <a:t>Must product master data live on supplier side?</a:t>
+              <a:t>When is the supplier order created?</a:t>
             </a:r>
           </a:p>
         </p:txBody>
@@ -2416,7 +2366,7 @@
           <p:cNvPr id="6" name="">
             <a:extLst xmlns:a="http://schemas.openxmlformats.org/drawingml/2006/main">
               <a:ext uri="{FF2B5EF4-FFF2-40B4-BE49-F238E27FC236}">
-                <a16:creationId xmlns:a16="http://schemas.microsoft.com/office/drawing/2014/main" id="{2FCE0E09-BE34-4B23-A079-0AE6593739EF}"/>
+                <a16:creationId xmlns:a16="http://schemas.microsoft.com/office/drawing/2014/main" id="{BD8DABB1-0E60-486F-8A93-5322C95024FE}"/>
               </a:ext>
             </a:extLst>
           </p:cNvPr>
@@ -2456,7 +2406,7 @@
                   <a:srgbClr val="52615B"/>
                 </a:solidFill>
               </a:rPr>
-              <a:t>The product must exist in the supplier Shopify store and be published to Collective; upstream master data can still live in ERP or PIM.</a:t>
+              <a:t>After the retailer order is paid, fraud checks pass, and the order is not on hold. ERP/OMS/WMS sync should use order creation and order update webhooks.</a:t>
             </a:r>
           </a:p>
         </p:txBody>
@@ -2466,7 +2416,7 @@
           <p:cNvPr id="7" name="">
             <a:extLst xmlns:a="http://schemas.openxmlformats.org/drawingml/2006/main">
               <a:ext uri="{FF2B5EF4-FFF2-40B4-BE49-F238E27FC236}">
-                <a16:creationId xmlns:a16="http://schemas.microsoft.com/office/drawing/2014/main" id="{6EFA3B07-939E-4009-BC83-3303E4ED213E}"/>
+                <a16:creationId xmlns:a16="http://schemas.microsoft.com/office/drawing/2014/main" id="{3AD779CA-08A3-410F-BD54-DA6174FB3917}"/>
               </a:ext>
             </a:extLst>
           </p:cNvPr>
@@ -2506,7 +2456,7 @@
                   <a:srgbClr val="004C3F"/>
                 </a:solidFill>
               </a:rPr>
-              <a:t>What if supplier changes product data?</a:t>
+              <a:t>How is supplier amount determined?</a:t>
             </a:r>
           </a:p>
         </p:txBody>
@@ -2516,7 +2466,7 @@
           <p:cNvPr id="8" name="">
             <a:extLst xmlns:a="http://schemas.openxmlformats.org/drawingml/2006/main">
               <a:ext uri="{FF2B5EF4-FFF2-40B4-BE49-F238E27FC236}">
-                <a16:creationId xmlns:a16="http://schemas.microsoft.com/office/drawing/2014/main" id="{37F11909-992D-4B80-B880-37EF44C558F7}"/>
+                <a16:creationId xmlns:a16="http://schemas.microsoft.com/office/drawing/2014/main" id="{6D8A9E63-94A9-4BE8-B848-FC7207EB3D4A}"/>
               </a:ext>
             </a:extLst>
           </p:cNvPr>
@@ -2556,7 +2506,7 @@
                   <a:srgbClr val="52615B"/>
                 </a:solidFill>
               </a:rPr>
-              <a:t>Inventory and cost price sync. Other content fields can sync depending on product policy and settings.</a:t>
+              <a:t>Use cost price, supplier shipping, tax, and adjustments, not the buyer checkout total. Finance systems should pair order webhooks with payment adjustment reconciliation.</a:t>
             </a:r>
           </a:p>
         </p:txBody>
@@ -2566,7 +2516,7 @@
           <p:cNvPr id="9" name="">
             <a:extLst xmlns:a="http://schemas.openxmlformats.org/drawingml/2006/main">
               <a:ext uri="{FF2B5EF4-FFF2-40B4-BE49-F238E27FC236}">
-                <a16:creationId xmlns:a16="http://schemas.microsoft.com/office/drawing/2014/main" id="{69D9BF0F-BBF3-4BFF-A7CA-CA27A9CEB738}"/>
+                <a16:creationId xmlns:a16="http://schemas.microsoft.com/office/drawing/2014/main" id="{662857EB-A07F-4232-BBFB-C3018D376DFA}"/>
               </a:ext>
             </a:extLst>
           </p:cNvPr>
@@ -2606,7 +2556,7 @@
                   <a:srgbClr val="004C3F"/>
                 </a:solidFill>
               </a:rPr>
-              <a:t>What if retailer changes product data?</a:t>
+              <a:t>Does payout equal supplier order amount?</a:t>
             </a:r>
           </a:p>
         </p:txBody>
@@ -2616,7 +2566,7 @@
           <p:cNvPr id="10" name="">
             <a:extLst xmlns:a="http://schemas.openxmlformats.org/drawingml/2006/main">
               <a:ext uri="{FF2B5EF4-FFF2-40B4-BE49-F238E27FC236}">
-                <a16:creationId xmlns:a16="http://schemas.microsoft.com/office/drawing/2014/main" id="{A24DE92C-631A-4DF7-92D0-C4310B0F2160}"/>
+                <a16:creationId xmlns:a16="http://schemas.microsoft.com/office/drawing/2014/main" id="{28DDDCEC-70CB-4FD9-8922-3C58D354643F}"/>
               </a:ext>
             </a:extLst>
           </p:cNvPr>
@@ -2656,7 +2606,7 @@
                   <a:srgbClr val="52615B"/>
                 </a:solidFill>
               </a:rPr>
-              <a:t>Retailer edits do not update supplier source data. Supplier-managed fields remain supplier-controlled.</a:t>
+              <a:t>Not always. Payouts can aggregate payments and reflect refunds, returns, reversals, tax, shipping, timing, and balance behavior.</a:t>
             </a:r>
           </a:p>
         </p:txBody>
@@ -2666,7 +2616,7 @@
           <p:cNvPr id="11" name="">
             <a:extLst xmlns:a="http://schemas.openxmlformats.org/drawingml/2006/main">
               <a:ext uri="{FF2B5EF4-FFF2-40B4-BE49-F238E27FC236}">
-                <a16:creationId xmlns:a16="http://schemas.microsoft.com/office/drawing/2014/main" id="{98375A4C-F676-45E4-855C-DB2634E0948F}"/>
+                <a16:creationId xmlns:a16="http://schemas.microsoft.com/office/drawing/2014/main" id="{E4190671-44B9-4374-9649-CF482F2E4234}"/>
               </a:ext>
             </a:extLst>
           </p:cNvPr>
@@ -2706,7 +2656,7 @@
                   <a:srgbClr val="004C3F"/>
                 </a:solidFill>
               </a:rPr>
-              <a:t>Can inventory diverge?</a:t>
+              <a:t>What if retailer discounts the order?</a:t>
             </a:r>
           </a:p>
         </p:txBody>
@@ -2716,7 +2666,7 @@
           <p:cNvPr id="12" name="">
             <a:extLst xmlns:a="http://schemas.openxmlformats.org/drawingml/2006/main">
               <a:ext uri="{FF2B5EF4-FFF2-40B4-BE49-F238E27FC236}">
-                <a16:creationId xmlns:a16="http://schemas.microsoft.com/office/drawing/2014/main" id="{B4452869-74D2-4C09-A61B-656D62A40522}"/>
+                <a16:creationId xmlns:a16="http://schemas.microsoft.com/office/drawing/2014/main" id="{048268EF-E8E0-4781-AEC3-DB591C92996B}"/>
               </a:ext>
             </a:extLst>
           </p:cNvPr>
@@ -2756,7 +2706,7 @@
                   <a:srgbClr val="52615B"/>
                 </a:solidFill>
               </a:rPr>
-              <a:t>Temporarily, yes. Sync can lag, but Shopify checkout checks supplier inventory. Manual orders are an exception.</a:t>
+              <a:t>The customer pays less and retailer profit decreases. Supplier cost price does not change.</a:t>
             </a:r>
           </a:p>
         </p:txBody>
@@ -2766,7 +2716,7 @@
           <p:cNvPr id="13" name="">
             <a:extLst xmlns:a="http://schemas.openxmlformats.org/drawingml/2006/main">
               <a:ext uri="{FF2B5EF4-FFF2-40B4-BE49-F238E27FC236}">
-                <a16:creationId xmlns:a16="http://schemas.microsoft.com/office/drawing/2014/main" id="{C4A33E4F-5E8C-4744-BAC6-416E813A6A2D}"/>
+                <a16:creationId xmlns:a16="http://schemas.microsoft.com/office/drawing/2014/main" id="{B72BF294-60FA-4DB6-AE2F-3ADEA0C9F349}"/>
               </a:ext>
             </a:extLst>
           </p:cNvPr>
@@ -2797,7 +2747,7 @@
           <p:cNvPr id="14" name="">
             <a:extLst xmlns:a="http://schemas.openxmlformats.org/drawingml/2006/main">
               <a:ext uri="{FF2B5EF4-FFF2-40B4-BE49-F238E27FC236}">
-                <a16:creationId xmlns:a16="http://schemas.microsoft.com/office/drawing/2014/main" id="{B904D336-2A7F-4BDC-9308-C78DA0B445E7}"/>
+                <a16:creationId xmlns:a16="http://schemas.microsoft.com/office/drawing/2014/main" id="{B02F8AF0-FF2C-4DBE-BFF9-853DF9787C45}"/>
               </a:ext>
             </a:extLst>
           </p:cNvPr>
@@ -2809,7 +2759,7 @@
         <p:spPr>
           <a:xfrm xmlns:a="http://schemas.openxmlformats.org/drawingml/2006/main">
             <a:off x="609600" y="6419850"/>
-            <a:ext cx="7810500" cy="209550"/>
+            <a:ext cx="4000500" cy="209550"/>
           </a:xfrm>
           <a:prstGeom xmlns:a="http://schemas.openxmlformats.org/drawingml/2006/main" prst="rect">
             <a:avLst/>
@@ -2837,7 +2787,7 @@
                   <a:srgbClr val="52615B"/>
                 </a:solidFill>
               </a:rPr>
-              <a:t>Unofficial material | Source: products/shopify-collective/architecture.md</a:t>
+              <a:t>Shopify Collective</a:t>
             </a:r>
           </a:p>
         </p:txBody>
@@ -2847,7 +2797,7 @@
           <p:cNvPr id="15" name="">
             <a:extLst xmlns:a="http://schemas.openxmlformats.org/drawingml/2006/main">
               <a:ext uri="{FF2B5EF4-FFF2-40B4-BE49-F238E27FC236}">
-                <a16:creationId xmlns:a16="http://schemas.microsoft.com/office/drawing/2014/main" id="{39831752-1D01-4637-BB80-3379F63B1BAE}"/>
+                <a16:creationId xmlns:a16="http://schemas.microsoft.com/office/drawing/2014/main" id="{EE58125C-63D9-46B5-9977-CBD722076B68}"/>
               </a:ext>
             </a:extLst>
           </p:cNvPr>
@@ -2895,7 +2845,7 @@
     </p:spTree>
     <p:extLst>
       <p:ext uri="{BB962C8B-B14F-4D97-AF65-F5344CB8AC3E}">
-        <p14:creationId xmlns:p14="http://schemas.microsoft.com/office/powerpoint/2010/main" val="440542395"/>
+        <p14:creationId xmlns:p14="http://schemas.microsoft.com/office/powerpoint/2010/main" val="500259755"/>
       </p:ext>
     </p:extLst>
   </p:cSld>
@@ -2926,7 +2876,7 @@
           <p:cNvPr id="1" name="">
             <a:extLst xmlns:a="http://schemas.openxmlformats.org/drawingml/2006/main">
               <a:ext uri="{FF2B5EF4-FFF2-40B4-BE49-F238E27FC236}">
-                <a16:creationId xmlns:a16="http://schemas.microsoft.com/office/drawing/2014/main" id="{4CB4630A-3A2F-485C-B275-65A590143EA6}"/>
+                <a16:creationId xmlns:a16="http://schemas.microsoft.com/office/drawing/2014/main" id="{1F82B02E-42D5-4C4B-96AC-04AC91477F66}"/>
               </a:ext>
             </a:extLst>
           </p:cNvPr>
@@ -2966,7 +2916,7 @@
                   <a:srgbClr val="004C3F"/>
                 </a:solidFill>
               </a:rPr>
-              <a:t>10 | FAQ: money</a:t>
+              <a:t>10 | FAQ: product and inventory</a:t>
             </a:r>
           </a:p>
         </p:txBody>
@@ -2976,7 +2926,7 @@
           <p:cNvPr id="2" name="">
             <a:extLst xmlns:a="http://schemas.openxmlformats.org/drawingml/2006/main">
               <a:ext uri="{FF2B5EF4-FFF2-40B4-BE49-F238E27FC236}">
-                <a16:creationId xmlns:a16="http://schemas.microsoft.com/office/drawing/2014/main" id="{3FA7B7B6-A2FB-49EB-8FEE-BB031231BC0F}"/>
+                <a16:creationId xmlns:a16="http://schemas.microsoft.com/office/drawing/2014/main" id="{7F70D8E8-C1AE-4979-85E0-CBD2B37B2684}"/>
               </a:ext>
             </a:extLst>
           </p:cNvPr>
@@ -3016,7 +2966,7 @@
                   <a:srgbClr val="101820"/>
                 </a:solidFill>
               </a:rPr>
-              <a:t>Money questions require order and payment adjustment reconciliation</a:t>
+              <a:t>Product FAQ separates Collective sync from external sync</a:t>
             </a:r>
           </a:p>
         </p:txBody>
@@ -3026,7 +2976,7 @@
           <p:cNvPr id="3" name="">
             <a:extLst xmlns:a="http://schemas.openxmlformats.org/drawingml/2006/main">
               <a:ext uri="{FF2B5EF4-FFF2-40B4-BE49-F238E27FC236}">
-                <a16:creationId xmlns:a16="http://schemas.microsoft.com/office/drawing/2014/main" id="{659D71A4-2A93-4D28-A9A4-F4B1E67EF25B}"/>
+                <a16:creationId xmlns:a16="http://schemas.microsoft.com/office/drawing/2014/main" id="{FB4AC20A-2181-4197-AFBD-F557D618307B}"/>
               </a:ext>
             </a:extLst>
           </p:cNvPr>
@@ -3066,7 +3016,7 @@
                   <a:srgbClr val="52615B"/>
                 </a:solidFill>
               </a:rPr>
-              <a:t>Do not infer supplier economics only from the buyer checkout total.</a:t>
+              <a:t>Collective handles supplier-to-retailer sync; external systems subscribe to webhooks on the store they integrate with.</a:t>
             </a:r>
           </a:p>
         </p:txBody>
@@ -3076,7 +3026,7 @@
           <p:cNvPr id="4" name="">
             <a:extLst xmlns:a="http://schemas.openxmlformats.org/drawingml/2006/main">
               <a:ext uri="{FF2B5EF4-FFF2-40B4-BE49-F238E27FC236}">
-                <a16:creationId xmlns:a16="http://schemas.microsoft.com/office/drawing/2014/main" id="{6B7AB485-1B1B-4D88-BF48-43EA8C7D70CF}"/>
+                <a16:creationId xmlns:a16="http://schemas.microsoft.com/office/drawing/2014/main" id="{AB0626ED-D997-4864-9AD5-E153893BD2E9}"/>
               </a:ext>
             </a:extLst>
           </p:cNvPr>
@@ -3107,7 +3057,7 @@
           <p:cNvPr id="5" name="">
             <a:extLst xmlns:a="http://schemas.openxmlformats.org/drawingml/2006/main">
               <a:ext uri="{FF2B5EF4-FFF2-40B4-BE49-F238E27FC236}">
-                <a16:creationId xmlns:a16="http://schemas.microsoft.com/office/drawing/2014/main" id="{D68FAE56-78EA-4852-A310-748A427E2A4A}"/>
+                <a16:creationId xmlns:a16="http://schemas.microsoft.com/office/drawing/2014/main" id="{4BA436A0-1E4F-48DD-B3D0-0C6CA09BCCEC}"/>
               </a:ext>
             </a:extLst>
           </p:cNvPr>
@@ -3147,7 +3097,7 @@
                   <a:srgbClr val="004C3F"/>
                 </a:solidFill>
               </a:rPr>
-              <a:t>How is supplier amount determined?</a:t>
+              <a:t>How is inventory synchronized?</a:t>
             </a:r>
           </a:p>
         </p:txBody>
@@ -3157,7 +3107,7 @@
           <p:cNvPr id="6" name="">
             <a:extLst xmlns:a="http://schemas.openxmlformats.org/drawingml/2006/main">
               <a:ext uri="{FF2B5EF4-FFF2-40B4-BE49-F238E27FC236}">
-                <a16:creationId xmlns:a16="http://schemas.microsoft.com/office/drawing/2014/main" id="{04B2A1CF-D4D3-4CDF-A3CB-6353154D55A9}"/>
+                <a16:creationId xmlns:a16="http://schemas.microsoft.com/office/drawing/2014/main" id="{AA72810A-904B-4274-80BC-1B95DCF1E0C3}"/>
               </a:ext>
             </a:extLst>
           </p:cNvPr>
@@ -3197,7 +3147,7 @@
                   <a:srgbClr val="52615B"/>
                 </a:solidFill>
               </a:rPr>
-              <a:t>Use cost price, supplier shipping, taxes, and order/payment adjustments, not the full customer checkout total.</a:t>
+              <a:t>Supplier inventory available for online sales populates retailer availability. Retailer-side external mirrors should use product creation, update, and deletion webhooks.</a:t>
             </a:r>
           </a:p>
         </p:txBody>
@@ -3207,7 +3157,7 @@
           <p:cNvPr id="7" name="">
             <a:extLst xmlns:a="http://schemas.openxmlformats.org/drawingml/2006/main">
               <a:ext uri="{FF2B5EF4-FFF2-40B4-BE49-F238E27FC236}">
-                <a16:creationId xmlns:a16="http://schemas.microsoft.com/office/drawing/2014/main" id="{792D012D-5227-4684-8B4A-944B9781FE56}"/>
+                <a16:creationId xmlns:a16="http://schemas.microsoft.com/office/drawing/2014/main" id="{B9DB67EE-CCBD-46DA-96DB-40D083D44D57}"/>
               </a:ext>
             </a:extLst>
           </p:cNvPr>
@@ -3247,7 +3197,7 @@
                   <a:srgbClr val="004C3F"/>
                 </a:solidFill>
               </a:rPr>
-              <a:t>What if retailer discounts the order?</a:t>
+              <a:t>Can inventory diverge?</a:t>
             </a:r>
           </a:p>
         </p:txBody>
@@ -3257,7 +3207,7 @@
           <p:cNvPr id="8" name="">
             <a:extLst xmlns:a="http://schemas.openxmlformats.org/drawingml/2006/main">
               <a:ext uri="{FF2B5EF4-FFF2-40B4-BE49-F238E27FC236}">
-                <a16:creationId xmlns:a16="http://schemas.microsoft.com/office/drawing/2014/main" id="{C7FAAD60-E24D-4D70-936E-EFF667E15119}"/>
+                <a16:creationId xmlns:a16="http://schemas.microsoft.com/office/drawing/2014/main" id="{5EF7F283-53DB-402F-BC9F-A5735BF8D6A6}"/>
               </a:ext>
             </a:extLst>
           </p:cNvPr>
@@ -3297,7 +3247,7 @@
                   <a:srgbClr val="52615B"/>
                 </a:solidFill>
               </a:rPr>
-              <a:t>The customer pays less and retailer profit decreases. Supplier cost price does not change.</a:t>
+              <a:t>Temporarily, yes. Sync can lag, but Shopify checkout checks supplier inventory. Manual orders are an exception.</a:t>
             </a:r>
           </a:p>
         </p:txBody>
@@ -3307,7 +3257,7 @@
           <p:cNvPr id="9" name="">
             <a:extLst xmlns:a="http://schemas.openxmlformats.org/drawingml/2006/main">
               <a:ext uri="{FF2B5EF4-FFF2-40B4-BE49-F238E27FC236}">
-                <a16:creationId xmlns:a16="http://schemas.microsoft.com/office/drawing/2014/main" id="{E873161A-502E-4EBC-AD04-FE364AB4C3B8}"/>
+                <a16:creationId xmlns:a16="http://schemas.microsoft.com/office/drawing/2014/main" id="{3B15C836-56BE-4FAF-A805-279328BDB952}"/>
               </a:ext>
             </a:extLst>
           </p:cNvPr>
@@ -3347,7 +3297,7 @@
                   <a:srgbClr val="004C3F"/>
                 </a:solidFill>
               </a:rPr>
-              <a:t>Does supplier payout equal supplier order amount?</a:t>
+              <a:t>Must master data live on supplier side?</a:t>
             </a:r>
           </a:p>
         </p:txBody>
@@ -3357,7 +3307,7 @@
           <p:cNvPr id="10" name="">
             <a:extLst xmlns:a="http://schemas.openxmlformats.org/drawingml/2006/main">
               <a:ext uri="{FF2B5EF4-FFF2-40B4-BE49-F238E27FC236}">
-                <a16:creationId xmlns:a16="http://schemas.microsoft.com/office/drawing/2014/main" id="{1EF934E4-F748-4FAC-A23C-E8C02ADACCD5}"/>
+                <a16:creationId xmlns:a16="http://schemas.microsoft.com/office/drawing/2014/main" id="{76F722A0-8D87-473B-B024-F3203325E383}"/>
               </a:ext>
             </a:extLst>
           </p:cNvPr>
@@ -3397,7 +3347,7 @@
                   <a:srgbClr val="52615B"/>
                 </a:solidFill>
               </a:rPr>
-              <a:t>Not always one-to-one. Payouts can aggregate payments and reflect returns, refunds, reversals, shipping, tax, timing, and balance behavior.</a:t>
+              <a:t>The product must exist in the supplier Shopify store and be published to Collective. Upstream master data can still live in ERP or PIM.</a:t>
             </a:r>
           </a:p>
         </p:txBody>
@@ -3407,7 +3357,7 @@
           <p:cNvPr id="11" name="">
             <a:extLst xmlns:a="http://schemas.openxmlformats.org/drawingml/2006/main">
               <a:ext uri="{FF2B5EF4-FFF2-40B4-BE49-F238E27FC236}">
-                <a16:creationId xmlns:a16="http://schemas.microsoft.com/office/drawing/2014/main" id="{3A1365D1-845D-457B-8647-A31120685D53}"/>
+                <a16:creationId xmlns:a16="http://schemas.microsoft.com/office/drawing/2014/main" id="{F6628ABC-F8E3-44EC-A23B-C0356B67AE6E}"/>
               </a:ext>
             </a:extLst>
           </p:cNvPr>
@@ -3447,7 +3397,7 @@
                   <a:srgbClr val="004C3F"/>
                 </a:solidFill>
               </a:rPr>
-              <a:t>Where should integrations reconcile?</a:t>
+              <a:t>What if supplier changes product data?</a:t>
             </a:r>
           </a:p>
         </p:txBody>
@@ -3457,7 +3407,7 @@
           <p:cNvPr id="12" name="">
             <a:extLst xmlns:a="http://schemas.openxmlformats.org/drawingml/2006/main">
               <a:ext uri="{FF2B5EF4-FFF2-40B4-BE49-F238E27FC236}">
-                <a16:creationId xmlns:a16="http://schemas.microsoft.com/office/drawing/2014/main" id="{F60DCD40-5A6F-4EF9-BCFA-44741B621232}"/>
+                <a16:creationId xmlns:a16="http://schemas.microsoft.com/office/drawing/2014/main" id="{4F45482F-BEB4-47D2-AA5B-891C11FD4B69}"/>
               </a:ext>
             </a:extLst>
           </p:cNvPr>
@@ -3497,7 +3447,7 @@
                   <a:srgbClr val="52615B"/>
                 </a:solidFill>
               </a:rPr>
-              <a:t>Use supplier order, retailer order notes/custom attributes, and Shopify Payments adjustments for the associated order.</a:t>
+              <a:t>Inventory and cost price sync. Other content can sync depending on settings; retailer-side integrations should use product webhooks to mirror changes.</a:t>
             </a:r>
           </a:p>
         </p:txBody>
@@ -3507,7 +3457,7 @@
           <p:cNvPr id="13" name="">
             <a:extLst xmlns:a="http://schemas.openxmlformats.org/drawingml/2006/main">
               <a:ext uri="{FF2B5EF4-FFF2-40B4-BE49-F238E27FC236}">
-                <a16:creationId xmlns:a16="http://schemas.microsoft.com/office/drawing/2014/main" id="{D46D9E24-B957-4B58-AF86-C60BD546A888}"/>
+                <a16:creationId xmlns:a16="http://schemas.microsoft.com/office/drawing/2014/main" id="{0ED86A96-1EE2-44B9-B9C1-FAC3E390B4B1}"/>
               </a:ext>
             </a:extLst>
           </p:cNvPr>
@@ -3538,7 +3488,7 @@
           <p:cNvPr id="14" name="">
             <a:extLst xmlns:a="http://schemas.openxmlformats.org/drawingml/2006/main">
               <a:ext uri="{FF2B5EF4-FFF2-40B4-BE49-F238E27FC236}">
-                <a16:creationId xmlns:a16="http://schemas.microsoft.com/office/drawing/2014/main" id="{C30ABFBC-4C8D-487C-9B0E-30F73FDB307A}"/>
+                <a16:creationId xmlns:a16="http://schemas.microsoft.com/office/drawing/2014/main" id="{5B5D24F1-ADEB-4DD9-A123-C2B6E9988C1F}"/>
               </a:ext>
             </a:extLst>
           </p:cNvPr>
@@ -3550,7 +3500,7 @@
         <p:spPr>
           <a:xfrm xmlns:a="http://schemas.openxmlformats.org/drawingml/2006/main">
             <a:off x="609600" y="6419850"/>
-            <a:ext cx="7810500" cy="209550"/>
+            <a:ext cx="4000500" cy="209550"/>
           </a:xfrm>
           <a:prstGeom xmlns:a="http://schemas.openxmlformats.org/drawingml/2006/main" prst="rect">
             <a:avLst/>
@@ -3578,7 +3528,7 @@
                   <a:srgbClr val="52615B"/>
                 </a:solidFill>
               </a:rPr>
-              <a:t>Unofficial material | Source: products/shopify-collective/architecture.md</a:t>
+              <a:t>Shopify Collective</a:t>
             </a:r>
           </a:p>
         </p:txBody>
@@ -3588,7 +3538,7 @@
           <p:cNvPr id="15" name="">
             <a:extLst xmlns:a="http://schemas.openxmlformats.org/drawingml/2006/main">
               <a:ext uri="{FF2B5EF4-FFF2-40B4-BE49-F238E27FC236}">
-                <a16:creationId xmlns:a16="http://schemas.microsoft.com/office/drawing/2014/main" id="{14DE405C-04FE-452E-9E95-56F47CA953DE}"/>
+                <a16:creationId xmlns:a16="http://schemas.microsoft.com/office/drawing/2014/main" id="{5E81767A-834A-41F5-A25F-D39C5FD7F3D1}"/>
               </a:ext>
             </a:extLst>
           </p:cNvPr>
@@ -3636,7 +3586,7 @@
     </p:spTree>
     <p:extLst>
       <p:ext uri="{BB962C8B-B14F-4D97-AF65-F5344CB8AC3E}">
-        <p14:creationId xmlns:p14="http://schemas.microsoft.com/office/powerpoint/2010/main" val="902569557"/>
+        <p14:creationId xmlns:p14="http://schemas.microsoft.com/office/powerpoint/2010/main" val="475275336"/>
       </p:ext>
     </p:extLst>
   </p:cSld>
@@ -3667,7 +3617,7 @@
           <p:cNvPr id="1" name="">
             <a:extLst xmlns:a="http://schemas.openxmlformats.org/drawingml/2006/main">
               <a:ext uri="{FF2B5EF4-FFF2-40B4-BE49-F238E27FC236}">
-                <a16:creationId xmlns:a16="http://schemas.microsoft.com/office/drawing/2014/main" id="{678D6A32-1067-402F-BB11-0E21BC06F397}"/>
+                <a16:creationId xmlns:a16="http://schemas.microsoft.com/office/drawing/2014/main" id="{CBD55D33-FF72-4DBD-8726-E597127F41A3}"/>
               </a:ext>
             </a:extLst>
           </p:cNvPr>
@@ -3707,7 +3657,7 @@
                   <a:srgbClr val="004C3F"/>
                 </a:solidFill>
               </a:rPr>
-              <a:t>11 | Use safely</a:t>
+              <a:t>11 | FAQ: retailer changes</a:t>
             </a:r>
           </a:p>
         </p:txBody>
@@ -3717,7 +3667,7 @@
           <p:cNvPr id="2" name="">
             <a:extLst xmlns:a="http://schemas.openxmlformats.org/drawingml/2006/main">
               <a:ext uri="{FF2B5EF4-FFF2-40B4-BE49-F238E27FC236}">
-                <a16:creationId xmlns:a16="http://schemas.microsoft.com/office/drawing/2014/main" id="{35422B3E-5179-427E-9B25-99496DB0304D}"/>
+                <a16:creationId xmlns:a16="http://schemas.microsoft.com/office/drawing/2014/main" id="{819EF397-EBA0-4D69-8445-60379327F5F7}"/>
               </a:ext>
             </a:extLst>
           </p:cNvPr>
@@ -3757,7 +3707,7 @@
                   <a:srgbClr val="101820"/>
                 </a:solidFill>
               </a:rPr>
-              <a:t>Use the deck as a reading companion, not as official documentation</a:t>
+              <a:t>Retailer-side changes do not update supplier master data</a:t>
             </a:r>
           </a:p>
         </p:txBody>
@@ -3767,7 +3717,7 @@
           <p:cNvPr id="3" name="">
             <a:extLst xmlns:a="http://schemas.openxmlformats.org/drawingml/2006/main">
               <a:ext uri="{FF2B5EF4-FFF2-40B4-BE49-F238E27FC236}">
-                <a16:creationId xmlns:a16="http://schemas.microsoft.com/office/drawing/2014/main" id="{B6A090DE-3FE8-4E99-9088-2077AE47FDF2}"/>
+                <a16:creationId xmlns:a16="http://schemas.microsoft.com/office/drawing/2014/main" id="{89D8A37F-C86A-4DC5-948F-3CE4D5DD0E78}"/>
               </a:ext>
             </a:extLst>
           </p:cNvPr>
@@ -3807,7 +3757,7 @@
                   <a:srgbClr val="52615B"/>
                 </a:solidFill>
               </a:rPr>
-              <a:t>The Markdown source remains the canonical file in this repository.</a:t>
+              <a:t>Treat retailer store webhooks as retailer-store events, not proof that the supplier source product changed.</a:t>
             </a:r>
           </a:p>
         </p:txBody>
@@ -3817,7 +3767,7 @@
           <p:cNvPr id="4" name="">
             <a:extLst xmlns:a="http://schemas.openxmlformats.org/drawingml/2006/main">
               <a:ext uri="{FF2B5EF4-FFF2-40B4-BE49-F238E27FC236}">
-                <a16:creationId xmlns:a16="http://schemas.microsoft.com/office/drawing/2014/main" id="{CBCF084D-9D76-45CD-9F4A-7BD28CF52037}"/>
+                <a16:creationId xmlns:a16="http://schemas.microsoft.com/office/drawing/2014/main" id="{EECB1FD3-EA0F-4780-B6AB-0A7EAB8C36B0}"/>
               </a:ext>
             </a:extLst>
           </p:cNvPr>
@@ -3848,53 +3798,47 @@
           <p:cNvPr id="5" name="">
             <a:extLst xmlns:a="http://schemas.openxmlformats.org/drawingml/2006/main">
               <a:ext uri="{FF2B5EF4-FFF2-40B4-BE49-F238E27FC236}">
-                <a16:creationId xmlns:a16="http://schemas.microsoft.com/office/drawing/2014/main" id="{ABCE0B94-2FDF-40E5-8A0C-DC3C0CEB6A65}"/>
-              </a:ext>
-            </a:extLst>
-          </p:cNvPr>
-          <p:cNvSpPr>
-            <a:spLocks xmlns:a="http://schemas.openxmlformats.org/drawingml/2006/main" noGrp="1"/>
-          </p:cNvSpPr>
-          <p:nvPr/>
-        </p:nvSpPr>
-        <p:spPr>
-          <a:xfrm xmlns:a="http://schemas.openxmlformats.org/drawingml/2006/main">
-            <a:off x="609600" y="2781300"/>
-            <a:ext cx="5143500" cy="2476500"/>
-          </a:xfrm>
-          <a:prstGeom xmlns:a="http://schemas.openxmlformats.org/drawingml/2006/main" prst="roundRect">
-            <a:avLst>
-              <a:gd name="adj" fmla="val 3077"/>
-            </a:avLst>
-          </a:prstGeom>
-          <a:solidFill xmlns:a="http://schemas.openxmlformats.org/drawingml/2006/main">
-            <a:srgbClr val="E9F7EF"/>
-          </a:solidFill>
-          <a:ln xmlns:a="http://schemas.openxmlformats.org/drawingml/2006/main" w="9525">
-            <a:solidFill>
-              <a:srgbClr val="A6DFC0"/>
-            </a:solidFill>
-            <a:prstDash val="solid"/>
-          </a:ln>
-        </p:spPr>
-        <p:txBody>
-          <a:bodyPr xmlns:a="http://schemas.openxmlformats.org/drawingml/2006/main"/>
-          <a:lstStyle xmlns:a="http://schemas.openxmlformats.org/drawingml/2006/main"/>
-          <a:p xmlns:a="http://schemas.openxmlformats.org/drawingml/2006/main">
-            <a:pPr algn="ctr">
-              <a:defRPr sz="1950" b="1">
+                <a16:creationId xmlns:a16="http://schemas.microsoft.com/office/drawing/2014/main" id="{A8CE1309-0DF7-47AE-876C-8C8BB0C04012}"/>
+              </a:ext>
+            </a:extLst>
+          </p:cNvPr>
+          <p:cNvSpPr>
+            <a:spLocks xmlns:a="http://schemas.openxmlformats.org/drawingml/2006/main" noGrp="1"/>
+          </p:cNvSpPr>
+          <p:nvPr/>
+        </p:nvSpPr>
+        <p:spPr>
+          <a:xfrm xmlns:a="http://schemas.openxmlformats.org/drawingml/2006/main">
+            <a:off x="609600" y="2724150"/>
+            <a:ext cx="4953000" cy="361950"/>
+          </a:xfrm>
+          <a:prstGeom xmlns:a="http://schemas.openxmlformats.org/drawingml/2006/main" prst="rect">
+            <a:avLst/>
+          </a:prstGeom>
+          <a:noFill xmlns:a="http://schemas.openxmlformats.org/drawingml/2006/main"/>
+          <a:ln xmlns:a="http://schemas.openxmlformats.org/drawingml/2006/main" w="0">
+            <a:noFill/>
+            <a:prstDash val="solid"/>
+          </a:ln>
+        </p:spPr>
+        <p:txBody>
+          <a:bodyPr xmlns:a="http://schemas.openxmlformats.org/drawingml/2006/main"/>
+          <a:lstStyle xmlns:a="http://schemas.openxmlformats.org/drawingml/2006/main"/>
+          <a:p xmlns:a="http://schemas.openxmlformats.org/drawingml/2006/main">
+            <a:pPr algn="l">
+              <a:defRPr sz="1350" b="1">
                 <a:solidFill>
                   <a:srgbClr val="004C3F"/>
                 </a:solidFill>
               </a:defRPr>
             </a:pPr>
             <a:r>
-              <a:rPr sz="1950" b="1">
+              <a:rPr sz="1350" b="1">
                 <a:solidFill>
                   <a:srgbClr val="004C3F"/>
                 </a:solidFill>
               </a:rPr>
-              <a:t>Source of truth</a:t>
+              <a:t>What if retailer changes product data?</a:t>
             </a:r>
           </a:p>
         </p:txBody>
@@ -3904,47 +3848,47 @@
           <p:cNvPr id="6" name="">
             <a:extLst xmlns:a="http://schemas.openxmlformats.org/drawingml/2006/main">
               <a:ext uri="{FF2B5EF4-FFF2-40B4-BE49-F238E27FC236}">
-                <a16:creationId xmlns:a16="http://schemas.microsoft.com/office/drawing/2014/main" id="{7D312DE8-7DFC-4889-8380-9C4DDA28AE0D}"/>
-              </a:ext>
-            </a:extLst>
-          </p:cNvPr>
-          <p:cNvSpPr>
-            <a:spLocks xmlns:a="http://schemas.openxmlformats.org/drawingml/2006/main" noGrp="1"/>
-          </p:cNvSpPr>
-          <p:nvPr/>
-        </p:nvSpPr>
-        <p:spPr>
-          <a:xfrm xmlns:a="http://schemas.openxmlformats.org/drawingml/2006/main">
-            <a:off x="990600" y="3657600"/>
-            <a:ext cx="4381500" cy="1123950"/>
-          </a:xfrm>
-          <a:prstGeom xmlns:a="http://schemas.openxmlformats.org/drawingml/2006/main" prst="rect">
-            <a:avLst/>
-          </a:prstGeom>
-          <a:noFill xmlns:a="http://schemas.openxmlformats.org/drawingml/2006/main"/>
-          <a:ln xmlns:a="http://schemas.openxmlformats.org/drawingml/2006/main" w="0">
-            <a:noFill/>
-            <a:prstDash val="solid"/>
-          </a:ln>
-        </p:spPr>
-        <p:txBody>
-          <a:bodyPr xmlns:a="http://schemas.openxmlformats.org/drawingml/2006/main"/>
-          <a:lstStyle xmlns:a="http://schemas.openxmlformats.org/drawingml/2006/main"/>
-          <a:p xmlns:a="http://schemas.openxmlformats.org/drawingml/2006/main">
-            <a:pPr algn="ctr">
-              <a:defRPr sz="1500" b="0">
-                <a:solidFill>
-                  <a:srgbClr val="101820"/>
-                </a:solidFill>
-              </a:defRPr>
-            </a:pPr>
-            <a:r>
-              <a:rPr sz="1500" b="0">
-                <a:solidFill>
-                  <a:srgbClr val="101820"/>
-                </a:solidFill>
-              </a:rPr>
-              <a:t>products/shopify-collective/architecture.md holds the maintained English source and reference links.</a:t>
+                <a16:creationId xmlns:a16="http://schemas.microsoft.com/office/drawing/2014/main" id="{A981B73F-73BA-4515-B387-0CE7C9C29D0B}"/>
+              </a:ext>
+            </a:extLst>
+          </p:cNvPr>
+          <p:cNvSpPr>
+            <a:spLocks xmlns:a="http://schemas.openxmlformats.org/drawingml/2006/main" noGrp="1"/>
+          </p:cNvSpPr>
+          <p:nvPr/>
+        </p:nvSpPr>
+        <p:spPr>
+          <a:xfrm xmlns:a="http://schemas.openxmlformats.org/drawingml/2006/main">
+            <a:off x="609600" y="3124200"/>
+            <a:ext cx="4953000" cy="552450"/>
+          </a:xfrm>
+          <a:prstGeom xmlns:a="http://schemas.openxmlformats.org/drawingml/2006/main" prst="rect">
+            <a:avLst/>
+          </a:prstGeom>
+          <a:noFill xmlns:a="http://schemas.openxmlformats.org/drawingml/2006/main"/>
+          <a:ln xmlns:a="http://schemas.openxmlformats.org/drawingml/2006/main" w="0">
+            <a:noFill/>
+            <a:prstDash val="solid"/>
+          </a:ln>
+        </p:spPr>
+        <p:txBody>
+          <a:bodyPr xmlns:a="http://schemas.openxmlformats.org/drawingml/2006/main"/>
+          <a:lstStyle xmlns:a="http://schemas.openxmlformats.org/drawingml/2006/main"/>
+          <a:p xmlns:a="http://schemas.openxmlformats.org/drawingml/2006/main">
+            <a:pPr algn="l">
+              <a:defRPr sz="1088" b="0">
+                <a:solidFill>
+                  <a:srgbClr val="52615B"/>
+                </a:solidFill>
+              </a:defRPr>
+            </a:pPr>
+            <a:r>
+              <a:rPr sz="1088" b="0">
+                <a:solidFill>
+                  <a:srgbClr val="52615B"/>
+                </a:solidFill>
+              </a:rPr>
+              <a:t>Retailer edits do not update supplier source data. Supplier-managed fields remain supplier-controlled.</a:t>
             </a:r>
           </a:p>
         </p:txBody>
@@ -3954,53 +3898,47 @@
           <p:cNvPr id="7" name="">
             <a:extLst xmlns:a="http://schemas.openxmlformats.org/drawingml/2006/main">
               <a:ext uri="{FF2B5EF4-FFF2-40B4-BE49-F238E27FC236}">
-                <a16:creationId xmlns:a16="http://schemas.microsoft.com/office/drawing/2014/main" id="{C215F894-CF6E-44ED-9D7D-E04D56D00EE5}"/>
-              </a:ext>
-            </a:extLst>
-          </p:cNvPr>
-          <p:cNvSpPr>
-            <a:spLocks xmlns:a="http://schemas.openxmlformats.org/drawingml/2006/main" noGrp="1"/>
-          </p:cNvSpPr>
-          <p:nvPr/>
-        </p:nvSpPr>
-        <p:spPr>
-          <a:xfrm xmlns:a="http://schemas.openxmlformats.org/drawingml/2006/main">
-            <a:off x="6438900" y="2781300"/>
-            <a:ext cx="5143500" cy="2476500"/>
-          </a:xfrm>
-          <a:prstGeom xmlns:a="http://schemas.openxmlformats.org/drawingml/2006/main" prst="roundRect">
-            <a:avLst>
-              <a:gd name="adj" fmla="val 3077"/>
-            </a:avLst>
-          </a:prstGeom>
-          <a:solidFill xmlns:a="http://schemas.openxmlformats.org/drawingml/2006/main">
-            <a:srgbClr val="FFF7E6"/>
-          </a:solidFill>
-          <a:ln xmlns:a="http://schemas.openxmlformats.org/drawingml/2006/main" w="9525">
-            <a:solidFill>
-              <a:srgbClr val="F6C979"/>
-            </a:solidFill>
-            <a:prstDash val="solid"/>
-          </a:ln>
-        </p:spPr>
-        <p:txBody>
-          <a:bodyPr xmlns:a="http://schemas.openxmlformats.org/drawingml/2006/main"/>
-          <a:lstStyle xmlns:a="http://schemas.openxmlformats.org/drawingml/2006/main"/>
-          <a:p xmlns:a="http://schemas.openxmlformats.org/drawingml/2006/main">
-            <a:pPr algn="ctr">
-              <a:defRPr sz="1950" b="1">
-                <a:solidFill>
-                  <a:srgbClr val="D97706"/>
-                </a:solidFill>
-              </a:defRPr>
-            </a:pPr>
-            <a:r>
-              <a:rPr sz="1950" b="1">
-                <a:solidFill>
-                  <a:srgbClr val="D97706"/>
-                </a:solidFill>
-              </a:rPr>
-              <a:t>Disclaimer</a:t>
+                <a16:creationId xmlns:a16="http://schemas.microsoft.com/office/drawing/2014/main" id="{42722347-1D3C-4E1E-A7FB-51BEA90E0FA7}"/>
+              </a:ext>
+            </a:extLst>
+          </p:cNvPr>
+          <p:cNvSpPr>
+            <a:spLocks xmlns:a="http://schemas.openxmlformats.org/drawingml/2006/main" noGrp="1"/>
+          </p:cNvSpPr>
+          <p:nvPr/>
+        </p:nvSpPr>
+        <p:spPr>
+          <a:xfrm xmlns:a="http://schemas.openxmlformats.org/drawingml/2006/main">
+            <a:off x="6305550" y="2724150"/>
+            <a:ext cx="4953000" cy="361950"/>
+          </a:xfrm>
+          <a:prstGeom xmlns:a="http://schemas.openxmlformats.org/drawingml/2006/main" prst="rect">
+            <a:avLst/>
+          </a:prstGeom>
+          <a:noFill xmlns:a="http://schemas.openxmlformats.org/drawingml/2006/main"/>
+          <a:ln xmlns:a="http://schemas.openxmlformats.org/drawingml/2006/main" w="0">
+            <a:noFill/>
+            <a:prstDash val="solid"/>
+          </a:ln>
+        </p:spPr>
+        <p:txBody>
+          <a:bodyPr xmlns:a="http://schemas.openxmlformats.org/drawingml/2006/main"/>
+          <a:lstStyle xmlns:a="http://schemas.openxmlformats.org/drawingml/2006/main"/>
+          <a:p xmlns:a="http://schemas.openxmlformats.org/drawingml/2006/main">
+            <a:pPr algn="l">
+              <a:defRPr sz="1350" b="1">
+                <a:solidFill>
+                  <a:srgbClr val="004C3F"/>
+                </a:solidFill>
+              </a:defRPr>
+            </a:pPr>
+            <a:r>
+              <a:rPr sz="1350" b="1">
+                <a:solidFill>
+                  <a:srgbClr val="004C3F"/>
+                </a:solidFill>
+              </a:rPr>
+              <a:t>What if retailer changes price?</a:t>
             </a:r>
           </a:p>
         </p:txBody>
@@ -4010,47 +3948,47 @@
           <p:cNvPr id="8" name="">
             <a:extLst xmlns:a="http://schemas.openxmlformats.org/drawingml/2006/main">
               <a:ext uri="{FF2B5EF4-FFF2-40B4-BE49-F238E27FC236}">
-                <a16:creationId xmlns:a16="http://schemas.microsoft.com/office/drawing/2014/main" id="{29FADB6D-D15F-497C-8932-7140BFFBE72D}"/>
-              </a:ext>
-            </a:extLst>
-          </p:cNvPr>
-          <p:cNvSpPr>
-            <a:spLocks xmlns:a="http://schemas.openxmlformats.org/drawingml/2006/main" noGrp="1"/>
-          </p:cNvSpPr>
-          <p:nvPr/>
-        </p:nvSpPr>
-        <p:spPr>
-          <a:xfrm xmlns:a="http://schemas.openxmlformats.org/drawingml/2006/main">
-            <a:off x="6819900" y="3657600"/>
-            <a:ext cx="4381500" cy="1123950"/>
-          </a:xfrm>
-          <a:prstGeom xmlns:a="http://schemas.openxmlformats.org/drawingml/2006/main" prst="rect">
-            <a:avLst/>
-          </a:prstGeom>
-          <a:noFill xmlns:a="http://schemas.openxmlformats.org/drawingml/2006/main"/>
-          <a:ln xmlns:a="http://schemas.openxmlformats.org/drawingml/2006/main" w="0">
-            <a:noFill/>
-            <a:prstDash val="solid"/>
-          </a:ln>
-        </p:spPr>
-        <p:txBody>
-          <a:bodyPr xmlns:a="http://schemas.openxmlformats.org/drawingml/2006/main"/>
-          <a:lstStyle xmlns:a="http://schemas.openxmlformats.org/drawingml/2006/main"/>
-          <a:p xmlns:a="http://schemas.openxmlformats.org/drawingml/2006/main">
-            <a:pPr algn="ctr">
-              <a:defRPr sz="1500" b="0">
-                <a:solidFill>
-                  <a:srgbClr val="101820"/>
-                </a:solidFill>
-              </a:defRPr>
-            </a:pPr>
-            <a:r>
-              <a:rPr sz="1500" b="0">
-                <a:solidFill>
-                  <a:srgbClr val="101820"/>
-                </a:solidFill>
-              </a:rPr>
-              <a:t>This is not official Shopify documentation. Validate implementation decisions against Shopify docs and store behavior.</a:t>
+                <a16:creationId xmlns:a16="http://schemas.microsoft.com/office/drawing/2014/main" id="{ED1F1B09-2A71-45BB-B659-E70E97AD5776}"/>
+              </a:ext>
+            </a:extLst>
+          </p:cNvPr>
+          <p:cNvSpPr>
+            <a:spLocks xmlns:a="http://schemas.openxmlformats.org/drawingml/2006/main" noGrp="1"/>
+          </p:cNvSpPr>
+          <p:nvPr/>
+        </p:nvSpPr>
+        <p:spPr>
+          <a:xfrm xmlns:a="http://schemas.openxmlformats.org/drawingml/2006/main">
+            <a:off x="6305550" y="3124200"/>
+            <a:ext cx="4953000" cy="552450"/>
+          </a:xfrm>
+          <a:prstGeom xmlns:a="http://schemas.openxmlformats.org/drawingml/2006/main" prst="rect">
+            <a:avLst/>
+          </a:prstGeom>
+          <a:noFill xmlns:a="http://schemas.openxmlformats.org/drawingml/2006/main"/>
+          <a:ln xmlns:a="http://schemas.openxmlformats.org/drawingml/2006/main" w="0">
+            <a:noFill/>
+            <a:prstDash val="solid"/>
+          </a:ln>
+        </p:spPr>
+        <p:txBody>
+          <a:bodyPr xmlns:a="http://schemas.openxmlformats.org/drawingml/2006/main"/>
+          <a:lstStyle xmlns:a="http://schemas.openxmlformats.org/drawingml/2006/main"/>
+          <a:p xmlns:a="http://schemas.openxmlformats.org/drawingml/2006/main">
+            <a:pPr algn="l">
+              <a:defRPr sz="1088" b="0">
+                <a:solidFill>
+                  <a:srgbClr val="52615B"/>
+                </a:solidFill>
+              </a:defRPr>
+            </a:pPr>
+            <a:r>
+              <a:rPr sz="1088" b="0">
+                <a:solidFill>
+                  <a:srgbClr val="52615B"/>
+                </a:solidFill>
+              </a:rPr>
+              <a:t>Retailer can manage retail price unless retail price sync is enabled. Supplier cost price remains supplier-controlled.</a:t>
             </a:r>
           </a:p>
         </p:txBody>
@@ -4060,47 +3998,47 @@
           <p:cNvPr id="9" name="">
             <a:extLst xmlns:a="http://schemas.openxmlformats.org/drawingml/2006/main">
               <a:ext uri="{FF2B5EF4-FFF2-40B4-BE49-F238E27FC236}">
-                <a16:creationId xmlns:a16="http://schemas.microsoft.com/office/drawing/2014/main" id="{5B41683C-29E3-4A3D-9732-20658D9D5EE8}"/>
-              </a:ext>
-            </a:extLst>
-          </p:cNvPr>
-          <p:cNvSpPr>
-            <a:spLocks xmlns:a="http://schemas.openxmlformats.org/drawingml/2006/main" noGrp="1"/>
-          </p:cNvSpPr>
-          <p:nvPr/>
-        </p:nvSpPr>
-        <p:spPr>
-          <a:xfrm xmlns:a="http://schemas.openxmlformats.org/drawingml/2006/main">
-            <a:off x="1143000" y="5657850"/>
-            <a:ext cx="9906000" cy="323850"/>
-          </a:xfrm>
-          <a:prstGeom xmlns:a="http://schemas.openxmlformats.org/drawingml/2006/main" prst="rect">
-            <a:avLst/>
-          </a:prstGeom>
-          <a:noFill xmlns:a="http://schemas.openxmlformats.org/drawingml/2006/main"/>
-          <a:ln xmlns:a="http://schemas.openxmlformats.org/drawingml/2006/main" w="0">
-            <a:noFill/>
-            <a:prstDash val="solid"/>
-          </a:ln>
-        </p:spPr>
-        <p:txBody>
-          <a:bodyPr xmlns:a="http://schemas.openxmlformats.org/drawingml/2006/main"/>
-          <a:lstStyle xmlns:a="http://schemas.openxmlformats.org/drawingml/2006/main"/>
-          <a:p xmlns:a="http://schemas.openxmlformats.org/drawingml/2006/main">
-            <a:pPr algn="ctr">
-              <a:defRPr sz="1350" b="0">
-                <a:solidFill>
-                  <a:srgbClr val="52615B"/>
-                </a:solidFill>
-              </a:defRPr>
-            </a:pPr>
-            <a:r>
-              <a:rPr sz="1350" b="0">
-                <a:solidFill>
-                  <a:srgbClr val="52615B"/>
-                </a:solidFill>
-              </a:rPr>
-              <a:t>Update this PPTX whenever the source Markdown changes.</a:t>
+                <a16:creationId xmlns:a16="http://schemas.microsoft.com/office/drawing/2014/main" id="{60570A65-BC9E-4E91-8006-4D8175AC4B47}"/>
+              </a:ext>
+            </a:extLst>
+          </p:cNvPr>
+          <p:cNvSpPr>
+            <a:spLocks xmlns:a="http://schemas.openxmlformats.org/drawingml/2006/main" noGrp="1"/>
+          </p:cNvSpPr>
+          <p:nvPr/>
+        </p:nvSpPr>
+        <p:spPr>
+          <a:xfrm xmlns:a="http://schemas.openxmlformats.org/drawingml/2006/main">
+            <a:off x="609600" y="3829050"/>
+            <a:ext cx="4953000" cy="361950"/>
+          </a:xfrm>
+          <a:prstGeom xmlns:a="http://schemas.openxmlformats.org/drawingml/2006/main" prst="rect">
+            <a:avLst/>
+          </a:prstGeom>
+          <a:noFill xmlns:a="http://schemas.openxmlformats.org/drawingml/2006/main"/>
+          <a:ln xmlns:a="http://schemas.openxmlformats.org/drawingml/2006/main" w="0">
+            <a:noFill/>
+            <a:prstDash val="solid"/>
+          </a:ln>
+        </p:spPr>
+        <p:txBody>
+          <a:bodyPr xmlns:a="http://schemas.openxmlformats.org/drawingml/2006/main"/>
+          <a:lstStyle xmlns:a="http://schemas.openxmlformats.org/drawingml/2006/main"/>
+          <a:p xmlns:a="http://schemas.openxmlformats.org/drawingml/2006/main">
+            <a:pPr algn="l">
+              <a:defRPr sz="1350" b="1">
+                <a:solidFill>
+                  <a:srgbClr val="004C3F"/>
+                </a:solidFill>
+              </a:defRPr>
+            </a:pPr>
+            <a:r>
+              <a:rPr sz="1350" b="1">
+                <a:solidFill>
+                  <a:srgbClr val="004C3F"/>
+                </a:solidFill>
+              </a:rPr>
+              <a:t>What if retailer changes inventory?</a:t>
             </a:r>
           </a:p>
         </p:txBody>
@@ -4110,7 +4048,157 @@
           <p:cNvPr id="10" name="">
             <a:extLst xmlns:a="http://schemas.openxmlformats.org/drawingml/2006/main">
               <a:ext uri="{FF2B5EF4-FFF2-40B4-BE49-F238E27FC236}">
-                <a16:creationId xmlns:a16="http://schemas.microsoft.com/office/drawing/2014/main" id="{9F39CC2A-937E-44EA-8F97-FD224E0CDBCC}"/>
+                <a16:creationId xmlns:a16="http://schemas.microsoft.com/office/drawing/2014/main" id="{06B122D3-DE21-4FE0-B222-D3893B08E423}"/>
+              </a:ext>
+            </a:extLst>
+          </p:cNvPr>
+          <p:cNvSpPr>
+            <a:spLocks xmlns:a="http://schemas.openxmlformats.org/drawingml/2006/main" noGrp="1"/>
+          </p:cNvSpPr>
+          <p:nvPr/>
+        </p:nvSpPr>
+        <p:spPr>
+          <a:xfrm xmlns:a="http://schemas.openxmlformats.org/drawingml/2006/main">
+            <a:off x="609600" y="4229100"/>
+            <a:ext cx="4953000" cy="552450"/>
+          </a:xfrm>
+          <a:prstGeom xmlns:a="http://schemas.openxmlformats.org/drawingml/2006/main" prst="rect">
+            <a:avLst/>
+          </a:prstGeom>
+          <a:noFill xmlns:a="http://schemas.openxmlformats.org/drawingml/2006/main"/>
+          <a:ln xmlns:a="http://schemas.openxmlformats.org/drawingml/2006/main" w="0">
+            <a:noFill/>
+            <a:prstDash val="solid"/>
+          </a:ln>
+        </p:spPr>
+        <p:txBody>
+          <a:bodyPr xmlns:a="http://schemas.openxmlformats.org/drawingml/2006/main"/>
+          <a:lstStyle xmlns:a="http://schemas.openxmlformats.org/drawingml/2006/main"/>
+          <a:p xmlns:a="http://schemas.openxmlformats.org/drawingml/2006/main">
+            <a:pPr algn="l">
+              <a:defRPr sz="1088" b="0">
+                <a:solidFill>
+                  <a:srgbClr val="52615B"/>
+                </a:solidFill>
+              </a:defRPr>
+            </a:pPr>
+            <a:r>
+              <a:rPr sz="1088" b="0">
+                <a:solidFill>
+                  <a:srgbClr val="52615B"/>
+                </a:solidFill>
+              </a:rPr>
+              <a:t>Imported Collective inventory is supplier-managed and read-only in the retailer admin.</a:t>
+            </a:r>
+          </a:p>
+        </p:txBody>
+      </p:sp>
+      <p:sp>
+        <p:nvSpPr>
+          <p:cNvPr id="11" name="">
+            <a:extLst xmlns:a="http://schemas.openxmlformats.org/drawingml/2006/main">
+              <a:ext uri="{FF2B5EF4-FFF2-40B4-BE49-F238E27FC236}">
+                <a16:creationId xmlns:a16="http://schemas.microsoft.com/office/drawing/2014/main" id="{AAEE9798-6AA5-4D28-9BC6-FB25A93580E2}"/>
+              </a:ext>
+            </a:extLst>
+          </p:cNvPr>
+          <p:cNvSpPr>
+            <a:spLocks xmlns:a="http://schemas.openxmlformats.org/drawingml/2006/main" noGrp="1"/>
+          </p:cNvSpPr>
+          <p:nvPr/>
+        </p:nvSpPr>
+        <p:spPr>
+          <a:xfrm xmlns:a="http://schemas.openxmlformats.org/drawingml/2006/main">
+            <a:off x="6305550" y="3829050"/>
+            <a:ext cx="4953000" cy="361950"/>
+          </a:xfrm>
+          <a:prstGeom xmlns:a="http://schemas.openxmlformats.org/drawingml/2006/main" prst="rect">
+            <a:avLst/>
+          </a:prstGeom>
+          <a:noFill xmlns:a="http://schemas.openxmlformats.org/drawingml/2006/main"/>
+          <a:ln xmlns:a="http://schemas.openxmlformats.org/drawingml/2006/main" w="0">
+            <a:noFill/>
+            <a:prstDash val="solid"/>
+          </a:ln>
+        </p:spPr>
+        <p:txBody>
+          <a:bodyPr xmlns:a="http://schemas.openxmlformats.org/drawingml/2006/main"/>
+          <a:lstStyle xmlns:a="http://schemas.openxmlformats.org/drawingml/2006/main"/>
+          <a:p xmlns:a="http://schemas.openxmlformats.org/drawingml/2006/main">
+            <a:pPr algn="l">
+              <a:defRPr sz="1350" b="1">
+                <a:solidFill>
+                  <a:srgbClr val="004C3F"/>
+                </a:solidFill>
+              </a:defRPr>
+            </a:pPr>
+            <a:r>
+              <a:rPr sz="1350" b="1">
+                <a:solidFill>
+                  <a:srgbClr val="004C3F"/>
+                </a:solidFill>
+              </a:rPr>
+              <a:t>Which webhook matters?</a:t>
+            </a:r>
+          </a:p>
+        </p:txBody>
+      </p:sp>
+      <p:sp>
+        <p:nvSpPr>
+          <p:cNvPr id="12" name="">
+            <a:extLst xmlns:a="http://schemas.openxmlformats.org/drawingml/2006/main">
+              <a:ext uri="{FF2B5EF4-FFF2-40B4-BE49-F238E27FC236}">
+                <a16:creationId xmlns:a16="http://schemas.microsoft.com/office/drawing/2014/main" id="{7D169BBB-D482-48D6-B7CE-5B0AE097486A}"/>
+              </a:ext>
+            </a:extLst>
+          </p:cNvPr>
+          <p:cNvSpPr>
+            <a:spLocks xmlns:a="http://schemas.openxmlformats.org/drawingml/2006/main" noGrp="1"/>
+          </p:cNvSpPr>
+          <p:nvPr/>
+        </p:nvSpPr>
+        <p:spPr>
+          <a:xfrm xmlns:a="http://schemas.openxmlformats.org/drawingml/2006/main">
+            <a:off x="6305550" y="4229100"/>
+            <a:ext cx="4953000" cy="552450"/>
+          </a:xfrm>
+          <a:prstGeom xmlns:a="http://schemas.openxmlformats.org/drawingml/2006/main" prst="rect">
+            <a:avLst/>
+          </a:prstGeom>
+          <a:noFill xmlns:a="http://schemas.openxmlformats.org/drawingml/2006/main"/>
+          <a:ln xmlns:a="http://schemas.openxmlformats.org/drawingml/2006/main" w="0">
+            <a:noFill/>
+            <a:prstDash val="solid"/>
+          </a:ln>
+        </p:spPr>
+        <p:txBody>
+          <a:bodyPr xmlns:a="http://schemas.openxmlformats.org/drawingml/2006/main"/>
+          <a:lstStyle xmlns:a="http://schemas.openxmlformats.org/drawingml/2006/main"/>
+          <a:p xmlns:a="http://schemas.openxmlformats.org/drawingml/2006/main">
+            <a:pPr algn="l">
+              <a:defRPr sz="1088" b="0">
+                <a:solidFill>
+                  <a:srgbClr val="52615B"/>
+                </a:solidFill>
+              </a:defRPr>
+            </a:pPr>
+            <a:r>
+              <a:rPr sz="1088" b="0">
+                <a:solidFill>
+                  <a:srgbClr val="52615B"/>
+                </a:solidFill>
+              </a:rPr>
+              <a:t>Use product webhooks for retailer-store product changes, order webhooks for orders, and return/refund webhooks for return-related financial changes.</a:t>
+            </a:r>
+          </a:p>
+        </p:txBody>
+      </p:sp>
+      <p:sp>
+        <p:nvSpPr>
+          <p:cNvPr id="13" name="">
+            <a:extLst xmlns:a="http://schemas.openxmlformats.org/drawingml/2006/main">
+              <a:ext uri="{FF2B5EF4-FFF2-40B4-BE49-F238E27FC236}">
+                <a16:creationId xmlns:a16="http://schemas.microsoft.com/office/drawing/2014/main" id="{19CA9E70-04E9-4F54-8719-C8DB07441B19}"/>
               </a:ext>
             </a:extLst>
           </p:cNvPr>
@@ -4138,10 +4226,10 @@
       </p:sp>
       <p:sp>
         <p:nvSpPr>
-          <p:cNvPr id="11" name="">
-            <a:extLst xmlns:a="http://schemas.openxmlformats.org/drawingml/2006/main">
-              <a:ext uri="{FF2B5EF4-FFF2-40B4-BE49-F238E27FC236}">
-                <a16:creationId xmlns:a16="http://schemas.microsoft.com/office/drawing/2014/main" id="{50A987FA-DCCB-4DDB-8106-CF8E0201B82A}"/>
+          <p:cNvPr id="14" name="">
+            <a:extLst xmlns:a="http://schemas.openxmlformats.org/drawingml/2006/main">
+              <a:ext uri="{FF2B5EF4-FFF2-40B4-BE49-F238E27FC236}">
+                <a16:creationId xmlns:a16="http://schemas.microsoft.com/office/drawing/2014/main" id="{5231707B-244F-4D47-B994-7554E7AABBA3}"/>
               </a:ext>
             </a:extLst>
           </p:cNvPr>
@@ -4153,7 +4241,7 @@
         <p:spPr>
           <a:xfrm xmlns:a="http://schemas.openxmlformats.org/drawingml/2006/main">
             <a:off x="609600" y="6419850"/>
-            <a:ext cx="7810500" cy="209550"/>
+            <a:ext cx="4000500" cy="209550"/>
           </a:xfrm>
           <a:prstGeom xmlns:a="http://schemas.openxmlformats.org/drawingml/2006/main" prst="rect">
             <a:avLst/>
@@ -4181,17 +4269,17 @@
                   <a:srgbClr val="52615B"/>
                 </a:solidFill>
               </a:rPr>
-              <a:t>Unofficial material | Source: products/shopify-collective/architecture.md</a:t>
-            </a:r>
-          </a:p>
-        </p:txBody>
-      </p:sp>
-      <p:sp>
-        <p:nvSpPr>
-          <p:cNvPr id="12" name="">
-            <a:extLst xmlns:a="http://schemas.openxmlformats.org/drawingml/2006/main">
-              <a:ext uri="{FF2B5EF4-FFF2-40B4-BE49-F238E27FC236}">
-                <a16:creationId xmlns:a16="http://schemas.microsoft.com/office/drawing/2014/main" id="{86CBD613-EDF2-4ACE-BFF1-693CED060364}"/>
+              <a:t>Shopify Collective</a:t>
+            </a:r>
+          </a:p>
+        </p:txBody>
+      </p:sp>
+      <p:sp>
+        <p:nvSpPr>
+          <p:cNvPr id="15" name="">
+            <a:extLst xmlns:a="http://schemas.openxmlformats.org/drawingml/2006/main">
+              <a:ext uri="{FF2B5EF4-FFF2-40B4-BE49-F238E27FC236}">
+                <a16:creationId xmlns:a16="http://schemas.microsoft.com/office/drawing/2014/main" id="{A3F7A402-48DD-4C0E-9CA4-8B1AA4DC3DFE}"/>
               </a:ext>
             </a:extLst>
           </p:cNvPr>
@@ -4239,7 +4327,7 @@
     </p:spTree>
     <p:extLst>
       <p:ext uri="{BB962C8B-B14F-4D97-AF65-F5344CB8AC3E}">
-        <p14:creationId xmlns:p14="http://schemas.microsoft.com/office/powerpoint/2010/main" val="1478840302"/>
+        <p14:creationId xmlns:p14="http://schemas.microsoft.com/office/powerpoint/2010/main" val="477036347"/>
       </p:ext>
     </p:extLst>
   </p:cSld>
@@ -4270,7 +4358,7 @@
           <p:cNvPr id="1" name="">
             <a:extLst xmlns:a="http://schemas.openxmlformats.org/drawingml/2006/main">
               <a:ext uri="{FF2B5EF4-FFF2-40B4-BE49-F238E27FC236}">
-                <a16:creationId xmlns:a16="http://schemas.microsoft.com/office/drawing/2014/main" id="{ECBF8480-F2E0-4794-918E-DDA9E0FC0115}"/>
+                <a16:creationId xmlns:a16="http://schemas.microsoft.com/office/drawing/2014/main" id="{33183F6D-3A17-4B81-AB1B-2AF38F9546F8}"/>
               </a:ext>
             </a:extLst>
           </p:cNvPr>
@@ -4320,7 +4408,7 @@
           <p:cNvPr id="2" name="">
             <a:extLst xmlns:a="http://schemas.openxmlformats.org/drawingml/2006/main">
               <a:ext uri="{FF2B5EF4-FFF2-40B4-BE49-F238E27FC236}">
-                <a16:creationId xmlns:a16="http://schemas.microsoft.com/office/drawing/2014/main" id="{1FA8C1B0-7047-493A-B8BB-45795F15E692}"/>
+                <a16:creationId xmlns:a16="http://schemas.microsoft.com/office/drawing/2014/main" id="{E6E37C38-04D8-45C5-977C-842C8A3E832F}"/>
               </a:ext>
             </a:extLst>
           </p:cNvPr>
@@ -4370,7 +4458,7 @@
           <p:cNvPr id="3" name="">
             <a:extLst xmlns:a="http://schemas.openxmlformats.org/drawingml/2006/main">
               <a:ext uri="{FF2B5EF4-FFF2-40B4-BE49-F238E27FC236}">
-                <a16:creationId xmlns:a16="http://schemas.microsoft.com/office/drawing/2014/main" id="{3B425A63-7FCA-402A-BA7B-FCD852A29E0B}"/>
+                <a16:creationId xmlns:a16="http://schemas.microsoft.com/office/drawing/2014/main" id="{8A0EDC0A-D98D-4101-9687-5AFEBD50DDDA}"/>
               </a:ext>
             </a:extLst>
           </p:cNvPr>
@@ -4420,7 +4508,7 @@
           <p:cNvPr id="4" name="">
             <a:extLst xmlns:a="http://schemas.openxmlformats.org/drawingml/2006/main">
               <a:ext uri="{FF2B5EF4-FFF2-40B4-BE49-F238E27FC236}">
-                <a16:creationId xmlns:a16="http://schemas.microsoft.com/office/drawing/2014/main" id="{D5093F5E-6F4C-46D4-97AF-B568CD92D0BA}"/>
+                <a16:creationId xmlns:a16="http://schemas.microsoft.com/office/drawing/2014/main" id="{86448220-D54C-4324-87E1-E2494B33A889}"/>
               </a:ext>
             </a:extLst>
           </p:cNvPr>
@@ -4451,7 +4539,7 @@
           <p:cNvPr id="5" name="">
             <a:extLst xmlns:a="http://schemas.openxmlformats.org/drawingml/2006/main">
               <a:ext uri="{FF2B5EF4-FFF2-40B4-BE49-F238E27FC236}">
-                <a16:creationId xmlns:a16="http://schemas.microsoft.com/office/drawing/2014/main" id="{11308F7A-B29E-453A-BA38-76274B3A4B17}"/>
+                <a16:creationId xmlns:a16="http://schemas.microsoft.com/office/drawing/2014/main" id="{A3096BFC-F118-4253-9ECE-21DABD7C3CF6}"/>
               </a:ext>
             </a:extLst>
           </p:cNvPr>
@@ -4507,7 +4595,7 @@
           <p:cNvPr id="6" name="">
             <a:extLst xmlns:a="http://schemas.openxmlformats.org/drawingml/2006/main">
               <a:ext uri="{FF2B5EF4-FFF2-40B4-BE49-F238E27FC236}">
-                <a16:creationId xmlns:a16="http://schemas.microsoft.com/office/drawing/2014/main" id="{1FF9B7D1-26FE-49E1-A32E-49A9F6EB1885}"/>
+                <a16:creationId xmlns:a16="http://schemas.microsoft.com/office/drawing/2014/main" id="{64C31B96-DEB1-4BEB-B336-0B6F99A25FE0}"/>
               </a:ext>
             </a:extLst>
           </p:cNvPr>
@@ -4557,7 +4645,7 @@
           <p:cNvPr id="7" name="">
             <a:extLst xmlns:a="http://schemas.openxmlformats.org/drawingml/2006/main">
               <a:ext uri="{FF2B5EF4-FFF2-40B4-BE49-F238E27FC236}">
-                <a16:creationId xmlns:a16="http://schemas.microsoft.com/office/drawing/2014/main" id="{70F8C04E-B0DF-4659-BFA6-8F4A573B9A62}"/>
+                <a16:creationId xmlns:a16="http://schemas.microsoft.com/office/drawing/2014/main" id="{C70C1265-ABF1-4F2A-B226-8DFB2B6D2218}"/>
               </a:ext>
             </a:extLst>
           </p:cNvPr>
@@ -4613,7 +4701,7 @@
           <p:cNvPr id="8" name="">
             <a:extLst xmlns:a="http://schemas.openxmlformats.org/drawingml/2006/main">
               <a:ext uri="{FF2B5EF4-FFF2-40B4-BE49-F238E27FC236}">
-                <a16:creationId xmlns:a16="http://schemas.microsoft.com/office/drawing/2014/main" id="{EE77F5B7-3976-4357-9561-D74EC89990FE}"/>
+                <a16:creationId xmlns:a16="http://schemas.microsoft.com/office/drawing/2014/main" id="{1F996253-6716-42CF-BD21-FE205AB8B4CB}"/>
               </a:ext>
             </a:extLst>
           </p:cNvPr>
@@ -4663,7 +4751,7 @@
           <p:cNvPr id="9" name="">
             <a:extLst xmlns:a="http://schemas.openxmlformats.org/drawingml/2006/main">
               <a:ext uri="{FF2B5EF4-FFF2-40B4-BE49-F238E27FC236}">
-                <a16:creationId xmlns:a16="http://schemas.microsoft.com/office/drawing/2014/main" id="{3FE6ADE5-2C9D-41BE-8FDB-3CD2CDFF92CF}"/>
+                <a16:creationId xmlns:a16="http://schemas.microsoft.com/office/drawing/2014/main" id="{E2ED8BF9-41E0-4764-A621-8C2FE61EB889}"/>
               </a:ext>
             </a:extLst>
           </p:cNvPr>
@@ -4719,7 +4807,7 @@
           <p:cNvPr id="10" name="">
             <a:extLst xmlns:a="http://schemas.openxmlformats.org/drawingml/2006/main">
               <a:ext uri="{FF2B5EF4-FFF2-40B4-BE49-F238E27FC236}">
-                <a16:creationId xmlns:a16="http://schemas.microsoft.com/office/drawing/2014/main" id="{469B6480-F16A-446F-86C9-701B16D70360}"/>
+                <a16:creationId xmlns:a16="http://schemas.microsoft.com/office/drawing/2014/main" id="{BE96DFFB-19DE-4414-84F2-EBAEDCDD30FE}"/>
               </a:ext>
             </a:extLst>
           </p:cNvPr>
@@ -4769,7 +4857,7 @@
           <p:cNvPr id="11" name="">
             <a:extLst xmlns:a="http://schemas.openxmlformats.org/drawingml/2006/main">
               <a:ext uri="{FF2B5EF4-FFF2-40B4-BE49-F238E27FC236}">
-                <a16:creationId xmlns:a16="http://schemas.microsoft.com/office/drawing/2014/main" id="{D60E9017-1293-4911-A59A-33AC019622AB}"/>
+                <a16:creationId xmlns:a16="http://schemas.microsoft.com/office/drawing/2014/main" id="{F2AF804F-E543-43E0-BB2D-3EC8C2BBBD10}"/>
               </a:ext>
             </a:extLst>
           </p:cNvPr>
@@ -4800,7 +4888,7 @@
           <p:cNvPr id="12" name="">
             <a:extLst xmlns:a="http://schemas.openxmlformats.org/drawingml/2006/main">
               <a:ext uri="{FF2B5EF4-FFF2-40B4-BE49-F238E27FC236}">
-                <a16:creationId xmlns:a16="http://schemas.microsoft.com/office/drawing/2014/main" id="{638B3EBE-6412-4E2F-A44B-82F6B45E7B88}"/>
+                <a16:creationId xmlns:a16="http://schemas.microsoft.com/office/drawing/2014/main" id="{0E0D9A1F-3553-4D00-A056-A3461747BA50}"/>
               </a:ext>
             </a:extLst>
           </p:cNvPr>
@@ -4812,7 +4900,7 @@
         <p:spPr>
           <a:xfrm xmlns:a="http://schemas.openxmlformats.org/drawingml/2006/main">
             <a:off x="609600" y="6419850"/>
-            <a:ext cx="7810500" cy="209550"/>
+            <a:ext cx="4000500" cy="209550"/>
           </a:xfrm>
           <a:prstGeom xmlns:a="http://schemas.openxmlformats.org/drawingml/2006/main" prst="rect">
             <a:avLst/>
@@ -4840,7 +4928,7 @@
                   <a:srgbClr val="52615B"/>
                 </a:solidFill>
               </a:rPr>
-              <a:t>Unofficial material | Source: products/shopify-collective/architecture.md</a:t>
+              <a:t>Shopify Collective</a:t>
             </a:r>
           </a:p>
         </p:txBody>
@@ -4850,7 +4938,7 @@
           <p:cNvPr id="13" name="">
             <a:extLst xmlns:a="http://schemas.openxmlformats.org/drawingml/2006/main">
               <a:ext uri="{FF2B5EF4-FFF2-40B4-BE49-F238E27FC236}">
-                <a16:creationId xmlns:a16="http://schemas.microsoft.com/office/drawing/2014/main" id="{B243D94A-3559-466E-A565-9DA2CC7F6B8A}"/>
+                <a16:creationId xmlns:a16="http://schemas.microsoft.com/office/drawing/2014/main" id="{5FA39913-EC94-4A9D-9E51-6E93907B9910}"/>
               </a:ext>
             </a:extLst>
           </p:cNvPr>
@@ -4898,7 +4986,7 @@
     </p:spTree>
     <p:extLst>
       <p:ext uri="{BB962C8B-B14F-4D97-AF65-F5344CB8AC3E}">
-        <p14:creationId xmlns:p14="http://schemas.microsoft.com/office/powerpoint/2010/main" val="1774876062"/>
+        <p14:creationId xmlns:p14="http://schemas.microsoft.com/office/powerpoint/2010/main" val="138672461"/>
       </p:ext>
     </p:extLst>
   </p:cSld>
@@ -4929,7 +5017,7 @@
           <p:cNvPr id="1" name="">
             <a:extLst xmlns:a="http://schemas.openxmlformats.org/drawingml/2006/main">
               <a:ext uri="{FF2B5EF4-FFF2-40B4-BE49-F238E27FC236}">
-                <a16:creationId xmlns:a16="http://schemas.microsoft.com/office/drawing/2014/main" id="{5A1542AC-B252-4E74-B6D1-A9569AAAA2F9}"/>
+                <a16:creationId xmlns:a16="http://schemas.microsoft.com/office/drawing/2014/main" id="{B8D8B57C-53A1-42EC-8FD4-47B076A1CE8C}"/>
               </a:ext>
             </a:extLst>
           </p:cNvPr>
@@ -4979,7 +5067,7 @@
           <p:cNvPr id="2" name="">
             <a:extLst xmlns:a="http://schemas.openxmlformats.org/drawingml/2006/main">
               <a:ext uri="{FF2B5EF4-FFF2-40B4-BE49-F238E27FC236}">
-                <a16:creationId xmlns:a16="http://schemas.microsoft.com/office/drawing/2014/main" id="{48A8293D-15F8-4FA7-95DD-473BF6E41E3A}"/>
+                <a16:creationId xmlns:a16="http://schemas.microsoft.com/office/drawing/2014/main" id="{AD8654A7-4CA9-4406-B274-DA9259A127B2}"/>
               </a:ext>
             </a:extLst>
           </p:cNvPr>
@@ -5029,7 +5117,7 @@
           <p:cNvPr id="3" name="">
             <a:extLst xmlns:a="http://schemas.openxmlformats.org/drawingml/2006/main">
               <a:ext uri="{FF2B5EF4-FFF2-40B4-BE49-F238E27FC236}">
-                <a16:creationId xmlns:a16="http://schemas.microsoft.com/office/drawing/2014/main" id="{BE6D570F-46ED-4E12-98E8-591EA2BFF195}"/>
+                <a16:creationId xmlns:a16="http://schemas.microsoft.com/office/drawing/2014/main" id="{50EE7C17-D858-42D4-8041-C90F7F4A78EF}"/>
               </a:ext>
             </a:extLst>
           </p:cNvPr>
@@ -5079,7 +5167,7 @@
           <p:cNvPr id="4" name="">
             <a:extLst xmlns:a="http://schemas.openxmlformats.org/drawingml/2006/main">
               <a:ext uri="{FF2B5EF4-FFF2-40B4-BE49-F238E27FC236}">
-                <a16:creationId xmlns:a16="http://schemas.microsoft.com/office/drawing/2014/main" id="{830489C2-9295-4DA7-AB70-A8DB5CF360A4}"/>
+                <a16:creationId xmlns:a16="http://schemas.microsoft.com/office/drawing/2014/main" id="{05A2C9F7-AAB5-4E4E-B36A-B807914F5535}"/>
               </a:ext>
             </a:extLst>
           </p:cNvPr>
@@ -5110,7 +5198,7 @@
           <p:cNvPr id="5" name="">
             <a:extLst xmlns:a="http://schemas.openxmlformats.org/drawingml/2006/main">
               <a:ext uri="{FF2B5EF4-FFF2-40B4-BE49-F238E27FC236}">
-                <a16:creationId xmlns:a16="http://schemas.microsoft.com/office/drawing/2014/main" id="{F63BFBF0-A2BD-4EBA-9366-EAF7866A81FC}"/>
+                <a16:creationId xmlns:a16="http://schemas.microsoft.com/office/drawing/2014/main" id="{40501B0F-FE40-4439-B826-046E05335D18}"/>
               </a:ext>
             </a:extLst>
           </p:cNvPr>
@@ -5166,7 +5254,7 @@
           <p:cNvPr id="6" name="">
             <a:extLst xmlns:a="http://schemas.openxmlformats.org/drawingml/2006/main">
               <a:ext uri="{FF2B5EF4-FFF2-40B4-BE49-F238E27FC236}">
-                <a16:creationId xmlns:a16="http://schemas.microsoft.com/office/drawing/2014/main" id="{83D1A1BA-0ECE-46AA-8E09-0D62CB574019}"/>
+                <a16:creationId xmlns:a16="http://schemas.microsoft.com/office/drawing/2014/main" id="{BB4A69AD-DC6E-41B6-9F03-37C505E458EA}"/>
               </a:ext>
             </a:extLst>
           </p:cNvPr>
@@ -5216,7 +5304,7 @@
           <p:cNvPr id="7" name="">
             <a:extLst xmlns:a="http://schemas.openxmlformats.org/drawingml/2006/main">
               <a:ext uri="{FF2B5EF4-FFF2-40B4-BE49-F238E27FC236}">
-                <a16:creationId xmlns:a16="http://schemas.microsoft.com/office/drawing/2014/main" id="{1FF2658E-F1FA-4599-B27E-AE8BD3DD3834}"/>
+                <a16:creationId xmlns:a16="http://schemas.microsoft.com/office/drawing/2014/main" id="{075F0441-D71B-4EA9-A775-1143FDFDB4E3}"/>
               </a:ext>
             </a:extLst>
           </p:cNvPr>
@@ -5266,7 +5354,7 @@
           <p:cNvPr id="8" name="">
             <a:extLst xmlns:a="http://schemas.openxmlformats.org/drawingml/2006/main">
               <a:ext uri="{FF2B5EF4-FFF2-40B4-BE49-F238E27FC236}">
-                <a16:creationId xmlns:a16="http://schemas.microsoft.com/office/drawing/2014/main" id="{70EF97DD-62D1-4045-8902-773E62BEC082}"/>
+                <a16:creationId xmlns:a16="http://schemas.microsoft.com/office/drawing/2014/main" id="{FBE37360-37C3-4646-827F-03B16B363B55}"/>
               </a:ext>
             </a:extLst>
           </p:cNvPr>
@@ -5322,7 +5410,7 @@
           <p:cNvPr id="9" name="">
             <a:extLst xmlns:a="http://schemas.openxmlformats.org/drawingml/2006/main">
               <a:ext uri="{FF2B5EF4-FFF2-40B4-BE49-F238E27FC236}">
-                <a16:creationId xmlns:a16="http://schemas.microsoft.com/office/drawing/2014/main" id="{BECED43C-63E5-44E8-B41E-6548D443BC5B}"/>
+                <a16:creationId xmlns:a16="http://schemas.microsoft.com/office/drawing/2014/main" id="{BE858A6A-9042-4E57-9D2E-B5F39826E880}"/>
               </a:ext>
             </a:extLst>
           </p:cNvPr>
@@ -5372,7 +5460,7 @@
           <p:cNvPr id="10" name="">
             <a:extLst xmlns:a="http://schemas.openxmlformats.org/drawingml/2006/main">
               <a:ext uri="{FF2B5EF4-FFF2-40B4-BE49-F238E27FC236}">
-                <a16:creationId xmlns:a16="http://schemas.microsoft.com/office/drawing/2014/main" id="{FB244DE1-E838-4335-B867-0741563AE80E}"/>
+                <a16:creationId xmlns:a16="http://schemas.microsoft.com/office/drawing/2014/main" id="{C754059F-9D8B-4C30-9288-EBD3F5CF4943}"/>
               </a:ext>
             </a:extLst>
           </p:cNvPr>
@@ -5422,7 +5510,7 @@
           <p:cNvPr id="11" name="">
             <a:extLst xmlns:a="http://schemas.openxmlformats.org/drawingml/2006/main">
               <a:ext uri="{FF2B5EF4-FFF2-40B4-BE49-F238E27FC236}">
-                <a16:creationId xmlns:a16="http://schemas.microsoft.com/office/drawing/2014/main" id="{7EEC9FC6-F169-45A0-9929-22A52862FC78}"/>
+                <a16:creationId xmlns:a16="http://schemas.microsoft.com/office/drawing/2014/main" id="{F36C218B-5F18-498C-9B47-4554CC7C8FD6}"/>
               </a:ext>
             </a:extLst>
           </p:cNvPr>
@@ -5478,7 +5566,7 @@
           <p:cNvPr id="12" name="">
             <a:extLst xmlns:a="http://schemas.openxmlformats.org/drawingml/2006/main">
               <a:ext uri="{FF2B5EF4-FFF2-40B4-BE49-F238E27FC236}">
-                <a16:creationId xmlns:a16="http://schemas.microsoft.com/office/drawing/2014/main" id="{A7594968-9CD3-439D-AB1B-AC321049A4CC}"/>
+                <a16:creationId xmlns:a16="http://schemas.microsoft.com/office/drawing/2014/main" id="{63102D52-F8D4-4093-BFA1-0859B1914359}"/>
               </a:ext>
             </a:extLst>
           </p:cNvPr>
@@ -5528,7 +5616,7 @@
           <p:cNvPr id="13" name="">
             <a:extLst xmlns:a="http://schemas.openxmlformats.org/drawingml/2006/main">
               <a:ext uri="{FF2B5EF4-FFF2-40B4-BE49-F238E27FC236}">
-                <a16:creationId xmlns:a16="http://schemas.microsoft.com/office/drawing/2014/main" id="{F0128DD9-95B3-4B05-9CFB-19E312BBA07B}"/>
+                <a16:creationId xmlns:a16="http://schemas.microsoft.com/office/drawing/2014/main" id="{EA2EB810-3963-4DBB-BF50-765610199BDF}"/>
               </a:ext>
             </a:extLst>
           </p:cNvPr>
@@ -5578,7 +5666,7 @@
           <p:cNvPr id="14" name="">
             <a:extLst xmlns:a="http://schemas.openxmlformats.org/drawingml/2006/main">
               <a:ext uri="{FF2B5EF4-FFF2-40B4-BE49-F238E27FC236}">
-                <a16:creationId xmlns:a16="http://schemas.microsoft.com/office/drawing/2014/main" id="{DD9664E5-D776-4981-912A-551425D9D4BC}"/>
+                <a16:creationId xmlns:a16="http://schemas.microsoft.com/office/drawing/2014/main" id="{F94D884A-DDCE-41DC-AEE8-AD3085772456}"/>
               </a:ext>
             </a:extLst>
           </p:cNvPr>
@@ -5634,7 +5722,7 @@
           <p:cNvPr id="15" name="">
             <a:extLst xmlns:a="http://schemas.openxmlformats.org/drawingml/2006/main">
               <a:ext uri="{FF2B5EF4-FFF2-40B4-BE49-F238E27FC236}">
-                <a16:creationId xmlns:a16="http://schemas.microsoft.com/office/drawing/2014/main" id="{B22A01D4-970C-45D0-AB8E-DFBE06B9B715}"/>
+                <a16:creationId xmlns:a16="http://schemas.microsoft.com/office/drawing/2014/main" id="{FDFB8335-B184-4062-B59D-6C4B9B47DDCA}"/>
               </a:ext>
             </a:extLst>
           </p:cNvPr>
@@ -5684,7 +5772,7 @@
           <p:cNvPr id="16" name="">
             <a:extLst xmlns:a="http://schemas.openxmlformats.org/drawingml/2006/main">
               <a:ext uri="{FF2B5EF4-FFF2-40B4-BE49-F238E27FC236}">
-                <a16:creationId xmlns:a16="http://schemas.microsoft.com/office/drawing/2014/main" id="{30DC2016-8D56-4FAE-A4EE-DD4BB03CF1A6}"/>
+                <a16:creationId xmlns:a16="http://schemas.microsoft.com/office/drawing/2014/main" id="{A833351C-832E-4566-AAEB-AF4699D04329}"/>
               </a:ext>
             </a:extLst>
           </p:cNvPr>
@@ -5734,7 +5822,7 @@
           <p:cNvPr id="17" name="">
             <a:extLst xmlns:a="http://schemas.openxmlformats.org/drawingml/2006/main">
               <a:ext uri="{FF2B5EF4-FFF2-40B4-BE49-F238E27FC236}">
-                <a16:creationId xmlns:a16="http://schemas.microsoft.com/office/drawing/2014/main" id="{BCE69606-C104-4E81-8021-C827B7F02D6F}"/>
+                <a16:creationId xmlns:a16="http://schemas.microsoft.com/office/drawing/2014/main" id="{59B18352-E810-4240-B62C-C020BAC62CC5}"/>
               </a:ext>
             </a:extLst>
           </p:cNvPr>
@@ -5784,7 +5872,7 @@
           <p:cNvPr id="18" name="">
             <a:extLst xmlns:a="http://schemas.openxmlformats.org/drawingml/2006/main">
               <a:ext uri="{FF2B5EF4-FFF2-40B4-BE49-F238E27FC236}">
-                <a16:creationId xmlns:a16="http://schemas.microsoft.com/office/drawing/2014/main" id="{3987372B-054A-490B-AFE8-3828B36A4E55}"/>
+                <a16:creationId xmlns:a16="http://schemas.microsoft.com/office/drawing/2014/main" id="{EB39DC53-8ED5-4D24-A130-B7DB128B1AF2}"/>
               </a:ext>
             </a:extLst>
           </p:cNvPr>
@@ -5834,7 +5922,7 @@
           <p:cNvPr id="19" name="">
             <a:extLst xmlns:a="http://schemas.openxmlformats.org/drawingml/2006/main">
               <a:ext uri="{FF2B5EF4-FFF2-40B4-BE49-F238E27FC236}">
-                <a16:creationId xmlns:a16="http://schemas.microsoft.com/office/drawing/2014/main" id="{04AF4C73-B591-418B-B458-C5CFCBE991CC}"/>
+                <a16:creationId xmlns:a16="http://schemas.microsoft.com/office/drawing/2014/main" id="{E6778FFC-E13C-4FAC-A708-92A3F0EB658C}"/>
               </a:ext>
             </a:extLst>
           </p:cNvPr>
@@ -5865,7 +5953,7 @@
           <p:cNvPr id="20" name="">
             <a:extLst xmlns:a="http://schemas.openxmlformats.org/drawingml/2006/main">
               <a:ext uri="{FF2B5EF4-FFF2-40B4-BE49-F238E27FC236}">
-                <a16:creationId xmlns:a16="http://schemas.microsoft.com/office/drawing/2014/main" id="{F2A34E89-BB8B-47A6-BBE8-FD6EF731E020}"/>
+                <a16:creationId xmlns:a16="http://schemas.microsoft.com/office/drawing/2014/main" id="{BF515D2F-E433-475A-B85A-1E4DAE22729C}"/>
               </a:ext>
             </a:extLst>
           </p:cNvPr>
@@ -5877,7 +5965,7 @@
         <p:spPr>
           <a:xfrm xmlns:a="http://schemas.openxmlformats.org/drawingml/2006/main">
             <a:off x="609600" y="6419850"/>
-            <a:ext cx="7810500" cy="209550"/>
+            <a:ext cx="4000500" cy="209550"/>
           </a:xfrm>
           <a:prstGeom xmlns:a="http://schemas.openxmlformats.org/drawingml/2006/main" prst="rect">
             <a:avLst/>
@@ -5905,7 +5993,7 @@
                   <a:srgbClr val="52615B"/>
                 </a:solidFill>
               </a:rPr>
-              <a:t>Unofficial material | Source: products/shopify-collective/architecture.md</a:t>
+              <a:t>Shopify Collective</a:t>
             </a:r>
           </a:p>
         </p:txBody>
@@ -5915,7 +6003,7 @@
           <p:cNvPr id="21" name="">
             <a:extLst xmlns:a="http://schemas.openxmlformats.org/drawingml/2006/main">
               <a:ext uri="{FF2B5EF4-FFF2-40B4-BE49-F238E27FC236}">
-                <a16:creationId xmlns:a16="http://schemas.microsoft.com/office/drawing/2014/main" id="{0461383F-0606-43D9-AB8E-56F4C08B27A8}"/>
+                <a16:creationId xmlns:a16="http://schemas.microsoft.com/office/drawing/2014/main" id="{707E51B4-087E-4233-9819-9FF3FC330CC7}"/>
               </a:ext>
             </a:extLst>
           </p:cNvPr>
@@ -5963,7 +6051,7 @@
     </p:spTree>
     <p:extLst>
       <p:ext uri="{BB962C8B-B14F-4D97-AF65-F5344CB8AC3E}">
-        <p14:creationId xmlns:p14="http://schemas.microsoft.com/office/powerpoint/2010/main" val="1703664595"/>
+        <p14:creationId xmlns:p14="http://schemas.microsoft.com/office/powerpoint/2010/main" val="21840470"/>
       </p:ext>
     </p:extLst>
   </p:cSld>
@@ -5994,7 +6082,7 @@
           <p:cNvPr id="1" name="">
             <a:extLst xmlns:a="http://schemas.openxmlformats.org/drawingml/2006/main">
               <a:ext uri="{FF2B5EF4-FFF2-40B4-BE49-F238E27FC236}">
-                <a16:creationId xmlns:a16="http://schemas.microsoft.com/office/drawing/2014/main" id="{1B0F9253-ABB9-4489-851E-FD5C5D82E3BA}"/>
+                <a16:creationId xmlns:a16="http://schemas.microsoft.com/office/drawing/2014/main" id="{72662A92-ADC6-4AD0-8A8E-A00CF7FE2553}"/>
               </a:ext>
             </a:extLst>
           </p:cNvPr>
@@ -6044,7 +6132,7 @@
           <p:cNvPr id="2" name="">
             <a:extLst xmlns:a="http://schemas.openxmlformats.org/drawingml/2006/main">
               <a:ext uri="{FF2B5EF4-FFF2-40B4-BE49-F238E27FC236}">
-                <a16:creationId xmlns:a16="http://schemas.microsoft.com/office/drawing/2014/main" id="{3F15A042-521C-484D-8E3F-71C8E09B29CC}"/>
+                <a16:creationId xmlns:a16="http://schemas.microsoft.com/office/drawing/2014/main" id="{8C9F0565-F9F0-4962-9392-1112557C9F44}"/>
               </a:ext>
             </a:extLst>
           </p:cNvPr>
@@ -6094,7 +6182,7 @@
           <p:cNvPr id="3" name="">
             <a:extLst xmlns:a="http://schemas.openxmlformats.org/drawingml/2006/main">
               <a:ext uri="{FF2B5EF4-FFF2-40B4-BE49-F238E27FC236}">
-                <a16:creationId xmlns:a16="http://schemas.microsoft.com/office/drawing/2014/main" id="{15C995D1-A03C-4ED4-922D-836346BC7493}"/>
+                <a16:creationId xmlns:a16="http://schemas.microsoft.com/office/drawing/2014/main" id="{01477F81-1E5F-4323-9231-1ED9069B417B}"/>
               </a:ext>
             </a:extLst>
           </p:cNvPr>
@@ -6144,7 +6232,7 @@
           <p:cNvPr id="4" name="">
             <a:extLst xmlns:a="http://schemas.openxmlformats.org/drawingml/2006/main">
               <a:ext uri="{FF2B5EF4-FFF2-40B4-BE49-F238E27FC236}">
-                <a16:creationId xmlns:a16="http://schemas.microsoft.com/office/drawing/2014/main" id="{F7D8924E-127E-4D94-B674-3F5E9D7390BC}"/>
+                <a16:creationId xmlns:a16="http://schemas.microsoft.com/office/drawing/2014/main" id="{444EA092-816C-4676-8E63-A298F988FD1E}"/>
               </a:ext>
             </a:extLst>
           </p:cNvPr>
@@ -6175,7 +6263,7 @@
           <p:cNvPr id="5" name="">
             <a:extLst xmlns:a="http://schemas.openxmlformats.org/drawingml/2006/main">
               <a:ext uri="{FF2B5EF4-FFF2-40B4-BE49-F238E27FC236}">
-                <a16:creationId xmlns:a16="http://schemas.microsoft.com/office/drawing/2014/main" id="{FEA64D60-82AA-4782-ADD5-F8B4FB6CD671}"/>
+                <a16:creationId xmlns:a16="http://schemas.microsoft.com/office/drawing/2014/main" id="{CD9F49E9-B967-444C-B88C-C618D9640875}"/>
               </a:ext>
             </a:extLst>
           </p:cNvPr>
@@ -6221,7 +6309,7 @@
                   <a:srgbClr val="101820"/>
                 </a:solidFill>
               </a:rPr>
-              <a:t>Supplier quantity</a:t>
+              <a:t>Supplier availability</a:t>
             </a:r>
           </a:p>
         </p:txBody>
@@ -6231,7 +6319,7 @@
           <p:cNvPr id="6" name="">
             <a:extLst xmlns:a="http://schemas.openxmlformats.org/drawingml/2006/main">
               <a:ext uri="{FF2B5EF4-FFF2-40B4-BE49-F238E27FC236}">
-                <a16:creationId xmlns:a16="http://schemas.microsoft.com/office/drawing/2014/main" id="{C734A8FE-10F2-4E8A-B58E-F499ED64FF18}"/>
+                <a16:creationId xmlns:a16="http://schemas.microsoft.com/office/drawing/2014/main" id="{82192E32-B677-43BC-AFED-C42BCF3F8EE7}"/>
               </a:ext>
             </a:extLst>
           </p:cNvPr>
@@ -6271,7 +6359,7 @@
                   <a:srgbClr val="52615B"/>
                 </a:solidFill>
               </a:rPr>
-              <a:t>sellableOnlineQuantity populates retailer availability.</a:t>
+              <a:t>Supplier inventory available for online sales populates retailer availability.</a:t>
             </a:r>
           </a:p>
         </p:txBody>
@@ -6281,7 +6369,7 @@
           <p:cNvPr id="7" name="">
             <a:extLst xmlns:a="http://schemas.openxmlformats.org/drawingml/2006/main">
               <a:ext uri="{FF2B5EF4-FFF2-40B4-BE49-F238E27FC236}">
-                <a16:creationId xmlns:a16="http://schemas.microsoft.com/office/drawing/2014/main" id="{87027343-0A73-44B1-93BC-7F3A3D037EB6}"/>
+                <a16:creationId xmlns:a16="http://schemas.microsoft.com/office/drawing/2014/main" id="{25BD6029-CD09-4DEC-997A-8D3F085CE413}"/>
               </a:ext>
             </a:extLst>
           </p:cNvPr>
@@ -6331,7 +6419,7 @@
           <p:cNvPr id="8" name="">
             <a:extLst xmlns:a="http://schemas.openxmlformats.org/drawingml/2006/main">
               <a:ext uri="{FF2B5EF4-FFF2-40B4-BE49-F238E27FC236}">
-                <a16:creationId xmlns:a16="http://schemas.microsoft.com/office/drawing/2014/main" id="{F94055F0-0EE1-4C06-ACD1-986F1B0E8717}"/>
+                <a16:creationId xmlns:a16="http://schemas.microsoft.com/office/drawing/2014/main" id="{7EA8476E-CC70-4A8F-B791-C4384164DBF5}"/>
               </a:ext>
             </a:extLst>
           </p:cNvPr>
@@ -6387,7 +6475,7 @@
           <p:cNvPr id="9" name="">
             <a:extLst xmlns:a="http://schemas.openxmlformats.org/drawingml/2006/main">
               <a:ext uri="{FF2B5EF4-FFF2-40B4-BE49-F238E27FC236}">
-                <a16:creationId xmlns:a16="http://schemas.microsoft.com/office/drawing/2014/main" id="{3BA62E85-4622-4E1C-9453-3F6990B12278}"/>
+                <a16:creationId xmlns:a16="http://schemas.microsoft.com/office/drawing/2014/main" id="{F40D790F-A306-4956-B500-E686B23D9355}"/>
               </a:ext>
             </a:extLst>
           </p:cNvPr>
@@ -6437,7 +6525,7 @@
           <p:cNvPr id="10" name="">
             <a:extLst xmlns:a="http://schemas.openxmlformats.org/drawingml/2006/main">
               <a:ext uri="{FF2B5EF4-FFF2-40B4-BE49-F238E27FC236}">
-                <a16:creationId xmlns:a16="http://schemas.microsoft.com/office/drawing/2014/main" id="{A8251D76-7C78-411F-B4B6-ECBF30A9E072}"/>
+                <a16:creationId xmlns:a16="http://schemas.microsoft.com/office/drawing/2014/main" id="{CB77D35E-340D-45B4-BB96-E72125282259}"/>
               </a:ext>
             </a:extLst>
           </p:cNvPr>
@@ -6487,7 +6575,7 @@
           <p:cNvPr id="11" name="">
             <a:extLst xmlns:a="http://schemas.openxmlformats.org/drawingml/2006/main">
               <a:ext uri="{FF2B5EF4-FFF2-40B4-BE49-F238E27FC236}">
-                <a16:creationId xmlns:a16="http://schemas.microsoft.com/office/drawing/2014/main" id="{CE854EE4-A18A-4747-9E14-FDDCEAEA852F}"/>
+                <a16:creationId xmlns:a16="http://schemas.microsoft.com/office/drawing/2014/main" id="{DB6C72B4-7568-4E4E-B3E9-F2FD2DB2207B}"/>
               </a:ext>
             </a:extLst>
           </p:cNvPr>
@@ -6543,7 +6631,7 @@
           <p:cNvPr id="12" name="">
             <a:extLst xmlns:a="http://schemas.openxmlformats.org/drawingml/2006/main">
               <a:ext uri="{FF2B5EF4-FFF2-40B4-BE49-F238E27FC236}">
-                <a16:creationId xmlns:a16="http://schemas.microsoft.com/office/drawing/2014/main" id="{9C9AB03A-9CBF-4332-AC10-4CA522EABFC2}"/>
+                <a16:creationId xmlns:a16="http://schemas.microsoft.com/office/drawing/2014/main" id="{5DA5E96B-56D2-4F3B-902E-3DBEA8F2F109}"/>
               </a:ext>
             </a:extLst>
           </p:cNvPr>
@@ -6593,7 +6681,7 @@
           <p:cNvPr id="13" name="">
             <a:extLst xmlns:a="http://schemas.openxmlformats.org/drawingml/2006/main">
               <a:ext uri="{FF2B5EF4-FFF2-40B4-BE49-F238E27FC236}">
-                <a16:creationId xmlns:a16="http://schemas.microsoft.com/office/drawing/2014/main" id="{261CD0EF-2E35-4F86-AB72-B8F82E5815FC}"/>
+                <a16:creationId xmlns:a16="http://schemas.microsoft.com/office/drawing/2014/main" id="{A731321B-EC3C-4D24-813C-B5DE2980F1D6}"/>
               </a:ext>
             </a:extLst>
           </p:cNvPr>
@@ -6643,7 +6731,7 @@
           <p:cNvPr id="14" name="">
             <a:extLst xmlns:a="http://schemas.openxmlformats.org/drawingml/2006/main">
               <a:ext uri="{FF2B5EF4-FFF2-40B4-BE49-F238E27FC236}">
-                <a16:creationId xmlns:a16="http://schemas.microsoft.com/office/drawing/2014/main" id="{5179DED1-71C9-4B9F-AFEB-8BD1B3E3D017}"/>
+                <a16:creationId xmlns:a16="http://schemas.microsoft.com/office/drawing/2014/main" id="{89F3BA1D-D54B-41CD-9DE7-CEBEBFB743C8}"/>
               </a:ext>
             </a:extLst>
           </p:cNvPr>
@@ -6699,7 +6787,7 @@
           <p:cNvPr id="15" name="">
             <a:extLst xmlns:a="http://schemas.openxmlformats.org/drawingml/2006/main">
               <a:ext uri="{FF2B5EF4-FFF2-40B4-BE49-F238E27FC236}">
-                <a16:creationId xmlns:a16="http://schemas.microsoft.com/office/drawing/2014/main" id="{D6AD8DA3-4B21-4E32-93B7-80CFEA15B006}"/>
+                <a16:creationId xmlns:a16="http://schemas.microsoft.com/office/drawing/2014/main" id="{E1CF74D9-3E1F-4851-8DD4-597846647D2D}"/>
               </a:ext>
             </a:extLst>
           </p:cNvPr>
@@ -6749,7 +6837,7 @@
           <p:cNvPr id="16" name="">
             <a:extLst xmlns:a="http://schemas.openxmlformats.org/drawingml/2006/main">
               <a:ext uri="{FF2B5EF4-FFF2-40B4-BE49-F238E27FC236}">
-                <a16:creationId xmlns:a16="http://schemas.microsoft.com/office/drawing/2014/main" id="{D7F0F5D8-0568-4DF9-BC87-FC09CBDB9B40}"/>
+                <a16:creationId xmlns:a16="http://schemas.microsoft.com/office/drawing/2014/main" id="{CC5DC0D6-DDD1-430B-9095-05158251C7DA}"/>
               </a:ext>
             </a:extLst>
           </p:cNvPr>
@@ -6799,7 +6887,7 @@
           <p:cNvPr id="17" name="">
             <a:extLst xmlns:a="http://schemas.openxmlformats.org/drawingml/2006/main">
               <a:ext uri="{FF2B5EF4-FFF2-40B4-BE49-F238E27FC236}">
-                <a16:creationId xmlns:a16="http://schemas.microsoft.com/office/drawing/2014/main" id="{90DE1047-DCCD-4EC3-9F29-0F908D584795}"/>
+                <a16:creationId xmlns:a16="http://schemas.microsoft.com/office/drawing/2014/main" id="{A3897032-11C7-4B7F-97F4-094E09A61068}"/>
               </a:ext>
             </a:extLst>
           </p:cNvPr>
@@ -6855,7 +6943,7 @@
           <p:cNvPr id="18" name="">
             <a:extLst xmlns:a="http://schemas.openxmlformats.org/drawingml/2006/main">
               <a:ext uri="{FF2B5EF4-FFF2-40B4-BE49-F238E27FC236}">
-                <a16:creationId xmlns:a16="http://schemas.microsoft.com/office/drawing/2014/main" id="{87CADE52-AB81-4A43-B1B9-CE1699EC6059}"/>
+                <a16:creationId xmlns:a16="http://schemas.microsoft.com/office/drawing/2014/main" id="{C6E51EFE-BB1C-468C-A7B2-A966A2D881EA}"/>
               </a:ext>
             </a:extLst>
           </p:cNvPr>
@@ -6905,7 +6993,7 @@
           <p:cNvPr id="19" name="">
             <a:extLst xmlns:a="http://schemas.openxmlformats.org/drawingml/2006/main">
               <a:ext uri="{FF2B5EF4-FFF2-40B4-BE49-F238E27FC236}">
-                <a16:creationId xmlns:a16="http://schemas.microsoft.com/office/drawing/2014/main" id="{36A73B0A-301A-422C-A38D-0D7A5F60273C}"/>
+                <a16:creationId xmlns:a16="http://schemas.microsoft.com/office/drawing/2014/main" id="{783DFF2C-1FB9-4E19-8DE1-6F20270CD1B3}"/>
               </a:ext>
             </a:extLst>
           </p:cNvPr>
@@ -6955,7 +7043,7 @@
           <p:cNvPr id="20" name="">
             <a:extLst xmlns:a="http://schemas.openxmlformats.org/drawingml/2006/main">
               <a:ext uri="{FF2B5EF4-FFF2-40B4-BE49-F238E27FC236}">
-                <a16:creationId xmlns:a16="http://schemas.microsoft.com/office/drawing/2014/main" id="{C95FC377-4729-4897-A765-9FA2C5B6182B}"/>
+                <a16:creationId xmlns:a16="http://schemas.microsoft.com/office/drawing/2014/main" id="{366E2298-3D69-46B6-B69B-6250D10BDA72}"/>
               </a:ext>
             </a:extLst>
           </p:cNvPr>
@@ -7005,7 +7093,7 @@
           <p:cNvPr id="21" name="">
             <a:extLst xmlns:a="http://schemas.openxmlformats.org/drawingml/2006/main">
               <a:ext uri="{FF2B5EF4-FFF2-40B4-BE49-F238E27FC236}">
-                <a16:creationId xmlns:a16="http://schemas.microsoft.com/office/drawing/2014/main" id="{4B54E158-5EF6-4A9B-B589-E4AD0681EE8C}"/>
+                <a16:creationId xmlns:a16="http://schemas.microsoft.com/office/drawing/2014/main" id="{D4D1E73D-561C-4817-A521-F9D8DA79B030}"/>
               </a:ext>
             </a:extLst>
           </p:cNvPr>
@@ -7055,7 +7143,7 @@
           <p:cNvPr id="22" name="">
             <a:extLst xmlns:a="http://schemas.openxmlformats.org/drawingml/2006/main">
               <a:ext uri="{FF2B5EF4-FFF2-40B4-BE49-F238E27FC236}">
-                <a16:creationId xmlns:a16="http://schemas.microsoft.com/office/drawing/2014/main" id="{E2B1169B-48D6-4159-B55C-7786FF476FB9}"/>
+                <a16:creationId xmlns:a16="http://schemas.microsoft.com/office/drawing/2014/main" id="{B792E44D-C5F8-4B79-9CA1-A0B32F75ECBB}"/>
               </a:ext>
             </a:extLst>
           </p:cNvPr>
@@ -7086,7 +7174,7 @@
           <p:cNvPr id="23" name="">
             <a:extLst xmlns:a="http://schemas.openxmlformats.org/drawingml/2006/main">
               <a:ext uri="{FF2B5EF4-FFF2-40B4-BE49-F238E27FC236}">
-                <a16:creationId xmlns:a16="http://schemas.microsoft.com/office/drawing/2014/main" id="{C9ECF3CA-36B1-48AE-B309-D7893DD97E78}"/>
+                <a16:creationId xmlns:a16="http://schemas.microsoft.com/office/drawing/2014/main" id="{E280C5B0-6DD6-4B42-8B9E-FE577E4A1F1A}"/>
               </a:ext>
             </a:extLst>
           </p:cNvPr>
@@ -7098,7 +7186,7 @@
         <p:spPr>
           <a:xfrm xmlns:a="http://schemas.openxmlformats.org/drawingml/2006/main">
             <a:off x="609600" y="6419850"/>
-            <a:ext cx="7810500" cy="209550"/>
+            <a:ext cx="4000500" cy="209550"/>
           </a:xfrm>
           <a:prstGeom xmlns:a="http://schemas.openxmlformats.org/drawingml/2006/main" prst="rect">
             <a:avLst/>
@@ -7126,7 +7214,7 @@
                   <a:srgbClr val="52615B"/>
                 </a:solidFill>
               </a:rPr>
-              <a:t>Unofficial material | Source: products/shopify-collective/architecture.md</a:t>
+              <a:t>Shopify Collective</a:t>
             </a:r>
           </a:p>
         </p:txBody>
@@ -7136,7 +7224,7 @@
           <p:cNvPr id="24" name="">
             <a:extLst xmlns:a="http://schemas.openxmlformats.org/drawingml/2006/main">
               <a:ext uri="{FF2B5EF4-FFF2-40B4-BE49-F238E27FC236}">
-                <a16:creationId xmlns:a16="http://schemas.microsoft.com/office/drawing/2014/main" id="{AF55407A-51DB-42DD-81DB-B29C7052501E}"/>
+                <a16:creationId xmlns:a16="http://schemas.microsoft.com/office/drawing/2014/main" id="{F3E8C758-ACC6-4AA9-A9CE-80099F930AA3}"/>
               </a:ext>
             </a:extLst>
           </p:cNvPr>
@@ -7184,7 +7272,7 @@
     </p:spTree>
     <p:extLst>
       <p:ext uri="{BB962C8B-B14F-4D97-AF65-F5344CB8AC3E}">
-        <p14:creationId xmlns:p14="http://schemas.microsoft.com/office/powerpoint/2010/main" val="919689076"/>
+        <p14:creationId xmlns:p14="http://schemas.microsoft.com/office/powerpoint/2010/main" val="1326495627"/>
       </p:ext>
     </p:extLst>
   </p:cSld>
@@ -7215,7 +7303,7 @@
           <p:cNvPr id="1" name="">
             <a:extLst xmlns:a="http://schemas.openxmlformats.org/drawingml/2006/main">
               <a:ext uri="{FF2B5EF4-FFF2-40B4-BE49-F238E27FC236}">
-                <a16:creationId xmlns:a16="http://schemas.microsoft.com/office/drawing/2014/main" id="{6B93AC65-720B-4F23-9F83-25BF03F715F5}"/>
+                <a16:creationId xmlns:a16="http://schemas.microsoft.com/office/drawing/2014/main" id="{7EC9B238-37AE-406F-9040-C4FFEABCB4F0}"/>
               </a:ext>
             </a:extLst>
           </p:cNvPr>
@@ -7265,7 +7353,7 @@
           <p:cNvPr id="2" name="">
             <a:extLst xmlns:a="http://schemas.openxmlformats.org/drawingml/2006/main">
               <a:ext uri="{FF2B5EF4-FFF2-40B4-BE49-F238E27FC236}">
-                <a16:creationId xmlns:a16="http://schemas.microsoft.com/office/drawing/2014/main" id="{4C9C4100-24BF-4E99-89C2-364E6C219751}"/>
+                <a16:creationId xmlns:a16="http://schemas.microsoft.com/office/drawing/2014/main" id="{DB132D92-BBE3-48C4-B208-A7358D1D19C7}"/>
               </a:ext>
             </a:extLst>
           </p:cNvPr>
@@ -7315,7 +7403,7 @@
           <p:cNvPr id="3" name="">
             <a:extLst xmlns:a="http://schemas.openxmlformats.org/drawingml/2006/main">
               <a:ext uri="{FF2B5EF4-FFF2-40B4-BE49-F238E27FC236}">
-                <a16:creationId xmlns:a16="http://schemas.microsoft.com/office/drawing/2014/main" id="{CA649838-F5EB-4D31-9EA1-832D38A4B095}"/>
+                <a16:creationId xmlns:a16="http://schemas.microsoft.com/office/drawing/2014/main" id="{1CA57F88-730A-442C-8BD6-D781211A1B85}"/>
               </a:ext>
             </a:extLst>
           </p:cNvPr>
@@ -7365,7 +7453,7 @@
           <p:cNvPr id="4" name="">
             <a:extLst xmlns:a="http://schemas.openxmlformats.org/drawingml/2006/main">
               <a:ext uri="{FF2B5EF4-FFF2-40B4-BE49-F238E27FC236}">
-                <a16:creationId xmlns:a16="http://schemas.microsoft.com/office/drawing/2014/main" id="{75A29AFB-2CBC-4938-A77D-6738E0093EDC}"/>
+                <a16:creationId xmlns:a16="http://schemas.microsoft.com/office/drawing/2014/main" id="{94909E85-5514-4320-8355-9B148D955410}"/>
               </a:ext>
             </a:extLst>
           </p:cNvPr>
@@ -7396,7 +7484,7 @@
           <p:cNvPr id="5" name="">
             <a:extLst xmlns:a="http://schemas.openxmlformats.org/drawingml/2006/main">
               <a:ext uri="{FF2B5EF4-FFF2-40B4-BE49-F238E27FC236}">
-                <a16:creationId xmlns:a16="http://schemas.microsoft.com/office/drawing/2014/main" id="{88189CB4-078B-48BA-A880-5D1BE4369315}"/>
+                <a16:creationId xmlns:a16="http://schemas.microsoft.com/office/drawing/2014/main" id="{EFE85EE7-E5E2-4AE9-AC1B-95DCB71205BB}"/>
               </a:ext>
             </a:extLst>
           </p:cNvPr>
@@ -7452,7 +7540,7 @@
           <p:cNvPr id="6" name="">
             <a:extLst xmlns:a="http://schemas.openxmlformats.org/drawingml/2006/main">
               <a:ext uri="{FF2B5EF4-FFF2-40B4-BE49-F238E27FC236}">
-                <a16:creationId xmlns:a16="http://schemas.microsoft.com/office/drawing/2014/main" id="{7ECAF7BC-E5DC-4263-99DD-83750E793062}"/>
+                <a16:creationId xmlns:a16="http://schemas.microsoft.com/office/drawing/2014/main" id="{A5944332-713C-418E-B7BA-4426D184C730}"/>
               </a:ext>
             </a:extLst>
           </p:cNvPr>
@@ -7502,7 +7590,7 @@
           <p:cNvPr id="7" name="">
             <a:extLst xmlns:a="http://schemas.openxmlformats.org/drawingml/2006/main">
               <a:ext uri="{FF2B5EF4-FFF2-40B4-BE49-F238E27FC236}">
-                <a16:creationId xmlns:a16="http://schemas.microsoft.com/office/drawing/2014/main" id="{0A95C800-F701-4392-8AB0-B66B0C9658D3}"/>
+                <a16:creationId xmlns:a16="http://schemas.microsoft.com/office/drawing/2014/main" id="{E821CC71-45E4-4275-B70C-59B03C2E9DF1}"/>
               </a:ext>
             </a:extLst>
           </p:cNvPr>
@@ -7558,7 +7646,7 @@
           <p:cNvPr id="8" name="">
             <a:extLst xmlns:a="http://schemas.openxmlformats.org/drawingml/2006/main">
               <a:ext uri="{FF2B5EF4-FFF2-40B4-BE49-F238E27FC236}">
-                <a16:creationId xmlns:a16="http://schemas.microsoft.com/office/drawing/2014/main" id="{19F32C2A-D6C9-4D36-8936-3E553DEA8C16}"/>
+                <a16:creationId xmlns:a16="http://schemas.microsoft.com/office/drawing/2014/main" id="{B3FF9CEB-C37B-4861-8148-014BB618601D}"/>
               </a:ext>
             </a:extLst>
           </p:cNvPr>
@@ -7608,7 +7696,7 @@
           <p:cNvPr id="9" name="">
             <a:extLst xmlns:a="http://schemas.openxmlformats.org/drawingml/2006/main">
               <a:ext uri="{FF2B5EF4-FFF2-40B4-BE49-F238E27FC236}">
-                <a16:creationId xmlns:a16="http://schemas.microsoft.com/office/drawing/2014/main" id="{9CDD20B9-A0A4-438D-8198-E5255EBFA082}"/>
+                <a16:creationId xmlns:a16="http://schemas.microsoft.com/office/drawing/2014/main" id="{B44CC3B3-4489-4BC7-A021-D4156A8CFACA}"/>
               </a:ext>
             </a:extLst>
           </p:cNvPr>
@@ -7658,7 +7746,7 @@
           <p:cNvPr id="10" name="">
             <a:extLst xmlns:a="http://schemas.openxmlformats.org/drawingml/2006/main">
               <a:ext uri="{FF2B5EF4-FFF2-40B4-BE49-F238E27FC236}">
-                <a16:creationId xmlns:a16="http://schemas.microsoft.com/office/drawing/2014/main" id="{9BD25C4A-15F9-4914-8927-662D676B2C2D}"/>
+                <a16:creationId xmlns:a16="http://schemas.microsoft.com/office/drawing/2014/main" id="{C429E3D1-772E-4926-9BA8-1FC04EBEB8BE}"/>
               </a:ext>
             </a:extLst>
           </p:cNvPr>
@@ -7708,7 +7796,7 @@
           <p:cNvPr id="11" name="">
             <a:extLst xmlns:a="http://schemas.openxmlformats.org/drawingml/2006/main">
               <a:ext uri="{FF2B5EF4-FFF2-40B4-BE49-F238E27FC236}">
-                <a16:creationId xmlns:a16="http://schemas.microsoft.com/office/drawing/2014/main" id="{83D810FC-3D4D-45C5-AC98-40C784BD24CB}"/>
+                <a16:creationId xmlns:a16="http://schemas.microsoft.com/office/drawing/2014/main" id="{37ACB0AC-0F04-477B-9427-B8A0977F8F36}"/>
               </a:ext>
             </a:extLst>
           </p:cNvPr>
@@ -7739,7 +7827,7 @@
           <p:cNvPr id="12" name="">
             <a:extLst xmlns:a="http://schemas.openxmlformats.org/drawingml/2006/main">
               <a:ext uri="{FF2B5EF4-FFF2-40B4-BE49-F238E27FC236}">
-                <a16:creationId xmlns:a16="http://schemas.microsoft.com/office/drawing/2014/main" id="{F17C95B9-6057-4AC1-9372-FF76F0F0F7BB}"/>
+                <a16:creationId xmlns:a16="http://schemas.microsoft.com/office/drawing/2014/main" id="{9D30F0BB-F051-47B0-96B3-3E43B4B1D65E}"/>
               </a:ext>
             </a:extLst>
           </p:cNvPr>
@@ -7751,7 +7839,7 @@
         <p:spPr>
           <a:xfrm xmlns:a="http://schemas.openxmlformats.org/drawingml/2006/main">
             <a:off x="609600" y="6419850"/>
-            <a:ext cx="7810500" cy="209550"/>
+            <a:ext cx="4000500" cy="209550"/>
           </a:xfrm>
           <a:prstGeom xmlns:a="http://schemas.openxmlformats.org/drawingml/2006/main" prst="rect">
             <a:avLst/>
@@ -7779,7 +7867,7 @@
                   <a:srgbClr val="52615B"/>
                 </a:solidFill>
               </a:rPr>
-              <a:t>Unofficial material | Source: products/shopify-collective/architecture.md</a:t>
+              <a:t>Shopify Collective</a:t>
             </a:r>
           </a:p>
         </p:txBody>
@@ -7789,7 +7877,7 @@
           <p:cNvPr id="13" name="">
             <a:extLst xmlns:a="http://schemas.openxmlformats.org/drawingml/2006/main">
               <a:ext uri="{FF2B5EF4-FFF2-40B4-BE49-F238E27FC236}">
-                <a16:creationId xmlns:a16="http://schemas.microsoft.com/office/drawing/2014/main" id="{AAD12F46-E98F-43CB-AC73-F41B9092EA21}"/>
+                <a16:creationId xmlns:a16="http://schemas.microsoft.com/office/drawing/2014/main" id="{8ADDE3A2-46AB-4A96-A338-18DAF2B55D06}"/>
               </a:ext>
             </a:extLst>
           </p:cNvPr>
@@ -7837,7 +7925,7 @@
     </p:spTree>
     <p:extLst>
       <p:ext uri="{BB962C8B-B14F-4D97-AF65-F5344CB8AC3E}">
-        <p14:creationId xmlns:p14="http://schemas.microsoft.com/office/powerpoint/2010/main" val="1778235252"/>
+        <p14:creationId xmlns:p14="http://schemas.microsoft.com/office/powerpoint/2010/main" val="795282882"/>
       </p:ext>
     </p:extLst>
   </p:cSld>
@@ -7868,7 +7956,7 @@
           <p:cNvPr id="1" name="">
             <a:extLst xmlns:a="http://schemas.openxmlformats.org/drawingml/2006/main">
               <a:ext uri="{FF2B5EF4-FFF2-40B4-BE49-F238E27FC236}">
-                <a16:creationId xmlns:a16="http://schemas.microsoft.com/office/drawing/2014/main" id="{F416C808-FC04-44DB-A340-B4D467C8E113}"/>
+                <a16:creationId xmlns:a16="http://schemas.microsoft.com/office/drawing/2014/main" id="{C8441305-E99B-49C2-B933-CBBB6A9F84B9}"/>
               </a:ext>
             </a:extLst>
           </p:cNvPr>
@@ -7918,7 +8006,7 @@
           <p:cNvPr id="2" name="">
             <a:extLst xmlns:a="http://schemas.openxmlformats.org/drawingml/2006/main">
               <a:ext uri="{FF2B5EF4-FFF2-40B4-BE49-F238E27FC236}">
-                <a16:creationId xmlns:a16="http://schemas.microsoft.com/office/drawing/2014/main" id="{BCC803A0-6D2B-4767-A47F-0DD14F915967}"/>
+                <a16:creationId xmlns:a16="http://schemas.microsoft.com/office/drawing/2014/main" id="{873397BC-9732-49F8-BFE7-DAFCE0E4B93E}"/>
               </a:ext>
             </a:extLst>
           </p:cNvPr>
@@ -7968,7 +8056,7 @@
           <p:cNvPr id="3" name="">
             <a:extLst xmlns:a="http://schemas.openxmlformats.org/drawingml/2006/main">
               <a:ext uri="{FF2B5EF4-FFF2-40B4-BE49-F238E27FC236}">
-                <a16:creationId xmlns:a16="http://schemas.microsoft.com/office/drawing/2014/main" id="{2969DD7A-6FF8-4D0E-AEF9-872824F8E803}"/>
+                <a16:creationId xmlns:a16="http://schemas.microsoft.com/office/drawing/2014/main" id="{117230B0-CC8B-4B00-B6C0-E9FC5C30AA14}"/>
               </a:ext>
             </a:extLst>
           </p:cNvPr>
@@ -8018,7 +8106,7 @@
           <p:cNvPr id="4" name="">
             <a:extLst xmlns:a="http://schemas.openxmlformats.org/drawingml/2006/main">
               <a:ext uri="{FF2B5EF4-FFF2-40B4-BE49-F238E27FC236}">
-                <a16:creationId xmlns:a16="http://schemas.microsoft.com/office/drawing/2014/main" id="{3C48923A-C81A-4340-B969-0754F1C99754}"/>
+                <a16:creationId xmlns:a16="http://schemas.microsoft.com/office/drawing/2014/main" id="{9A353EDA-229C-4C5A-A64E-77747517DEDC}"/>
               </a:ext>
             </a:extLst>
           </p:cNvPr>
@@ -8049,7 +8137,7 @@
           <p:cNvPr id="5" name="">
             <a:extLst xmlns:a="http://schemas.openxmlformats.org/drawingml/2006/main">
               <a:ext uri="{FF2B5EF4-FFF2-40B4-BE49-F238E27FC236}">
-                <a16:creationId xmlns:a16="http://schemas.microsoft.com/office/drawing/2014/main" id="{0F9B7B59-AABD-4A2A-9012-670751ED8F12}"/>
+                <a16:creationId xmlns:a16="http://schemas.microsoft.com/office/drawing/2014/main" id="{102CF546-A29C-4742-A05D-844ACCFFBE40}"/>
               </a:ext>
             </a:extLst>
           </p:cNvPr>
@@ -8105,7 +8193,7 @@
           <p:cNvPr id="6" name="">
             <a:extLst xmlns:a="http://schemas.openxmlformats.org/drawingml/2006/main">
               <a:ext uri="{FF2B5EF4-FFF2-40B4-BE49-F238E27FC236}">
-                <a16:creationId xmlns:a16="http://schemas.microsoft.com/office/drawing/2014/main" id="{61C71020-9187-4834-A596-213383CD97DF}"/>
+                <a16:creationId xmlns:a16="http://schemas.microsoft.com/office/drawing/2014/main" id="{B447F61C-D763-43C1-A3F4-BF8D139B727C}"/>
               </a:ext>
             </a:extLst>
           </p:cNvPr>
@@ -8155,7 +8243,7 @@
           <p:cNvPr id="7" name="">
             <a:extLst xmlns:a="http://schemas.openxmlformats.org/drawingml/2006/main">
               <a:ext uri="{FF2B5EF4-FFF2-40B4-BE49-F238E27FC236}">
-                <a16:creationId xmlns:a16="http://schemas.microsoft.com/office/drawing/2014/main" id="{6BE8069D-D508-486E-9CF7-D41E0C212597}"/>
+                <a16:creationId xmlns:a16="http://schemas.microsoft.com/office/drawing/2014/main" id="{F3AD2517-1D95-405B-A5C6-E4A8E8BB18CE}"/>
               </a:ext>
             </a:extLst>
           </p:cNvPr>
@@ -8211,7 +8299,7 @@
           <p:cNvPr id="8" name="">
             <a:extLst xmlns:a="http://schemas.openxmlformats.org/drawingml/2006/main">
               <a:ext uri="{FF2B5EF4-FFF2-40B4-BE49-F238E27FC236}">
-                <a16:creationId xmlns:a16="http://schemas.microsoft.com/office/drawing/2014/main" id="{7291D71D-7BA2-448E-9304-08EECAC668C0}"/>
+                <a16:creationId xmlns:a16="http://schemas.microsoft.com/office/drawing/2014/main" id="{263DDF4A-CB56-4CAE-9CB1-E07FC662C137}"/>
               </a:ext>
             </a:extLst>
           </p:cNvPr>
@@ -8261,7 +8349,7 @@
           <p:cNvPr id="9" name="">
             <a:extLst xmlns:a="http://schemas.openxmlformats.org/drawingml/2006/main">
               <a:ext uri="{FF2B5EF4-FFF2-40B4-BE49-F238E27FC236}">
-                <a16:creationId xmlns:a16="http://schemas.microsoft.com/office/drawing/2014/main" id="{EF82B305-21F7-4DDD-BAE4-66252B79EC8B}"/>
+                <a16:creationId xmlns:a16="http://schemas.microsoft.com/office/drawing/2014/main" id="{6EF13457-983F-43C8-A796-A4F2A8EF0E2C}"/>
               </a:ext>
             </a:extLst>
           </p:cNvPr>
@@ -8311,7 +8399,7 @@
           <p:cNvPr id="10" name="">
             <a:extLst xmlns:a="http://schemas.openxmlformats.org/drawingml/2006/main">
               <a:ext uri="{FF2B5EF4-FFF2-40B4-BE49-F238E27FC236}">
-                <a16:creationId xmlns:a16="http://schemas.microsoft.com/office/drawing/2014/main" id="{1FE86033-9CF8-45F2-AC16-409BC7D8D39C}"/>
+                <a16:creationId xmlns:a16="http://schemas.microsoft.com/office/drawing/2014/main" id="{B652CE20-5333-4791-957A-12749523832B}"/>
               </a:ext>
             </a:extLst>
           </p:cNvPr>
@@ -8361,7 +8449,7 @@
           <p:cNvPr id="11" name="">
             <a:extLst xmlns:a="http://schemas.openxmlformats.org/drawingml/2006/main">
               <a:ext uri="{FF2B5EF4-FFF2-40B4-BE49-F238E27FC236}">
-                <a16:creationId xmlns:a16="http://schemas.microsoft.com/office/drawing/2014/main" id="{4E5F213B-AB19-46F7-975A-0C61A7EAD099}"/>
+                <a16:creationId xmlns:a16="http://schemas.microsoft.com/office/drawing/2014/main" id="{51925927-DC5C-4D36-B2A5-CED0C301D033}"/>
               </a:ext>
             </a:extLst>
           </p:cNvPr>
@@ -8392,7 +8480,7 @@
           <p:cNvPr id="12" name="">
             <a:extLst xmlns:a="http://schemas.openxmlformats.org/drawingml/2006/main">
               <a:ext uri="{FF2B5EF4-FFF2-40B4-BE49-F238E27FC236}">
-                <a16:creationId xmlns:a16="http://schemas.microsoft.com/office/drawing/2014/main" id="{1FEB5B41-6D5D-46CB-8032-25A544C98F3A}"/>
+                <a16:creationId xmlns:a16="http://schemas.microsoft.com/office/drawing/2014/main" id="{975D4690-D8EC-4EE0-8EAC-3806E97A94FB}"/>
               </a:ext>
             </a:extLst>
           </p:cNvPr>
@@ -8404,7 +8492,7 @@
         <p:spPr>
           <a:xfrm xmlns:a="http://schemas.openxmlformats.org/drawingml/2006/main">
             <a:off x="609600" y="6419850"/>
-            <a:ext cx="7810500" cy="209550"/>
+            <a:ext cx="4000500" cy="209550"/>
           </a:xfrm>
           <a:prstGeom xmlns:a="http://schemas.openxmlformats.org/drawingml/2006/main" prst="rect">
             <a:avLst/>
@@ -8432,7 +8520,7 @@
                   <a:srgbClr val="52615B"/>
                 </a:solidFill>
               </a:rPr>
-              <a:t>Unofficial material | Source: products/shopify-collective/architecture.md</a:t>
+              <a:t>Shopify Collective</a:t>
             </a:r>
           </a:p>
         </p:txBody>
@@ -8442,7 +8530,7 @@
           <p:cNvPr id="13" name="">
             <a:extLst xmlns:a="http://schemas.openxmlformats.org/drawingml/2006/main">
               <a:ext uri="{FF2B5EF4-FFF2-40B4-BE49-F238E27FC236}">
-                <a16:creationId xmlns:a16="http://schemas.microsoft.com/office/drawing/2014/main" id="{985BF25C-CBC4-4643-B90C-CE252C70C231}"/>
+                <a16:creationId xmlns:a16="http://schemas.microsoft.com/office/drawing/2014/main" id="{00AD10DA-CB1A-4B4D-9341-CA978202F8F8}"/>
               </a:ext>
             </a:extLst>
           </p:cNvPr>
@@ -8490,7 +8578,7 @@
     </p:spTree>
     <p:extLst>
       <p:ext uri="{BB962C8B-B14F-4D97-AF65-F5344CB8AC3E}">
-        <p14:creationId xmlns:p14="http://schemas.microsoft.com/office/powerpoint/2010/main" val="1495922443"/>
+        <p14:creationId xmlns:p14="http://schemas.microsoft.com/office/powerpoint/2010/main" val="1398457189"/>
       </p:ext>
     </p:extLst>
   </p:cSld>
@@ -8521,7 +8609,7 @@
           <p:cNvPr id="1" name="">
             <a:extLst xmlns:a="http://schemas.openxmlformats.org/drawingml/2006/main">
               <a:ext uri="{FF2B5EF4-FFF2-40B4-BE49-F238E27FC236}">
-                <a16:creationId xmlns:a16="http://schemas.microsoft.com/office/drawing/2014/main" id="{6E7940B6-E8D6-46DF-A661-532F98C77306}"/>
+                <a16:creationId xmlns:a16="http://schemas.microsoft.com/office/drawing/2014/main" id="{DC3365E4-CA14-4A99-A342-51ED7BD43529}"/>
               </a:ext>
             </a:extLst>
           </p:cNvPr>
@@ -8571,7 +8659,7 @@
           <p:cNvPr id="2" name="">
             <a:extLst xmlns:a="http://schemas.openxmlformats.org/drawingml/2006/main">
               <a:ext uri="{FF2B5EF4-FFF2-40B4-BE49-F238E27FC236}">
-                <a16:creationId xmlns:a16="http://schemas.microsoft.com/office/drawing/2014/main" id="{3260941F-8CFA-4AC2-BE01-53D5095A2C77}"/>
+                <a16:creationId xmlns:a16="http://schemas.microsoft.com/office/drawing/2014/main" id="{E2EFBB7A-FA3E-4325-A12B-DE9DA3CC6A90}"/>
               </a:ext>
             </a:extLst>
           </p:cNvPr>
@@ -8621,7 +8709,7 @@
           <p:cNvPr id="3" name="">
             <a:extLst xmlns:a="http://schemas.openxmlformats.org/drawingml/2006/main">
               <a:ext uri="{FF2B5EF4-FFF2-40B4-BE49-F238E27FC236}">
-                <a16:creationId xmlns:a16="http://schemas.microsoft.com/office/drawing/2014/main" id="{93F3C389-59D4-4889-98C4-3ABAE63D1A40}"/>
+                <a16:creationId xmlns:a16="http://schemas.microsoft.com/office/drawing/2014/main" id="{6C7AA24E-3C42-41E8-8178-8997A754D733}"/>
               </a:ext>
             </a:extLst>
           </p:cNvPr>
@@ -8671,7 +8759,7 @@
           <p:cNvPr id="4" name="">
             <a:extLst xmlns:a="http://schemas.openxmlformats.org/drawingml/2006/main">
               <a:ext uri="{FF2B5EF4-FFF2-40B4-BE49-F238E27FC236}">
-                <a16:creationId xmlns:a16="http://schemas.microsoft.com/office/drawing/2014/main" id="{A8C7756C-91C5-4670-895A-5413667AB2EE}"/>
+                <a16:creationId xmlns:a16="http://schemas.microsoft.com/office/drawing/2014/main" id="{81CCF18A-6487-4A54-A981-33246B21DF65}"/>
               </a:ext>
             </a:extLst>
           </p:cNvPr>
@@ -8702,7 +8790,7 @@
           <p:cNvPr id="5" name="">
             <a:extLst xmlns:a="http://schemas.openxmlformats.org/drawingml/2006/main">
               <a:ext uri="{FF2B5EF4-FFF2-40B4-BE49-F238E27FC236}">
-                <a16:creationId xmlns:a16="http://schemas.microsoft.com/office/drawing/2014/main" id="{F69C2DED-E5AF-4650-A0C0-C98981050F74}"/>
+                <a16:creationId xmlns:a16="http://schemas.microsoft.com/office/drawing/2014/main" id="{D4BFE595-4B1A-4290-921B-275733A4097E}"/>
               </a:ext>
             </a:extLst>
           </p:cNvPr>
@@ -8758,7 +8846,7 @@
           <p:cNvPr id="6" name="">
             <a:extLst xmlns:a="http://schemas.openxmlformats.org/drawingml/2006/main">
               <a:ext uri="{FF2B5EF4-FFF2-40B4-BE49-F238E27FC236}">
-                <a16:creationId xmlns:a16="http://schemas.microsoft.com/office/drawing/2014/main" id="{2DA594AA-34DC-4467-8CB9-890038A0B33C}"/>
+                <a16:creationId xmlns:a16="http://schemas.microsoft.com/office/drawing/2014/main" id="{8AB9D602-92C2-4E7F-8AE3-A89B199C2201}"/>
               </a:ext>
             </a:extLst>
           </p:cNvPr>
@@ -8808,7 +8896,7 @@
           <p:cNvPr id="7" name="">
             <a:extLst xmlns:a="http://schemas.openxmlformats.org/drawingml/2006/main">
               <a:ext uri="{FF2B5EF4-FFF2-40B4-BE49-F238E27FC236}">
-                <a16:creationId xmlns:a16="http://schemas.microsoft.com/office/drawing/2014/main" id="{C6868768-0E97-49C3-BA92-C8C5826EFC16}"/>
+                <a16:creationId xmlns:a16="http://schemas.microsoft.com/office/drawing/2014/main" id="{AFED1023-6589-439F-8005-1CB2DB611D49}"/>
               </a:ext>
             </a:extLst>
           </p:cNvPr>
@@ -8858,7 +8946,7 @@
           <p:cNvPr id="8" name="">
             <a:extLst xmlns:a="http://schemas.openxmlformats.org/drawingml/2006/main">
               <a:ext uri="{FF2B5EF4-FFF2-40B4-BE49-F238E27FC236}">
-                <a16:creationId xmlns:a16="http://schemas.microsoft.com/office/drawing/2014/main" id="{1777E084-DB4E-4A69-A85D-8753124C82A8}"/>
+                <a16:creationId xmlns:a16="http://schemas.microsoft.com/office/drawing/2014/main" id="{C47B63C3-54EF-4659-AA2C-27A958D37880}"/>
               </a:ext>
             </a:extLst>
           </p:cNvPr>
@@ -8908,7 +8996,7 @@
           <p:cNvPr id="9" name="">
             <a:extLst xmlns:a="http://schemas.openxmlformats.org/drawingml/2006/main">
               <a:ext uri="{FF2B5EF4-FFF2-40B4-BE49-F238E27FC236}">
-                <a16:creationId xmlns:a16="http://schemas.microsoft.com/office/drawing/2014/main" id="{835F2975-CB7C-4B78-B308-7950C07E85B3}"/>
+                <a16:creationId xmlns:a16="http://schemas.microsoft.com/office/drawing/2014/main" id="{4A842521-ED9E-4C9D-922C-08637E3FF037}"/>
               </a:ext>
             </a:extLst>
           </p:cNvPr>
@@ -8964,7 +9052,7 @@
           <p:cNvPr id="10" name="">
             <a:extLst xmlns:a="http://schemas.openxmlformats.org/drawingml/2006/main">
               <a:ext uri="{FF2B5EF4-FFF2-40B4-BE49-F238E27FC236}">
-                <a16:creationId xmlns:a16="http://schemas.microsoft.com/office/drawing/2014/main" id="{8C71BD8A-9DC6-4588-8DD1-0D12C9702063}"/>
+                <a16:creationId xmlns:a16="http://schemas.microsoft.com/office/drawing/2014/main" id="{1B379771-F7B9-42BC-A600-C5D9FB99BDA9}"/>
               </a:ext>
             </a:extLst>
           </p:cNvPr>
@@ -9014,7 +9102,7 @@
           <p:cNvPr id="11" name="">
             <a:extLst xmlns:a="http://schemas.openxmlformats.org/drawingml/2006/main">
               <a:ext uri="{FF2B5EF4-FFF2-40B4-BE49-F238E27FC236}">
-                <a16:creationId xmlns:a16="http://schemas.microsoft.com/office/drawing/2014/main" id="{7E42BFDD-18E9-4427-8697-F5CE0C824693}"/>
+                <a16:creationId xmlns:a16="http://schemas.microsoft.com/office/drawing/2014/main" id="{902285C9-404F-40A1-B864-AABA19269A50}"/>
               </a:ext>
             </a:extLst>
           </p:cNvPr>
@@ -9064,7 +9152,7 @@
           <p:cNvPr id="12" name="">
             <a:extLst xmlns:a="http://schemas.openxmlformats.org/drawingml/2006/main">
               <a:ext uri="{FF2B5EF4-FFF2-40B4-BE49-F238E27FC236}">
-                <a16:creationId xmlns:a16="http://schemas.microsoft.com/office/drawing/2014/main" id="{C7D98BC8-CC2C-47F6-B69C-6E08C7B0D36A}"/>
+                <a16:creationId xmlns:a16="http://schemas.microsoft.com/office/drawing/2014/main" id="{7432E043-7BAF-4AB8-B59F-CEE5D3C523D1}"/>
               </a:ext>
             </a:extLst>
           </p:cNvPr>
@@ -9114,7 +9202,7 @@
           <p:cNvPr id="13" name="">
             <a:extLst xmlns:a="http://schemas.openxmlformats.org/drawingml/2006/main">
               <a:ext uri="{FF2B5EF4-FFF2-40B4-BE49-F238E27FC236}">
-                <a16:creationId xmlns:a16="http://schemas.microsoft.com/office/drawing/2014/main" id="{FEAA94BC-A93C-4502-A031-225CA1BADCA9}"/>
+                <a16:creationId xmlns:a16="http://schemas.microsoft.com/office/drawing/2014/main" id="{63D13F09-B8D4-4712-8A84-06C435D6DA40}"/>
               </a:ext>
             </a:extLst>
           </p:cNvPr>
@@ -9170,7 +9258,7 @@
           <p:cNvPr id="14" name="">
             <a:extLst xmlns:a="http://schemas.openxmlformats.org/drawingml/2006/main">
               <a:ext uri="{FF2B5EF4-FFF2-40B4-BE49-F238E27FC236}">
-                <a16:creationId xmlns:a16="http://schemas.microsoft.com/office/drawing/2014/main" id="{92E9AFB7-3063-46EB-A0F5-90B23A9B6952}"/>
+                <a16:creationId xmlns:a16="http://schemas.microsoft.com/office/drawing/2014/main" id="{288984C1-0CA4-4238-BE5D-75CB91402326}"/>
               </a:ext>
             </a:extLst>
           </p:cNvPr>
@@ -9220,7 +9308,7 @@
           <p:cNvPr id="15" name="">
             <a:extLst xmlns:a="http://schemas.openxmlformats.org/drawingml/2006/main">
               <a:ext uri="{FF2B5EF4-FFF2-40B4-BE49-F238E27FC236}">
-                <a16:creationId xmlns:a16="http://schemas.microsoft.com/office/drawing/2014/main" id="{B3F0BAB6-5AE9-4BE5-98D1-9F4CBBAC442C}"/>
+                <a16:creationId xmlns:a16="http://schemas.microsoft.com/office/drawing/2014/main" id="{22AB4739-C3C4-4D80-84A6-C580D9FBA5D6}"/>
               </a:ext>
             </a:extLst>
           </p:cNvPr>
@@ -9270,7 +9358,7 @@
           <p:cNvPr id="16" name="">
             <a:extLst xmlns:a="http://schemas.openxmlformats.org/drawingml/2006/main">
               <a:ext uri="{FF2B5EF4-FFF2-40B4-BE49-F238E27FC236}">
-                <a16:creationId xmlns:a16="http://schemas.microsoft.com/office/drawing/2014/main" id="{EAF26B9D-DBBC-4DC1-B29F-EA6610B7697A}"/>
+                <a16:creationId xmlns:a16="http://schemas.microsoft.com/office/drawing/2014/main" id="{03A63CFA-442E-4B3C-9421-5A1EEF4AF4F2}"/>
               </a:ext>
             </a:extLst>
           </p:cNvPr>
@@ -9320,7 +9408,7 @@
           <p:cNvPr id="17" name="">
             <a:extLst xmlns:a="http://schemas.openxmlformats.org/drawingml/2006/main">
               <a:ext uri="{FF2B5EF4-FFF2-40B4-BE49-F238E27FC236}">
-                <a16:creationId xmlns:a16="http://schemas.microsoft.com/office/drawing/2014/main" id="{D8D1591E-7054-40E0-B378-078D1B068194}"/>
+                <a16:creationId xmlns:a16="http://schemas.microsoft.com/office/drawing/2014/main" id="{70F3E946-F7A6-4C2C-9F35-C24BDB2D4BF5}"/>
               </a:ext>
             </a:extLst>
           </p:cNvPr>
@@ -9376,7 +9464,7 @@
           <p:cNvPr id="18" name="">
             <a:extLst xmlns:a="http://schemas.openxmlformats.org/drawingml/2006/main">
               <a:ext uri="{FF2B5EF4-FFF2-40B4-BE49-F238E27FC236}">
-                <a16:creationId xmlns:a16="http://schemas.microsoft.com/office/drawing/2014/main" id="{990E133F-46E8-4008-B263-1ECC6C414ACA}"/>
+                <a16:creationId xmlns:a16="http://schemas.microsoft.com/office/drawing/2014/main" id="{9C1A23D1-0475-4BC4-B6EA-A8A564F2D937}"/>
               </a:ext>
             </a:extLst>
           </p:cNvPr>
@@ -9426,7 +9514,7 @@
           <p:cNvPr id="19" name="">
             <a:extLst xmlns:a="http://schemas.openxmlformats.org/drawingml/2006/main">
               <a:ext uri="{FF2B5EF4-FFF2-40B4-BE49-F238E27FC236}">
-                <a16:creationId xmlns:a16="http://schemas.microsoft.com/office/drawing/2014/main" id="{6509674F-8E5B-4F01-A9A2-44758903A930}"/>
+                <a16:creationId xmlns:a16="http://schemas.microsoft.com/office/drawing/2014/main" id="{62EBA8FE-FB4F-4EE2-8809-22B28114E15F}"/>
               </a:ext>
             </a:extLst>
           </p:cNvPr>
@@ -9476,7 +9564,7 @@
           <p:cNvPr id="20" name="">
             <a:extLst xmlns:a="http://schemas.openxmlformats.org/drawingml/2006/main">
               <a:ext uri="{FF2B5EF4-FFF2-40B4-BE49-F238E27FC236}">
-                <a16:creationId xmlns:a16="http://schemas.microsoft.com/office/drawing/2014/main" id="{CCBF82E4-D440-4012-AE74-5A42B450F373}"/>
+                <a16:creationId xmlns:a16="http://schemas.microsoft.com/office/drawing/2014/main" id="{810A5695-7D19-4222-921B-4F314A6788D6}"/>
               </a:ext>
             </a:extLst>
           </p:cNvPr>
@@ -9526,7 +9614,7 @@
           <p:cNvPr id="21" name="">
             <a:extLst xmlns:a="http://schemas.openxmlformats.org/drawingml/2006/main">
               <a:ext uri="{FF2B5EF4-FFF2-40B4-BE49-F238E27FC236}">
-                <a16:creationId xmlns:a16="http://schemas.microsoft.com/office/drawing/2014/main" id="{57AE8731-A7D0-4DC0-8480-8DF067074E5A}"/>
+                <a16:creationId xmlns:a16="http://schemas.microsoft.com/office/drawing/2014/main" id="{8B3DD677-52B9-41EF-86F7-8373A64CBE02}"/>
               </a:ext>
             </a:extLst>
           </p:cNvPr>
@@ -9582,7 +9670,7 @@
           <p:cNvPr id="22" name="">
             <a:extLst xmlns:a="http://schemas.openxmlformats.org/drawingml/2006/main">
               <a:ext uri="{FF2B5EF4-FFF2-40B4-BE49-F238E27FC236}">
-                <a16:creationId xmlns:a16="http://schemas.microsoft.com/office/drawing/2014/main" id="{E4817D6B-F41C-49C9-B4EA-DA90A6DF468A}"/>
+                <a16:creationId xmlns:a16="http://schemas.microsoft.com/office/drawing/2014/main" id="{5FB189AC-9B5D-42D8-89A5-B1E435A5013A}"/>
               </a:ext>
             </a:extLst>
           </p:cNvPr>
@@ -9632,7 +9720,7 @@
           <p:cNvPr id="23" name="">
             <a:extLst xmlns:a="http://schemas.openxmlformats.org/drawingml/2006/main">
               <a:ext uri="{FF2B5EF4-FFF2-40B4-BE49-F238E27FC236}">
-                <a16:creationId xmlns:a16="http://schemas.microsoft.com/office/drawing/2014/main" id="{7F8C87F6-3424-4569-9B87-F71509B950CC}"/>
+                <a16:creationId xmlns:a16="http://schemas.microsoft.com/office/drawing/2014/main" id="{7EF6F298-27FD-4E00-A122-F721CD15C8F8}"/>
               </a:ext>
             </a:extLst>
           </p:cNvPr>
@@ -9682,7 +9770,7 @@
           <p:cNvPr id="24" name="">
             <a:extLst xmlns:a="http://schemas.openxmlformats.org/drawingml/2006/main">
               <a:ext uri="{FF2B5EF4-FFF2-40B4-BE49-F238E27FC236}">
-                <a16:creationId xmlns:a16="http://schemas.microsoft.com/office/drawing/2014/main" id="{A341B7BB-9032-46C3-8544-BCEF93BAD536}"/>
+                <a16:creationId xmlns:a16="http://schemas.microsoft.com/office/drawing/2014/main" id="{8DF85DED-0A7C-4E10-A8E5-8706A1903356}"/>
               </a:ext>
             </a:extLst>
           </p:cNvPr>
@@ -9713,7 +9801,7 @@
           <p:cNvPr id="25" name="">
             <a:extLst xmlns:a="http://schemas.openxmlformats.org/drawingml/2006/main">
               <a:ext uri="{FF2B5EF4-FFF2-40B4-BE49-F238E27FC236}">
-                <a16:creationId xmlns:a16="http://schemas.microsoft.com/office/drawing/2014/main" id="{E15BA010-3290-436A-959B-D5CBB613772D}"/>
+                <a16:creationId xmlns:a16="http://schemas.microsoft.com/office/drawing/2014/main" id="{E425A475-BA62-43EB-950A-D98FED8D7F0D}"/>
               </a:ext>
             </a:extLst>
           </p:cNvPr>
@@ -9725,7 +9813,7 @@
         <p:spPr>
           <a:xfrm xmlns:a="http://schemas.openxmlformats.org/drawingml/2006/main">
             <a:off x="609600" y="6419850"/>
-            <a:ext cx="7810500" cy="209550"/>
+            <a:ext cx="4000500" cy="209550"/>
           </a:xfrm>
           <a:prstGeom xmlns:a="http://schemas.openxmlformats.org/drawingml/2006/main" prst="rect">
             <a:avLst/>
@@ -9753,7 +9841,7 @@
                   <a:srgbClr val="52615B"/>
                 </a:solidFill>
               </a:rPr>
-              <a:t>Unofficial material | Source: products/shopify-collective/architecture.md</a:t>
+              <a:t>Shopify Collective</a:t>
             </a:r>
           </a:p>
         </p:txBody>
@@ -9763,7 +9851,7 @@
           <p:cNvPr id="26" name="">
             <a:extLst xmlns:a="http://schemas.openxmlformats.org/drawingml/2006/main">
               <a:ext uri="{FF2B5EF4-FFF2-40B4-BE49-F238E27FC236}">
-                <a16:creationId xmlns:a16="http://schemas.microsoft.com/office/drawing/2014/main" id="{CCBB0E43-CBB9-43E8-A6A6-5B0429A6F71B}"/>
+                <a16:creationId xmlns:a16="http://schemas.microsoft.com/office/drawing/2014/main" id="{FC7C7993-C803-4067-BBB0-A92C25B8B2D0}"/>
               </a:ext>
             </a:extLst>
           </p:cNvPr>
@@ -9811,7 +9899,7 @@
     </p:spTree>
     <p:extLst>
       <p:ext uri="{BB962C8B-B14F-4D97-AF65-F5344CB8AC3E}">
-        <p14:creationId xmlns:p14="http://schemas.microsoft.com/office/powerpoint/2010/main" val="486083928"/>
+        <p14:creationId xmlns:p14="http://schemas.microsoft.com/office/powerpoint/2010/main" val="1137087871"/>
       </p:ext>
     </p:extLst>
   </p:cSld>
@@ -9842,7 +9930,7 @@
           <p:cNvPr id="1" name="">
             <a:extLst xmlns:a="http://schemas.openxmlformats.org/drawingml/2006/main">
               <a:ext uri="{FF2B5EF4-FFF2-40B4-BE49-F238E27FC236}">
-                <a16:creationId xmlns:a16="http://schemas.microsoft.com/office/drawing/2014/main" id="{B4637E30-2000-420D-B73E-B00532F7436F}"/>
+                <a16:creationId xmlns:a16="http://schemas.microsoft.com/office/drawing/2014/main" id="{F4F52F33-04EA-4EA1-8A1C-FC03F662D3F4}"/>
               </a:ext>
             </a:extLst>
           </p:cNvPr>
@@ -9892,7 +9980,7 @@
           <p:cNvPr id="2" name="">
             <a:extLst xmlns:a="http://schemas.openxmlformats.org/drawingml/2006/main">
               <a:ext uri="{FF2B5EF4-FFF2-40B4-BE49-F238E27FC236}">
-                <a16:creationId xmlns:a16="http://schemas.microsoft.com/office/drawing/2014/main" id="{2812D58A-1113-467B-AF39-F2A9C43C2444}"/>
+                <a16:creationId xmlns:a16="http://schemas.microsoft.com/office/drawing/2014/main" id="{D129DF40-EA56-4AE4-A331-63033384411A}"/>
               </a:ext>
             </a:extLst>
           </p:cNvPr>
@@ -9942,7 +10030,7 @@
           <p:cNvPr id="3" name="">
             <a:extLst xmlns:a="http://schemas.openxmlformats.org/drawingml/2006/main">
               <a:ext uri="{FF2B5EF4-FFF2-40B4-BE49-F238E27FC236}">
-                <a16:creationId xmlns:a16="http://schemas.microsoft.com/office/drawing/2014/main" id="{70B0D19B-DE9D-4D2B-8D53-FF281C9E7911}"/>
+                <a16:creationId xmlns:a16="http://schemas.microsoft.com/office/drawing/2014/main" id="{6454B820-D627-428F-9AAA-DA7344A05E94}"/>
               </a:ext>
             </a:extLst>
           </p:cNvPr>
@@ -9992,7 +10080,7 @@
           <p:cNvPr id="4" name="">
             <a:extLst xmlns:a="http://schemas.openxmlformats.org/drawingml/2006/main">
               <a:ext uri="{FF2B5EF4-FFF2-40B4-BE49-F238E27FC236}">
-                <a16:creationId xmlns:a16="http://schemas.microsoft.com/office/drawing/2014/main" id="{F6176E61-6509-4C75-B885-14277FCB2DCC}"/>
+                <a16:creationId xmlns:a16="http://schemas.microsoft.com/office/drawing/2014/main" id="{A5B9B81D-1F22-43C6-8E0A-A42BD8408A33}"/>
               </a:ext>
             </a:extLst>
           </p:cNvPr>
@@ -10023,7 +10111,7 @@
           <p:cNvPr id="5" name="">
             <a:extLst xmlns:a="http://schemas.openxmlformats.org/drawingml/2006/main">
               <a:ext uri="{FF2B5EF4-FFF2-40B4-BE49-F238E27FC236}">
-                <a16:creationId xmlns:a16="http://schemas.microsoft.com/office/drawing/2014/main" id="{18C8CA0C-66F9-422E-9AF2-20C5CF8FA70D}"/>
+                <a16:creationId xmlns:a16="http://schemas.microsoft.com/office/drawing/2014/main" id="{3BAC4BB1-B4A1-46EE-AEB9-43996C0404C2}"/>
               </a:ext>
             </a:extLst>
           </p:cNvPr>
@@ -10079,7 +10167,7 @@
           <p:cNvPr id="6" name="">
             <a:extLst xmlns:a="http://schemas.openxmlformats.org/drawingml/2006/main">
               <a:ext uri="{FF2B5EF4-FFF2-40B4-BE49-F238E27FC236}">
-                <a16:creationId xmlns:a16="http://schemas.microsoft.com/office/drawing/2014/main" id="{9C56212A-329D-4DA9-BCD3-8CAFCC5EAEE9}"/>
+                <a16:creationId xmlns:a16="http://schemas.microsoft.com/office/drawing/2014/main" id="{01FBDF77-9EBC-424F-BED9-96B5992B4BB7}"/>
               </a:ext>
             </a:extLst>
           </p:cNvPr>
@@ -10129,7 +10217,7 @@
           <p:cNvPr id="7" name="">
             <a:extLst xmlns:a="http://schemas.openxmlformats.org/drawingml/2006/main">
               <a:ext uri="{FF2B5EF4-FFF2-40B4-BE49-F238E27FC236}">
-                <a16:creationId xmlns:a16="http://schemas.microsoft.com/office/drawing/2014/main" id="{9716EDE3-F8B0-4E9D-A83E-DE25E0A9B5E0}"/>
+                <a16:creationId xmlns:a16="http://schemas.microsoft.com/office/drawing/2014/main" id="{E021B8B2-41E4-4EA9-885B-150E3A0192FA}"/>
               </a:ext>
             </a:extLst>
           </p:cNvPr>
@@ -10179,7 +10267,7 @@
           <p:cNvPr id="8" name="">
             <a:extLst xmlns:a="http://schemas.openxmlformats.org/drawingml/2006/main">
               <a:ext uri="{FF2B5EF4-FFF2-40B4-BE49-F238E27FC236}">
-                <a16:creationId xmlns:a16="http://schemas.microsoft.com/office/drawing/2014/main" id="{90A893BC-929A-40CF-BCF9-9D07B4BBBFE8}"/>
+                <a16:creationId xmlns:a16="http://schemas.microsoft.com/office/drawing/2014/main" id="{4359CD11-2BCA-4511-A479-BC6FDC5131BB}"/>
               </a:ext>
             </a:extLst>
           </p:cNvPr>
@@ -10229,7 +10317,7 @@
           <p:cNvPr id="9" name="">
             <a:extLst xmlns:a="http://schemas.openxmlformats.org/drawingml/2006/main">
               <a:ext uri="{FF2B5EF4-FFF2-40B4-BE49-F238E27FC236}">
-                <a16:creationId xmlns:a16="http://schemas.microsoft.com/office/drawing/2014/main" id="{22ED64A4-21BC-4EC6-9886-85410DAE9950}"/>
+                <a16:creationId xmlns:a16="http://schemas.microsoft.com/office/drawing/2014/main" id="{19CF9446-6BCF-4E06-823F-05153B23C184}"/>
               </a:ext>
             </a:extLst>
           </p:cNvPr>
@@ -10285,7 +10373,7 @@
           <p:cNvPr id="10" name="">
             <a:extLst xmlns:a="http://schemas.openxmlformats.org/drawingml/2006/main">
               <a:ext uri="{FF2B5EF4-FFF2-40B4-BE49-F238E27FC236}">
-                <a16:creationId xmlns:a16="http://schemas.microsoft.com/office/drawing/2014/main" id="{8B49EF98-6E3C-432B-8441-823AD32E6945}"/>
+                <a16:creationId xmlns:a16="http://schemas.microsoft.com/office/drawing/2014/main" id="{38940E17-32FF-42C6-AD81-72388CC0618C}"/>
               </a:ext>
             </a:extLst>
           </p:cNvPr>
@@ -10335,7 +10423,7 @@
           <p:cNvPr id="11" name="">
             <a:extLst xmlns:a="http://schemas.openxmlformats.org/drawingml/2006/main">
               <a:ext uri="{FF2B5EF4-FFF2-40B4-BE49-F238E27FC236}">
-                <a16:creationId xmlns:a16="http://schemas.microsoft.com/office/drawing/2014/main" id="{1CEF3E4F-67F3-4AF4-938C-1281163FA728}"/>
+                <a16:creationId xmlns:a16="http://schemas.microsoft.com/office/drawing/2014/main" id="{926283AB-F886-4CF1-8011-ED6183ACC720}"/>
               </a:ext>
             </a:extLst>
           </p:cNvPr>
@@ -10385,7 +10473,7 @@
           <p:cNvPr id="12" name="">
             <a:extLst xmlns:a="http://schemas.openxmlformats.org/drawingml/2006/main">
               <a:ext uri="{FF2B5EF4-FFF2-40B4-BE49-F238E27FC236}">
-                <a16:creationId xmlns:a16="http://schemas.microsoft.com/office/drawing/2014/main" id="{BB45F5F7-06D9-4DE4-B58E-085E067FF0EA}"/>
+                <a16:creationId xmlns:a16="http://schemas.microsoft.com/office/drawing/2014/main" id="{F1297759-F340-45B8-8343-C38E78402300}"/>
               </a:ext>
             </a:extLst>
           </p:cNvPr>
@@ -10435,7 +10523,7 @@
           <p:cNvPr id="13" name="">
             <a:extLst xmlns:a="http://schemas.openxmlformats.org/drawingml/2006/main">
               <a:ext uri="{FF2B5EF4-FFF2-40B4-BE49-F238E27FC236}">
-                <a16:creationId xmlns:a16="http://schemas.microsoft.com/office/drawing/2014/main" id="{9FE7D626-8619-44EA-8568-5552D7FC48DB}"/>
+                <a16:creationId xmlns:a16="http://schemas.microsoft.com/office/drawing/2014/main" id="{1E4E31A6-F621-45BB-8BD2-01C41E059CA3}"/>
               </a:ext>
             </a:extLst>
           </p:cNvPr>
@@ -10491,7 +10579,7 @@
           <p:cNvPr id="14" name="">
             <a:extLst xmlns:a="http://schemas.openxmlformats.org/drawingml/2006/main">
               <a:ext uri="{FF2B5EF4-FFF2-40B4-BE49-F238E27FC236}">
-                <a16:creationId xmlns:a16="http://schemas.microsoft.com/office/drawing/2014/main" id="{171BC77E-9351-4F5E-9BA2-1A3C21D3C5D2}"/>
+                <a16:creationId xmlns:a16="http://schemas.microsoft.com/office/drawing/2014/main" id="{542880FA-B972-4A41-AAF7-D68661FB8C73}"/>
               </a:ext>
             </a:extLst>
           </p:cNvPr>
@@ -10541,7 +10629,7 @@
           <p:cNvPr id="15" name="">
             <a:extLst xmlns:a="http://schemas.openxmlformats.org/drawingml/2006/main">
               <a:ext uri="{FF2B5EF4-FFF2-40B4-BE49-F238E27FC236}">
-                <a16:creationId xmlns:a16="http://schemas.microsoft.com/office/drawing/2014/main" id="{3E3FB714-21BC-4F1D-87D0-007718E9AB70}"/>
+                <a16:creationId xmlns:a16="http://schemas.microsoft.com/office/drawing/2014/main" id="{18862897-79C3-41A9-A0F6-798A5FB9F5CA}"/>
               </a:ext>
             </a:extLst>
           </p:cNvPr>
@@ -10581,7 +10669,7 @@
                   <a:srgbClr val="52615B"/>
                 </a:solidFill>
               </a:rPr>
-              <a:t>shopifyPaymentsAccount adjustments can be queried for the associated order.</a:t>
+              <a:t>Shopify Payments balance adjustments can be checked for the associated order.</a:t>
             </a:r>
           </a:p>
         </p:txBody>
@@ -10591,7 +10679,7 @@
           <p:cNvPr id="16" name="">
             <a:extLst xmlns:a="http://schemas.openxmlformats.org/drawingml/2006/main">
               <a:ext uri="{FF2B5EF4-FFF2-40B4-BE49-F238E27FC236}">
-                <a16:creationId xmlns:a16="http://schemas.microsoft.com/office/drawing/2014/main" id="{CAFFDEC3-078A-43D3-B43E-96F6FA7A2A40}"/>
+                <a16:creationId xmlns:a16="http://schemas.microsoft.com/office/drawing/2014/main" id="{E7213CDC-BE40-4FA1-957A-B681252A085F}"/>
               </a:ext>
             </a:extLst>
           </p:cNvPr>
@@ -10641,7 +10729,7 @@
           <p:cNvPr id="17" name="">
             <a:extLst xmlns:a="http://schemas.openxmlformats.org/drawingml/2006/main">
               <a:ext uri="{FF2B5EF4-FFF2-40B4-BE49-F238E27FC236}">
-                <a16:creationId xmlns:a16="http://schemas.microsoft.com/office/drawing/2014/main" id="{80405815-732F-4B5A-A05D-BFCE28A8E7CE}"/>
+                <a16:creationId xmlns:a16="http://schemas.microsoft.com/office/drawing/2014/main" id="{F6E9FA26-02DE-4C23-B6F6-8B308D33CEED}"/>
               </a:ext>
             </a:extLst>
           </p:cNvPr>
@@ -10697,7 +10785,7 @@
           <p:cNvPr id="18" name="">
             <a:extLst xmlns:a="http://schemas.openxmlformats.org/drawingml/2006/main">
               <a:ext uri="{FF2B5EF4-FFF2-40B4-BE49-F238E27FC236}">
-                <a16:creationId xmlns:a16="http://schemas.microsoft.com/office/drawing/2014/main" id="{3B667524-E251-4EAD-AA86-2115F9F90BB7}"/>
+                <a16:creationId xmlns:a16="http://schemas.microsoft.com/office/drawing/2014/main" id="{E0190966-FCF2-4853-B557-7B6CA6091607}"/>
               </a:ext>
             </a:extLst>
           </p:cNvPr>
@@ -10747,7 +10835,7 @@
           <p:cNvPr id="19" name="">
             <a:extLst xmlns:a="http://schemas.openxmlformats.org/drawingml/2006/main">
               <a:ext uri="{FF2B5EF4-FFF2-40B4-BE49-F238E27FC236}">
-                <a16:creationId xmlns:a16="http://schemas.microsoft.com/office/drawing/2014/main" id="{5FDEBB7A-8717-49FB-B973-75E0369DEC7A}"/>
+                <a16:creationId xmlns:a16="http://schemas.microsoft.com/office/drawing/2014/main" id="{569D620D-E1B3-4747-900F-C5ECE5D19B82}"/>
               </a:ext>
             </a:extLst>
           </p:cNvPr>
@@ -10797,7 +10885,7 @@
           <p:cNvPr id="20" name="">
             <a:extLst xmlns:a="http://schemas.openxmlformats.org/drawingml/2006/main">
               <a:ext uri="{FF2B5EF4-FFF2-40B4-BE49-F238E27FC236}">
-                <a16:creationId xmlns:a16="http://schemas.microsoft.com/office/drawing/2014/main" id="{82395FE8-B814-4DE0-9104-9BC328D40AAC}"/>
+                <a16:creationId xmlns:a16="http://schemas.microsoft.com/office/drawing/2014/main" id="{910A063F-D784-4F60-85CC-F8BF0D4751F7}"/>
               </a:ext>
             </a:extLst>
           </p:cNvPr>
@@ -10828,7 +10916,7 @@
           <p:cNvPr id="21" name="">
             <a:extLst xmlns:a="http://schemas.openxmlformats.org/drawingml/2006/main">
               <a:ext uri="{FF2B5EF4-FFF2-40B4-BE49-F238E27FC236}">
-                <a16:creationId xmlns:a16="http://schemas.microsoft.com/office/drawing/2014/main" id="{3103417F-C868-419C-A85D-66E97BF617BE}"/>
+                <a16:creationId xmlns:a16="http://schemas.microsoft.com/office/drawing/2014/main" id="{169B5B54-3288-47B3-AC83-803B4E848C4B}"/>
               </a:ext>
             </a:extLst>
           </p:cNvPr>
@@ -10840,7 +10928,7 @@
         <p:spPr>
           <a:xfrm xmlns:a="http://schemas.openxmlformats.org/drawingml/2006/main">
             <a:off x="609600" y="6419850"/>
-            <a:ext cx="7810500" cy="209550"/>
+            <a:ext cx="4000500" cy="209550"/>
           </a:xfrm>
           <a:prstGeom xmlns:a="http://schemas.openxmlformats.org/drawingml/2006/main" prst="rect">
             <a:avLst/>
@@ -10868,7 +10956,7 @@
                   <a:srgbClr val="52615B"/>
                 </a:solidFill>
               </a:rPr>
-              <a:t>Unofficial material | Source: products/shopify-collective/architecture.md</a:t>
+              <a:t>Shopify Collective</a:t>
             </a:r>
           </a:p>
         </p:txBody>
@@ -10878,7 +10966,7 @@
           <p:cNvPr id="22" name="">
             <a:extLst xmlns:a="http://schemas.openxmlformats.org/drawingml/2006/main">
               <a:ext uri="{FF2B5EF4-FFF2-40B4-BE49-F238E27FC236}">
-                <a16:creationId xmlns:a16="http://schemas.microsoft.com/office/drawing/2014/main" id="{5D7E14AF-69AB-457B-AEA1-623E6185FE12}"/>
+                <a16:creationId xmlns:a16="http://schemas.microsoft.com/office/drawing/2014/main" id="{D35BA64B-F657-40AA-A871-E49CB2D26AD1}"/>
               </a:ext>
             </a:extLst>
           </p:cNvPr>
@@ -10926,7 +11014,7 @@
     </p:spTree>
     <p:extLst>
       <p:ext uri="{BB962C8B-B14F-4D97-AF65-F5344CB8AC3E}">
-        <p14:creationId xmlns:p14="http://schemas.microsoft.com/office/powerpoint/2010/main" val="1125022221"/>
+        <p14:creationId xmlns:p14="http://schemas.microsoft.com/office/powerpoint/2010/main" val="1853739516"/>
       </p:ext>
     </p:extLst>
   </p:cSld>
@@ -10957,7 +11045,7 @@
           <p:cNvPr id="1" name="">
             <a:extLst xmlns:a="http://schemas.openxmlformats.org/drawingml/2006/main">
               <a:ext uri="{FF2B5EF4-FFF2-40B4-BE49-F238E27FC236}">
-                <a16:creationId xmlns:a16="http://schemas.microsoft.com/office/drawing/2014/main" id="{5B3DA28C-B4DD-4D05-ACDE-05DDBF530710}"/>
+                <a16:creationId xmlns:a16="http://schemas.microsoft.com/office/drawing/2014/main" id="{75AB03CD-A280-480A-8700-F04BAABBB657}"/>
               </a:ext>
             </a:extLst>
           </p:cNvPr>
@@ -11007,7 +11095,7 @@
           <p:cNvPr id="2" name="">
             <a:extLst xmlns:a="http://schemas.openxmlformats.org/drawingml/2006/main">
               <a:ext uri="{FF2B5EF4-FFF2-40B4-BE49-F238E27FC236}">
-                <a16:creationId xmlns:a16="http://schemas.microsoft.com/office/drawing/2014/main" id="{73AC0D4F-3D32-425B-97F6-582020F3E2DD}"/>
+                <a16:creationId xmlns:a16="http://schemas.microsoft.com/office/drawing/2014/main" id="{2E992145-51B1-49B9-BD75-EF9A79F547DD}"/>
               </a:ext>
             </a:extLst>
           </p:cNvPr>
@@ -11057,7 +11145,7 @@
           <p:cNvPr id="3" name="">
             <a:extLst xmlns:a="http://schemas.openxmlformats.org/drawingml/2006/main">
               <a:ext uri="{FF2B5EF4-FFF2-40B4-BE49-F238E27FC236}">
-                <a16:creationId xmlns:a16="http://schemas.microsoft.com/office/drawing/2014/main" id="{E0932844-5E37-483E-95B0-EA217454CED9}"/>
+                <a16:creationId xmlns:a16="http://schemas.microsoft.com/office/drawing/2014/main" id="{81BD2715-CF47-41E1-9C38-4931820E8EFB}"/>
               </a:ext>
             </a:extLst>
           </p:cNvPr>
@@ -11107,7 +11195,7 @@
           <p:cNvPr id="4" name="">
             <a:extLst xmlns:a="http://schemas.openxmlformats.org/drawingml/2006/main">
               <a:ext uri="{FF2B5EF4-FFF2-40B4-BE49-F238E27FC236}">
-                <a16:creationId xmlns:a16="http://schemas.microsoft.com/office/drawing/2014/main" id="{53596732-5EBE-4542-9568-5CECE3FD7CA6}"/>
+                <a16:creationId xmlns:a16="http://schemas.microsoft.com/office/drawing/2014/main" id="{FC257705-E7C7-459D-AE85-1DD5A2235A36}"/>
               </a:ext>
             </a:extLst>
           </p:cNvPr>
@@ -11138,7 +11226,7 @@
           <p:cNvPr id="5" name="">
             <a:extLst xmlns:a="http://schemas.openxmlformats.org/drawingml/2006/main">
               <a:ext uri="{FF2B5EF4-FFF2-40B4-BE49-F238E27FC236}">
-                <a16:creationId xmlns:a16="http://schemas.microsoft.com/office/drawing/2014/main" id="{E23E0094-D1CF-4F9C-B6F7-D41D8819D1BC}"/>
+                <a16:creationId xmlns:a16="http://schemas.microsoft.com/office/drawing/2014/main" id="{6DC5DA66-0976-4431-963A-261C3AD8D55B}"/>
               </a:ext>
             </a:extLst>
           </p:cNvPr>
@@ -11194,7 +11282,7 @@
           <p:cNvPr id="6" name="">
             <a:extLst xmlns:a="http://schemas.openxmlformats.org/drawingml/2006/main">
               <a:ext uri="{FF2B5EF4-FFF2-40B4-BE49-F238E27FC236}">
-                <a16:creationId xmlns:a16="http://schemas.microsoft.com/office/drawing/2014/main" id="{316CC43D-3864-4892-A4D6-0FB89DF29770}"/>
+                <a16:creationId xmlns:a16="http://schemas.microsoft.com/office/drawing/2014/main" id="{469BD754-CBAC-4B1D-BA0C-FDC2287CED85}"/>
               </a:ext>
             </a:extLst>
           </p:cNvPr>
@@ -11250,7 +11338,7 @@
           <p:cNvPr id="7" name="">
             <a:extLst xmlns:a="http://schemas.openxmlformats.org/drawingml/2006/main">
               <a:ext uri="{FF2B5EF4-FFF2-40B4-BE49-F238E27FC236}">
-                <a16:creationId xmlns:a16="http://schemas.microsoft.com/office/drawing/2014/main" id="{80168320-01E0-4A16-88D3-46DE5F454AC6}"/>
+                <a16:creationId xmlns:a16="http://schemas.microsoft.com/office/drawing/2014/main" id="{C749498B-9E13-4711-9DE1-D6DCD65AA9F4}"/>
               </a:ext>
             </a:extLst>
           </p:cNvPr>
@@ -11306,7 +11394,7 @@
           <p:cNvPr id="8" name="">
             <a:extLst xmlns:a="http://schemas.openxmlformats.org/drawingml/2006/main">
               <a:ext uri="{FF2B5EF4-FFF2-40B4-BE49-F238E27FC236}">
-                <a16:creationId xmlns:a16="http://schemas.microsoft.com/office/drawing/2014/main" id="{1F56AE7F-CEDE-4068-8976-CCD0C8827C8D}"/>
+                <a16:creationId xmlns:a16="http://schemas.microsoft.com/office/drawing/2014/main" id="{D40A4D4F-8112-455F-BBD9-C449BC85DDAB}"/>
               </a:ext>
             </a:extLst>
           </p:cNvPr>
@@ -11362,7 +11450,7 @@
           <p:cNvPr id="9" name="">
             <a:extLst xmlns:a="http://schemas.openxmlformats.org/drawingml/2006/main">
               <a:ext uri="{FF2B5EF4-FFF2-40B4-BE49-F238E27FC236}">
-                <a16:creationId xmlns:a16="http://schemas.microsoft.com/office/drawing/2014/main" id="{98E16F1D-9623-4B38-AA07-946BBB87248F}"/>
+                <a16:creationId xmlns:a16="http://schemas.microsoft.com/office/drawing/2014/main" id="{1B6BE4DB-8023-48F1-9EA8-56C93AD96169}"/>
               </a:ext>
             </a:extLst>
           </p:cNvPr>
@@ -11418,7 +11506,7 @@
           <p:cNvPr id="10" name="">
             <a:extLst xmlns:a="http://schemas.openxmlformats.org/drawingml/2006/main">
               <a:ext uri="{FF2B5EF4-FFF2-40B4-BE49-F238E27FC236}">
-                <a16:creationId xmlns:a16="http://schemas.microsoft.com/office/drawing/2014/main" id="{2C75E0FC-716A-4C59-8EDF-FC4D55CE4F4B}"/>
+                <a16:creationId xmlns:a16="http://schemas.microsoft.com/office/drawing/2014/main" id="{8BD36572-0900-4322-836C-542CD3FD10B8}"/>
               </a:ext>
             </a:extLst>
           </p:cNvPr>
@@ -11474,7 +11562,7 @@
           <p:cNvPr id="11" name="">
             <a:extLst xmlns:a="http://schemas.openxmlformats.org/drawingml/2006/main">
               <a:ext uri="{FF2B5EF4-FFF2-40B4-BE49-F238E27FC236}">
-                <a16:creationId xmlns:a16="http://schemas.microsoft.com/office/drawing/2014/main" id="{1FA040DB-C96E-44B4-8516-FAACAC68FBFC}"/>
+                <a16:creationId xmlns:a16="http://schemas.microsoft.com/office/drawing/2014/main" id="{EC79A09D-50B6-460E-8E90-59398ACA5603}"/>
               </a:ext>
             </a:extLst>
           </p:cNvPr>
@@ -11530,7 +11618,7 @@
           <p:cNvPr id="12" name="">
             <a:extLst xmlns:a="http://schemas.openxmlformats.org/drawingml/2006/main">
               <a:ext uri="{FF2B5EF4-FFF2-40B4-BE49-F238E27FC236}">
-                <a16:creationId xmlns:a16="http://schemas.microsoft.com/office/drawing/2014/main" id="{9039286E-9F4C-4D09-A1D4-5ECAE8A777F2}"/>
+                <a16:creationId xmlns:a16="http://schemas.microsoft.com/office/drawing/2014/main" id="{8C413AEB-6DBB-4F30-88E0-8915158413F5}"/>
               </a:ext>
             </a:extLst>
           </p:cNvPr>
@@ -11586,7 +11674,7 @@
           <p:cNvPr id="13" name="">
             <a:extLst xmlns:a="http://schemas.openxmlformats.org/drawingml/2006/main">
               <a:ext uri="{FF2B5EF4-FFF2-40B4-BE49-F238E27FC236}">
-                <a16:creationId xmlns:a16="http://schemas.microsoft.com/office/drawing/2014/main" id="{E3232923-2624-4CBD-8830-3BAD85AF8E61}"/>
+                <a16:creationId xmlns:a16="http://schemas.microsoft.com/office/drawing/2014/main" id="{307EF48E-70BE-4BA8-843D-E58D411485EA}"/>
               </a:ext>
             </a:extLst>
           </p:cNvPr>
@@ -11642,7 +11730,7 @@
           <p:cNvPr id="14" name="">
             <a:extLst xmlns:a="http://schemas.openxmlformats.org/drawingml/2006/main">
               <a:ext uri="{FF2B5EF4-FFF2-40B4-BE49-F238E27FC236}">
-                <a16:creationId xmlns:a16="http://schemas.microsoft.com/office/drawing/2014/main" id="{2950D907-ED1E-4AF7-A47F-403835C8EE94}"/>
+                <a16:creationId xmlns:a16="http://schemas.microsoft.com/office/drawing/2014/main" id="{C5B3DA3E-D943-4E9E-A43F-103E2A7050F8}"/>
               </a:ext>
             </a:extLst>
           </p:cNvPr>
@@ -11698,7 +11786,7 @@
           <p:cNvPr id="15" name="">
             <a:extLst xmlns:a="http://schemas.openxmlformats.org/drawingml/2006/main">
               <a:ext uri="{FF2B5EF4-FFF2-40B4-BE49-F238E27FC236}">
-                <a16:creationId xmlns:a16="http://schemas.microsoft.com/office/drawing/2014/main" id="{9017ED0E-2F03-4A8A-9D82-6C0F1A407BD7}"/>
+                <a16:creationId xmlns:a16="http://schemas.microsoft.com/office/drawing/2014/main" id="{326F60B0-B96E-418A-A950-8DCC256A2444}"/>
               </a:ext>
             </a:extLst>
           </p:cNvPr>
@@ -11754,7 +11842,7 @@
           <p:cNvPr id="16" name="">
             <a:extLst xmlns:a="http://schemas.openxmlformats.org/drawingml/2006/main">
               <a:ext uri="{FF2B5EF4-FFF2-40B4-BE49-F238E27FC236}">
-                <a16:creationId xmlns:a16="http://schemas.microsoft.com/office/drawing/2014/main" id="{04EEEE99-7B7F-40A5-ACF2-A44AE2028A44}"/>
+                <a16:creationId xmlns:a16="http://schemas.microsoft.com/office/drawing/2014/main" id="{6ED0E840-938E-43CF-9D76-15463C79792B}"/>
               </a:ext>
             </a:extLst>
           </p:cNvPr>
@@ -11810,7 +11898,7 @@
           <p:cNvPr id="17" name="">
             <a:extLst xmlns:a="http://schemas.openxmlformats.org/drawingml/2006/main">
               <a:ext uri="{FF2B5EF4-FFF2-40B4-BE49-F238E27FC236}">
-                <a16:creationId xmlns:a16="http://schemas.microsoft.com/office/drawing/2014/main" id="{07F65B1C-86C6-47B7-A385-A2F6299B5308}"/>
+                <a16:creationId xmlns:a16="http://schemas.microsoft.com/office/drawing/2014/main" id="{76638FA1-F1CB-4F35-8202-635049CC071C}"/>
               </a:ext>
             </a:extLst>
           </p:cNvPr>
@@ -11866,7 +11954,7 @@
           <p:cNvPr id="18" name="">
             <a:extLst xmlns:a="http://schemas.openxmlformats.org/drawingml/2006/main">
               <a:ext uri="{FF2B5EF4-FFF2-40B4-BE49-F238E27FC236}">
-                <a16:creationId xmlns:a16="http://schemas.microsoft.com/office/drawing/2014/main" id="{70B2919B-AFEC-4912-A78C-4FA3EF1DA621}"/>
+                <a16:creationId xmlns:a16="http://schemas.microsoft.com/office/drawing/2014/main" id="{1EC94E40-830A-44B5-965E-FA708BFA5E0C}"/>
               </a:ext>
             </a:extLst>
           </p:cNvPr>
@@ -11922,7 +12010,7 @@
           <p:cNvPr id="19" name="">
             <a:extLst xmlns:a="http://schemas.openxmlformats.org/drawingml/2006/main">
               <a:ext uri="{FF2B5EF4-FFF2-40B4-BE49-F238E27FC236}">
-                <a16:creationId xmlns:a16="http://schemas.microsoft.com/office/drawing/2014/main" id="{DE7FE027-AF9E-4C0E-9397-C22A1ED16B73}"/>
+                <a16:creationId xmlns:a16="http://schemas.microsoft.com/office/drawing/2014/main" id="{76376178-8D45-4C91-BA83-E5EBBF0BDDD3}"/>
               </a:ext>
             </a:extLst>
           </p:cNvPr>
@@ -11978,7 +12066,7 @@
           <p:cNvPr id="20" name="">
             <a:extLst xmlns:a="http://schemas.openxmlformats.org/drawingml/2006/main">
               <a:ext uri="{FF2B5EF4-FFF2-40B4-BE49-F238E27FC236}">
-                <a16:creationId xmlns:a16="http://schemas.microsoft.com/office/drawing/2014/main" id="{7D53E953-3F8C-4FA5-9D9E-11633963168A}"/>
+                <a16:creationId xmlns:a16="http://schemas.microsoft.com/office/drawing/2014/main" id="{EF5D17BF-8377-441C-8665-D89C155BBA56}"/>
               </a:ext>
             </a:extLst>
           </p:cNvPr>
@@ -12034,7 +12122,7 @@
           <p:cNvPr id="21" name="">
             <a:extLst xmlns:a="http://schemas.openxmlformats.org/drawingml/2006/main">
               <a:ext uri="{FF2B5EF4-FFF2-40B4-BE49-F238E27FC236}">
-                <a16:creationId xmlns:a16="http://schemas.microsoft.com/office/drawing/2014/main" id="{3CC882D9-2C90-4DA2-8665-3AF3CA6BAD96}"/>
+                <a16:creationId xmlns:a16="http://schemas.microsoft.com/office/drawing/2014/main" id="{4C57D73E-826C-4E60-93EB-6C631BCC3212}"/>
               </a:ext>
             </a:extLst>
           </p:cNvPr>
@@ -12090,7 +12178,7 @@
           <p:cNvPr id="22" name="">
             <a:extLst xmlns:a="http://schemas.openxmlformats.org/drawingml/2006/main">
               <a:ext uri="{FF2B5EF4-FFF2-40B4-BE49-F238E27FC236}">
-                <a16:creationId xmlns:a16="http://schemas.microsoft.com/office/drawing/2014/main" id="{75C0FC29-B61C-41F3-8193-6878778F7F00}"/>
+                <a16:creationId xmlns:a16="http://schemas.microsoft.com/office/drawing/2014/main" id="{756BAFFF-2AC5-4EB8-92E6-EFBBC606D096}"/>
               </a:ext>
             </a:extLst>
           </p:cNvPr>
@@ -12146,7 +12234,7 @@
           <p:cNvPr id="23" name="">
             <a:extLst xmlns:a="http://schemas.openxmlformats.org/drawingml/2006/main">
               <a:ext uri="{FF2B5EF4-FFF2-40B4-BE49-F238E27FC236}">
-                <a16:creationId xmlns:a16="http://schemas.microsoft.com/office/drawing/2014/main" id="{D6B59F7B-4C5E-4930-8D62-36D4AB6F2C0D}"/>
+                <a16:creationId xmlns:a16="http://schemas.microsoft.com/office/drawing/2014/main" id="{3F4F5DDE-CC48-4058-8C7A-DC400A2273D3}"/>
               </a:ext>
             </a:extLst>
           </p:cNvPr>
@@ -12202,7 +12290,7 @@
           <p:cNvPr id="24" name="">
             <a:extLst xmlns:a="http://schemas.openxmlformats.org/drawingml/2006/main">
               <a:ext uri="{FF2B5EF4-FFF2-40B4-BE49-F238E27FC236}">
-                <a16:creationId xmlns:a16="http://schemas.microsoft.com/office/drawing/2014/main" id="{C02FBAFD-3617-4939-8CA8-D79A841CEA31}"/>
+                <a16:creationId xmlns:a16="http://schemas.microsoft.com/office/drawing/2014/main" id="{E2BDB4E7-2BA3-48DE-9D44-27C763D0625A}"/>
               </a:ext>
             </a:extLst>
           </p:cNvPr>
@@ -12258,7 +12346,7 @@
           <p:cNvPr id="25" name="">
             <a:extLst xmlns:a="http://schemas.openxmlformats.org/drawingml/2006/main">
               <a:ext uri="{FF2B5EF4-FFF2-40B4-BE49-F238E27FC236}">
-                <a16:creationId xmlns:a16="http://schemas.microsoft.com/office/drawing/2014/main" id="{9751ABB7-4BD7-4CD2-ACBE-CC9C3E71D5FB}"/>
+                <a16:creationId xmlns:a16="http://schemas.microsoft.com/office/drawing/2014/main" id="{85E0991A-EC30-4471-ADE9-E3284631666E}"/>
               </a:ext>
             </a:extLst>
           </p:cNvPr>
@@ -12289,7 +12377,7 @@
           <p:cNvPr id="26" name="">
             <a:extLst xmlns:a="http://schemas.openxmlformats.org/drawingml/2006/main">
               <a:ext uri="{FF2B5EF4-FFF2-40B4-BE49-F238E27FC236}">
-                <a16:creationId xmlns:a16="http://schemas.microsoft.com/office/drawing/2014/main" id="{81A54498-EAB7-4818-9F8F-D1C46C238560}"/>
+                <a16:creationId xmlns:a16="http://schemas.microsoft.com/office/drawing/2014/main" id="{D5DD9C77-0D3C-4A13-A731-2C4926038BEF}"/>
               </a:ext>
             </a:extLst>
           </p:cNvPr>
@@ -12301,7 +12389,7 @@
         <p:spPr>
           <a:xfrm xmlns:a="http://schemas.openxmlformats.org/drawingml/2006/main">
             <a:off x="609600" y="6419850"/>
-            <a:ext cx="7810500" cy="209550"/>
+            <a:ext cx="4000500" cy="209550"/>
           </a:xfrm>
           <a:prstGeom xmlns:a="http://schemas.openxmlformats.org/drawingml/2006/main" prst="rect">
             <a:avLst/>
@@ -12329,7 +12417,7 @@
                   <a:srgbClr val="52615B"/>
                 </a:solidFill>
               </a:rPr>
-              <a:t>Unofficial material | Source: products/shopify-collective/architecture.md</a:t>
+              <a:t>Shopify Collective</a:t>
             </a:r>
           </a:p>
         </p:txBody>
@@ -12339,7 +12427,7 @@
           <p:cNvPr id="27" name="">
             <a:extLst xmlns:a="http://schemas.openxmlformats.org/drawingml/2006/main">
               <a:ext uri="{FF2B5EF4-FFF2-40B4-BE49-F238E27FC236}">
-                <a16:creationId xmlns:a16="http://schemas.microsoft.com/office/drawing/2014/main" id="{5D467C9C-B85A-4BA3-81D0-2A4AAF6C05D3}"/>
+                <a16:creationId xmlns:a16="http://schemas.microsoft.com/office/drawing/2014/main" id="{D03C2B47-1407-42C9-B779-FC18006631D4}"/>
               </a:ext>
             </a:extLst>
           </p:cNvPr>
@@ -12387,7 +12475,7 @@
     </p:spTree>
     <p:extLst>
       <p:ext uri="{BB962C8B-B14F-4D97-AF65-F5344CB8AC3E}">
-        <p14:creationId xmlns:p14="http://schemas.microsoft.com/office/powerpoint/2010/main" val="76468150"/>
+        <p14:creationId xmlns:p14="http://schemas.microsoft.com/office/powerpoint/2010/main" val="632656655"/>
       </p:ext>
     </p:extLst>
   </p:cSld>

--- a/products/shopify-collective/shopify-collective-architecture.pptx
+++ b/products/shopify-collective/shopify-collective-architecture.pptx
@@ -2,24 +2,24 @@
 <file path=ppt/presentation.xml><?xml version="1.0" encoding="utf-8"?>
 <p:presentation xmlns:p="http://schemas.openxmlformats.org/presentationml/2006/main">
   <p:sldMasterIdLst>
-    <p:sldMasterId xmlns:r="http://schemas.openxmlformats.org/officeDocument/2006/relationships" id="2147483648" r:id="R51944e5c7a8045be"/>
+    <p:sldMasterId xmlns:r="http://schemas.openxmlformats.org/officeDocument/2006/relationships" id="2147483648" r:id="Rdde36981a4564509"/>
   </p:sldMasterIdLst>
   <p:notesMasterIdLst>
-    <p:notesMasterId xmlns:r="http://schemas.openxmlformats.org/officeDocument/2006/relationships" r:id="R6a1ea0c9aeef4755"/>
+    <p:notesMasterId xmlns:r="http://schemas.openxmlformats.org/officeDocument/2006/relationships" r:id="R417c642f6d9d4ac1"/>
   </p:notesMasterIdLst>
   <p:sldIdLst>
-    <p:sldId xmlns:r="http://schemas.openxmlformats.org/officeDocument/2006/relationships" id="256" r:id="Rd8eceb12717041c7"/>
-    <p:sldId xmlns:r="http://schemas.openxmlformats.org/officeDocument/2006/relationships" id="257" r:id="Rc4a9c78852b94e84"/>
-    <p:sldId xmlns:r="http://schemas.openxmlformats.org/officeDocument/2006/relationships" id="258" r:id="R6ce44563c81e4883"/>
-    <p:sldId xmlns:r="http://schemas.openxmlformats.org/officeDocument/2006/relationships" id="259" r:id="Rea29527003554e10"/>
-    <p:sldId xmlns:r="http://schemas.openxmlformats.org/officeDocument/2006/relationships" id="260" r:id="R0ad95ac5d2a04c7e"/>
-    <p:sldId xmlns:r="http://schemas.openxmlformats.org/officeDocument/2006/relationships" id="261" r:id="R35ec0a5e954f4127"/>
-    <p:sldId xmlns:r="http://schemas.openxmlformats.org/officeDocument/2006/relationships" id="262" r:id="R80638544a590418c"/>
-    <p:sldId xmlns:r="http://schemas.openxmlformats.org/officeDocument/2006/relationships" id="263" r:id="R2d57766b9d95409c"/>
-    <p:sldId xmlns:r="http://schemas.openxmlformats.org/officeDocument/2006/relationships" id="264" r:id="R5036fe157827464d"/>
-    <p:sldId xmlns:r="http://schemas.openxmlformats.org/officeDocument/2006/relationships" id="265" r:id="R0b2f4c89b79c4a27"/>
-    <p:sldId xmlns:r="http://schemas.openxmlformats.org/officeDocument/2006/relationships" id="266" r:id="R5a73d4b3bb4f4949"/>
-    <p:sldId xmlns:r="http://schemas.openxmlformats.org/officeDocument/2006/relationships" id="267" r:id="R472418ad34d24ac7"/>
+    <p:sldId xmlns:r="http://schemas.openxmlformats.org/officeDocument/2006/relationships" id="256" r:id="R441305a9de474ebe"/>
+    <p:sldId xmlns:r="http://schemas.openxmlformats.org/officeDocument/2006/relationships" id="257" r:id="Rd2e1e56374204435"/>
+    <p:sldId xmlns:r="http://schemas.openxmlformats.org/officeDocument/2006/relationships" id="258" r:id="R734fdaef52e24f69"/>
+    <p:sldId xmlns:r="http://schemas.openxmlformats.org/officeDocument/2006/relationships" id="259" r:id="R6116dc402843478b"/>
+    <p:sldId xmlns:r="http://schemas.openxmlformats.org/officeDocument/2006/relationships" id="260" r:id="R167dca651c8948d7"/>
+    <p:sldId xmlns:r="http://schemas.openxmlformats.org/officeDocument/2006/relationships" id="261" r:id="Rb0e542ebdddb457b"/>
+    <p:sldId xmlns:r="http://schemas.openxmlformats.org/officeDocument/2006/relationships" id="262" r:id="Rb589bc0052e24df4"/>
+    <p:sldId xmlns:r="http://schemas.openxmlformats.org/officeDocument/2006/relationships" id="263" r:id="R8132cb073acf4203"/>
+    <p:sldId xmlns:r="http://schemas.openxmlformats.org/officeDocument/2006/relationships" id="264" r:id="R65751fa3102e4db9"/>
+    <p:sldId xmlns:r="http://schemas.openxmlformats.org/officeDocument/2006/relationships" id="265" r:id="R591a25c5cf8b4b54"/>
+    <p:sldId xmlns:r="http://schemas.openxmlformats.org/officeDocument/2006/relationships" id="266" r:id="Rbb5db834bbea404b"/>
+    <p:sldId xmlns:r="http://schemas.openxmlformats.org/officeDocument/2006/relationships" id="267" r:id="R0b21256eb75942f9"/>
   </p:sldIdLst>
   <p:sldSz cx="12192000" cy="6858000"/>
   <p:notesSz cx="6858000" cy="9144000"/>
@@ -1338,7 +1338,7 @@
   </p:cSld>
   <p:clrMap bg1="lt1" tx1="dk1" bg2="lt2" tx2="dk2" accent1="accent1" accent2="accent2" accent3="accent3" accent4="accent4" accent5="accent5" accent6="accent6" hlink="hlink" folHlink="folHlink"/>
   <p:sldLayoutIdLst>
-    <p:sldLayoutId xmlns:r="http://schemas.openxmlformats.org/officeDocument/2006/relationships" id="2147483649" r:id="Rf965b9b2a02e4d2f"/>
+    <p:sldLayoutId xmlns:r="http://schemas.openxmlformats.org/officeDocument/2006/relationships" id="2147483649" r:id="Rb06273afd50248ce"/>
   </p:sldLayoutIdLst>
   <p:txStyles>
     <p:titleStyle>
@@ -1889,7 +1889,7 @@
           <p:cNvPr id="1" name="">
             <a:extLst xmlns:a="http://schemas.openxmlformats.org/drawingml/2006/main">
               <a:ext uri="{FF2B5EF4-FFF2-40B4-BE49-F238E27FC236}">
-                <a16:creationId xmlns:a16="http://schemas.microsoft.com/office/drawing/2014/main" id="{9725245A-08E3-4640-8999-EEDE96D7DDA9}"/>
+                <a16:creationId xmlns:a16="http://schemas.microsoft.com/office/drawing/2014/main" id="{A3E0E61E-3F27-434E-9861-9B99C5E190EB}"/>
               </a:ext>
             </a:extLst>
           </p:cNvPr>
@@ -1939,7 +1939,7 @@
           <p:cNvPr id="2" name="">
             <a:extLst xmlns:a="http://schemas.openxmlformats.org/drawingml/2006/main">
               <a:ext uri="{FF2B5EF4-FFF2-40B4-BE49-F238E27FC236}">
-                <a16:creationId xmlns:a16="http://schemas.microsoft.com/office/drawing/2014/main" id="{E43143CD-9E7B-4F3D-B606-ABA7B559E89F}"/>
+                <a16:creationId xmlns:a16="http://schemas.microsoft.com/office/drawing/2014/main" id="{74D5AEAC-4E7B-461A-A4EF-2B06FECC0051}"/>
               </a:ext>
             </a:extLst>
           </p:cNvPr>
@@ -2006,7 +2006,7 @@
           <p:cNvPr id="3" name="">
             <a:extLst xmlns:a="http://schemas.openxmlformats.org/drawingml/2006/main">
               <a:ext uri="{FF2B5EF4-FFF2-40B4-BE49-F238E27FC236}">
-                <a16:creationId xmlns:a16="http://schemas.microsoft.com/office/drawing/2014/main" id="{F01ABCDA-1DC8-4416-9BC0-F4C48D4A72E2}"/>
+                <a16:creationId xmlns:a16="http://schemas.microsoft.com/office/drawing/2014/main" id="{2ECB6788-3203-4689-B108-36FCD60A625B}"/>
               </a:ext>
             </a:extLst>
           </p:cNvPr>
@@ -2056,7 +2056,7 @@
           <p:cNvPr id="4" name="">
             <a:extLst xmlns:a="http://schemas.openxmlformats.org/drawingml/2006/main">
               <a:ext uri="{FF2B5EF4-FFF2-40B4-BE49-F238E27FC236}">
-                <a16:creationId xmlns:a16="http://schemas.microsoft.com/office/drawing/2014/main" id="{F659A39C-5B55-46FA-AAF2-4CBC6B3E2E9D}"/>
+                <a16:creationId xmlns:a16="http://schemas.microsoft.com/office/drawing/2014/main" id="{16E46106-E285-45AA-9C9B-9E0F3F13D66B}"/>
               </a:ext>
             </a:extLst>
           </p:cNvPr>
@@ -2104,7 +2104,7 @@
     </p:spTree>
     <p:extLst>
       <p:ext uri="{BB962C8B-B14F-4D97-AF65-F5344CB8AC3E}">
-        <p14:creationId xmlns:p14="http://schemas.microsoft.com/office/powerpoint/2010/main" val="572290622"/>
+        <p14:creationId xmlns:p14="http://schemas.microsoft.com/office/powerpoint/2010/main" val="282587367"/>
       </p:ext>
     </p:extLst>
   </p:cSld>
@@ -2135,7 +2135,7 @@
           <p:cNvPr id="1" name="">
             <a:extLst xmlns:a="http://schemas.openxmlformats.org/drawingml/2006/main">
               <a:ext uri="{FF2B5EF4-FFF2-40B4-BE49-F238E27FC236}">
-                <a16:creationId xmlns:a16="http://schemas.microsoft.com/office/drawing/2014/main" id="{E7BD62CE-F195-4928-97B5-F507E8E37487}"/>
+                <a16:creationId xmlns:a16="http://schemas.microsoft.com/office/drawing/2014/main" id="{015D18FB-E5DB-480A-BA36-00F9DE0EE96C}"/>
               </a:ext>
             </a:extLst>
           </p:cNvPr>
@@ -2185,7 +2185,7 @@
           <p:cNvPr id="2" name="">
             <a:extLst xmlns:a="http://schemas.openxmlformats.org/drawingml/2006/main">
               <a:ext uri="{FF2B5EF4-FFF2-40B4-BE49-F238E27FC236}">
-                <a16:creationId xmlns:a16="http://schemas.microsoft.com/office/drawing/2014/main" id="{E20BF794-E285-4A54-AD61-B860D2D96407}"/>
+                <a16:creationId xmlns:a16="http://schemas.microsoft.com/office/drawing/2014/main" id="{836D1F1C-BDCB-4AAE-A120-878032A9B5F6}"/>
               </a:ext>
             </a:extLst>
           </p:cNvPr>
@@ -2235,7 +2235,7 @@
           <p:cNvPr id="3" name="">
             <a:extLst xmlns:a="http://schemas.openxmlformats.org/drawingml/2006/main">
               <a:ext uri="{FF2B5EF4-FFF2-40B4-BE49-F238E27FC236}">
-                <a16:creationId xmlns:a16="http://schemas.microsoft.com/office/drawing/2014/main" id="{D9A72A76-EABB-4F44-BA8F-50A068247B31}"/>
+                <a16:creationId xmlns:a16="http://schemas.microsoft.com/office/drawing/2014/main" id="{25282460-C4D5-41F8-B972-EB06FA5E869A}"/>
               </a:ext>
             </a:extLst>
           </p:cNvPr>
@@ -2285,7 +2285,7 @@
           <p:cNvPr id="4" name="">
             <a:extLst xmlns:a="http://schemas.openxmlformats.org/drawingml/2006/main">
               <a:ext uri="{FF2B5EF4-FFF2-40B4-BE49-F238E27FC236}">
-                <a16:creationId xmlns:a16="http://schemas.microsoft.com/office/drawing/2014/main" id="{32D46EA3-2485-427D-9AE9-04946D3AF11C}"/>
+                <a16:creationId xmlns:a16="http://schemas.microsoft.com/office/drawing/2014/main" id="{762DCB29-0862-48A0-9D6C-413215C56AF0}"/>
               </a:ext>
             </a:extLst>
           </p:cNvPr>
@@ -2316,7 +2316,7 @@
           <p:cNvPr id="5" name="">
             <a:extLst xmlns:a="http://schemas.openxmlformats.org/drawingml/2006/main">
               <a:ext uri="{FF2B5EF4-FFF2-40B4-BE49-F238E27FC236}">
-                <a16:creationId xmlns:a16="http://schemas.microsoft.com/office/drawing/2014/main" id="{DB95EEC0-A72E-4FE8-8D6F-749A59FED0AC}"/>
+                <a16:creationId xmlns:a16="http://schemas.microsoft.com/office/drawing/2014/main" id="{C1F8904D-EEE1-49C4-A6BC-4DD7D6368520}"/>
               </a:ext>
             </a:extLst>
           </p:cNvPr>
@@ -2366,7 +2366,7 @@
           <p:cNvPr id="6" name="">
             <a:extLst xmlns:a="http://schemas.openxmlformats.org/drawingml/2006/main">
               <a:ext uri="{FF2B5EF4-FFF2-40B4-BE49-F238E27FC236}">
-                <a16:creationId xmlns:a16="http://schemas.microsoft.com/office/drawing/2014/main" id="{BD8DABB1-0E60-486F-8A93-5322C95024FE}"/>
+                <a16:creationId xmlns:a16="http://schemas.microsoft.com/office/drawing/2014/main" id="{D12E496D-663D-4C63-B2EC-2A0676A55363}"/>
               </a:ext>
             </a:extLst>
           </p:cNvPr>
@@ -2416,7 +2416,7 @@
           <p:cNvPr id="7" name="">
             <a:extLst xmlns:a="http://schemas.openxmlformats.org/drawingml/2006/main">
               <a:ext uri="{FF2B5EF4-FFF2-40B4-BE49-F238E27FC236}">
-                <a16:creationId xmlns:a16="http://schemas.microsoft.com/office/drawing/2014/main" id="{3AD779CA-08A3-410F-BD54-DA6174FB3917}"/>
+                <a16:creationId xmlns:a16="http://schemas.microsoft.com/office/drawing/2014/main" id="{4728BDB8-CF66-49B7-B6BE-C9568EADC5DE}"/>
               </a:ext>
             </a:extLst>
           </p:cNvPr>
@@ -2466,7 +2466,7 @@
           <p:cNvPr id="8" name="">
             <a:extLst xmlns:a="http://schemas.openxmlformats.org/drawingml/2006/main">
               <a:ext uri="{FF2B5EF4-FFF2-40B4-BE49-F238E27FC236}">
-                <a16:creationId xmlns:a16="http://schemas.microsoft.com/office/drawing/2014/main" id="{6D8A9E63-94A9-4BE8-B848-FC7207EB3D4A}"/>
+                <a16:creationId xmlns:a16="http://schemas.microsoft.com/office/drawing/2014/main" id="{B1C616CF-195E-4097-A55B-2F0C8A28E471}"/>
               </a:ext>
             </a:extLst>
           </p:cNvPr>
@@ -2516,7 +2516,7 @@
           <p:cNvPr id="9" name="">
             <a:extLst xmlns:a="http://schemas.openxmlformats.org/drawingml/2006/main">
               <a:ext uri="{FF2B5EF4-FFF2-40B4-BE49-F238E27FC236}">
-                <a16:creationId xmlns:a16="http://schemas.microsoft.com/office/drawing/2014/main" id="{662857EB-A07F-4232-BBFB-C3018D376DFA}"/>
+                <a16:creationId xmlns:a16="http://schemas.microsoft.com/office/drawing/2014/main" id="{AB855AF5-5908-4744-893A-4CEF2BD88AB5}"/>
               </a:ext>
             </a:extLst>
           </p:cNvPr>
@@ -2566,7 +2566,7 @@
           <p:cNvPr id="10" name="">
             <a:extLst xmlns:a="http://schemas.openxmlformats.org/drawingml/2006/main">
               <a:ext uri="{FF2B5EF4-FFF2-40B4-BE49-F238E27FC236}">
-                <a16:creationId xmlns:a16="http://schemas.microsoft.com/office/drawing/2014/main" id="{28DDDCEC-70CB-4FD9-8922-3C58D354643F}"/>
+                <a16:creationId xmlns:a16="http://schemas.microsoft.com/office/drawing/2014/main" id="{70A27365-8851-4A8F-902E-B9B6A8171E77}"/>
               </a:ext>
             </a:extLst>
           </p:cNvPr>
@@ -2616,7 +2616,7 @@
           <p:cNvPr id="11" name="">
             <a:extLst xmlns:a="http://schemas.openxmlformats.org/drawingml/2006/main">
               <a:ext uri="{FF2B5EF4-FFF2-40B4-BE49-F238E27FC236}">
-                <a16:creationId xmlns:a16="http://schemas.microsoft.com/office/drawing/2014/main" id="{E4190671-44B9-4374-9649-CF482F2E4234}"/>
+                <a16:creationId xmlns:a16="http://schemas.microsoft.com/office/drawing/2014/main" id="{15B8B129-DF26-46E4-BB59-C93D896348CB}"/>
               </a:ext>
             </a:extLst>
           </p:cNvPr>
@@ -2656,7 +2656,7 @@
                   <a:srgbClr val="004C3F"/>
                 </a:solidFill>
               </a:rPr>
-              <a:t>What if retailer discounts the order?</a:t>
+              <a:t>What if retailer discounts or underprices?</a:t>
             </a:r>
           </a:p>
         </p:txBody>
@@ -2666,7 +2666,7 @@
           <p:cNvPr id="12" name="">
             <a:extLst xmlns:a="http://schemas.openxmlformats.org/drawingml/2006/main">
               <a:ext uri="{FF2B5EF4-FFF2-40B4-BE49-F238E27FC236}">
-                <a16:creationId xmlns:a16="http://schemas.microsoft.com/office/drawing/2014/main" id="{048268EF-E8E0-4781-AEC3-DB591C92996B}"/>
+                <a16:creationId xmlns:a16="http://schemas.microsoft.com/office/drawing/2014/main" id="{9B5BA83E-2261-4F46-9E12-84D76C285644}"/>
               </a:ext>
             </a:extLst>
           </p:cNvPr>
@@ -2706,7 +2706,7 @@
                   <a:srgbClr val="52615B"/>
                 </a:solidFill>
               </a:rPr>
-              <a:t>The customer pays less and retailer profit decreases. Supplier cost price does not change.</a:t>
+              <a:t>Buyer pays less; retailer margin can fall or go negative. Supplier cost price and supplier order amount do not change.</a:t>
             </a:r>
           </a:p>
         </p:txBody>
@@ -2716,7 +2716,7 @@
           <p:cNvPr id="13" name="">
             <a:extLst xmlns:a="http://schemas.openxmlformats.org/drawingml/2006/main">
               <a:ext uri="{FF2B5EF4-FFF2-40B4-BE49-F238E27FC236}">
-                <a16:creationId xmlns:a16="http://schemas.microsoft.com/office/drawing/2014/main" id="{B72BF294-60FA-4DB6-AE2F-3ADEA0C9F349}"/>
+                <a16:creationId xmlns:a16="http://schemas.microsoft.com/office/drawing/2014/main" id="{6CDAAF59-3A60-4896-9BC4-D910E5ED2367}"/>
               </a:ext>
             </a:extLst>
           </p:cNvPr>
@@ -2747,7 +2747,7 @@
           <p:cNvPr id="14" name="">
             <a:extLst xmlns:a="http://schemas.openxmlformats.org/drawingml/2006/main">
               <a:ext uri="{FF2B5EF4-FFF2-40B4-BE49-F238E27FC236}">
-                <a16:creationId xmlns:a16="http://schemas.microsoft.com/office/drawing/2014/main" id="{B02F8AF0-FF2C-4DBE-BFF9-853DF9787C45}"/>
+                <a16:creationId xmlns:a16="http://schemas.microsoft.com/office/drawing/2014/main" id="{46330800-377D-4B24-BC76-529694F9E960}"/>
               </a:ext>
             </a:extLst>
           </p:cNvPr>
@@ -2797,7 +2797,7 @@
           <p:cNvPr id="15" name="">
             <a:extLst xmlns:a="http://schemas.openxmlformats.org/drawingml/2006/main">
               <a:ext uri="{FF2B5EF4-FFF2-40B4-BE49-F238E27FC236}">
-                <a16:creationId xmlns:a16="http://schemas.microsoft.com/office/drawing/2014/main" id="{EE58125C-63D9-46B5-9977-CBD722076B68}"/>
+                <a16:creationId xmlns:a16="http://schemas.microsoft.com/office/drawing/2014/main" id="{7C8CCC47-50E3-4473-9879-900F7C74083E}"/>
               </a:ext>
             </a:extLst>
           </p:cNvPr>
@@ -2845,7 +2845,7 @@
     </p:spTree>
     <p:extLst>
       <p:ext uri="{BB962C8B-B14F-4D97-AF65-F5344CB8AC3E}">
-        <p14:creationId xmlns:p14="http://schemas.microsoft.com/office/powerpoint/2010/main" val="500259755"/>
+        <p14:creationId xmlns:p14="http://schemas.microsoft.com/office/powerpoint/2010/main" val="351155210"/>
       </p:ext>
     </p:extLst>
   </p:cSld>
@@ -2876,7 +2876,7 @@
           <p:cNvPr id="1" name="">
             <a:extLst xmlns:a="http://schemas.openxmlformats.org/drawingml/2006/main">
               <a:ext uri="{FF2B5EF4-FFF2-40B4-BE49-F238E27FC236}">
-                <a16:creationId xmlns:a16="http://schemas.microsoft.com/office/drawing/2014/main" id="{1F82B02E-42D5-4C4B-96AC-04AC91477F66}"/>
+                <a16:creationId xmlns:a16="http://schemas.microsoft.com/office/drawing/2014/main" id="{D6E7DA74-5712-49BC-B012-FD86AB1A8196}"/>
               </a:ext>
             </a:extLst>
           </p:cNvPr>
@@ -2926,7 +2926,7 @@
           <p:cNvPr id="2" name="">
             <a:extLst xmlns:a="http://schemas.openxmlformats.org/drawingml/2006/main">
               <a:ext uri="{FF2B5EF4-FFF2-40B4-BE49-F238E27FC236}">
-                <a16:creationId xmlns:a16="http://schemas.microsoft.com/office/drawing/2014/main" id="{7F70D8E8-C1AE-4979-85E0-CBD2B37B2684}"/>
+                <a16:creationId xmlns:a16="http://schemas.microsoft.com/office/drawing/2014/main" id="{18E401D5-497D-4CA6-8C80-4A5A1CF1C23A}"/>
               </a:ext>
             </a:extLst>
           </p:cNvPr>
@@ -2976,7 +2976,7 @@
           <p:cNvPr id="3" name="">
             <a:extLst xmlns:a="http://schemas.openxmlformats.org/drawingml/2006/main">
               <a:ext uri="{FF2B5EF4-FFF2-40B4-BE49-F238E27FC236}">
-                <a16:creationId xmlns:a16="http://schemas.microsoft.com/office/drawing/2014/main" id="{FB4AC20A-2181-4197-AFBD-F557D618307B}"/>
+                <a16:creationId xmlns:a16="http://schemas.microsoft.com/office/drawing/2014/main" id="{60B8DAF4-C89A-415E-92A0-0E8F8FF0A5DB}"/>
               </a:ext>
             </a:extLst>
           </p:cNvPr>
@@ -3026,7 +3026,7 @@
           <p:cNvPr id="4" name="">
             <a:extLst xmlns:a="http://schemas.openxmlformats.org/drawingml/2006/main">
               <a:ext uri="{FF2B5EF4-FFF2-40B4-BE49-F238E27FC236}">
-                <a16:creationId xmlns:a16="http://schemas.microsoft.com/office/drawing/2014/main" id="{AB0626ED-D997-4864-9AD5-E153893BD2E9}"/>
+                <a16:creationId xmlns:a16="http://schemas.microsoft.com/office/drawing/2014/main" id="{73249FDD-8BAA-48C7-A07A-3E796A429E08}"/>
               </a:ext>
             </a:extLst>
           </p:cNvPr>
@@ -3057,7 +3057,7 @@
           <p:cNvPr id="5" name="">
             <a:extLst xmlns:a="http://schemas.openxmlformats.org/drawingml/2006/main">
               <a:ext uri="{FF2B5EF4-FFF2-40B4-BE49-F238E27FC236}">
-                <a16:creationId xmlns:a16="http://schemas.microsoft.com/office/drawing/2014/main" id="{4BA436A0-1E4F-48DD-B3D0-0C6CA09BCCEC}"/>
+                <a16:creationId xmlns:a16="http://schemas.microsoft.com/office/drawing/2014/main" id="{6AD496A9-6B6A-4B2E-8603-042B70B2B13A}"/>
               </a:ext>
             </a:extLst>
           </p:cNvPr>
@@ -3107,7 +3107,7 @@
           <p:cNvPr id="6" name="">
             <a:extLst xmlns:a="http://schemas.openxmlformats.org/drawingml/2006/main">
               <a:ext uri="{FF2B5EF4-FFF2-40B4-BE49-F238E27FC236}">
-                <a16:creationId xmlns:a16="http://schemas.microsoft.com/office/drawing/2014/main" id="{AA72810A-904B-4274-80BC-1B95DCF1E0C3}"/>
+                <a16:creationId xmlns:a16="http://schemas.microsoft.com/office/drawing/2014/main" id="{2A248514-9EA7-49AD-9EEA-9C8AE1C6252F}"/>
               </a:ext>
             </a:extLst>
           </p:cNvPr>
@@ -3157,7 +3157,7 @@
           <p:cNvPr id="7" name="">
             <a:extLst xmlns:a="http://schemas.openxmlformats.org/drawingml/2006/main">
               <a:ext uri="{FF2B5EF4-FFF2-40B4-BE49-F238E27FC236}">
-                <a16:creationId xmlns:a16="http://schemas.microsoft.com/office/drawing/2014/main" id="{B9DB67EE-CCBD-46DA-96DB-40D083D44D57}"/>
+                <a16:creationId xmlns:a16="http://schemas.microsoft.com/office/drawing/2014/main" id="{722B958A-26AA-4A00-98F9-DFAC0DBF8CC4}"/>
               </a:ext>
             </a:extLst>
           </p:cNvPr>
@@ -3207,7 +3207,7 @@
           <p:cNvPr id="8" name="">
             <a:extLst xmlns:a="http://schemas.openxmlformats.org/drawingml/2006/main">
               <a:ext uri="{FF2B5EF4-FFF2-40B4-BE49-F238E27FC236}">
-                <a16:creationId xmlns:a16="http://schemas.microsoft.com/office/drawing/2014/main" id="{5EF7F283-53DB-402F-BC9F-A5735BF8D6A6}"/>
+                <a16:creationId xmlns:a16="http://schemas.microsoft.com/office/drawing/2014/main" id="{B2A3CE76-270E-45E2-9291-8EEBFED466C9}"/>
               </a:ext>
             </a:extLst>
           </p:cNvPr>
@@ -3257,7 +3257,7 @@
           <p:cNvPr id="9" name="">
             <a:extLst xmlns:a="http://schemas.openxmlformats.org/drawingml/2006/main">
               <a:ext uri="{FF2B5EF4-FFF2-40B4-BE49-F238E27FC236}">
-                <a16:creationId xmlns:a16="http://schemas.microsoft.com/office/drawing/2014/main" id="{3B15C836-56BE-4FAF-A805-279328BDB952}"/>
+                <a16:creationId xmlns:a16="http://schemas.microsoft.com/office/drawing/2014/main" id="{D4B93F5E-DBE5-4956-89DF-9120D89A2DDD}"/>
               </a:ext>
             </a:extLst>
           </p:cNvPr>
@@ -3307,7 +3307,7 @@
           <p:cNvPr id="10" name="">
             <a:extLst xmlns:a="http://schemas.openxmlformats.org/drawingml/2006/main">
               <a:ext uri="{FF2B5EF4-FFF2-40B4-BE49-F238E27FC236}">
-                <a16:creationId xmlns:a16="http://schemas.microsoft.com/office/drawing/2014/main" id="{76F722A0-8D87-473B-B024-F3203325E383}"/>
+                <a16:creationId xmlns:a16="http://schemas.microsoft.com/office/drawing/2014/main" id="{1F4B475A-7670-424B-BAD4-D9C570E4FD5E}"/>
               </a:ext>
             </a:extLst>
           </p:cNvPr>
@@ -3357,7 +3357,7 @@
           <p:cNvPr id="11" name="">
             <a:extLst xmlns:a="http://schemas.openxmlformats.org/drawingml/2006/main">
               <a:ext uri="{FF2B5EF4-FFF2-40B4-BE49-F238E27FC236}">
-                <a16:creationId xmlns:a16="http://schemas.microsoft.com/office/drawing/2014/main" id="{F6628ABC-F8E3-44EC-A23B-C0356B67AE6E}"/>
+                <a16:creationId xmlns:a16="http://schemas.microsoft.com/office/drawing/2014/main" id="{0144854B-7618-4017-8CB7-7A72C7B335A0}"/>
               </a:ext>
             </a:extLst>
           </p:cNvPr>
@@ -3397,7 +3397,7 @@
                   <a:srgbClr val="004C3F"/>
                 </a:solidFill>
               </a:rPr>
-              <a:t>What if supplier changes product data?</a:t>
+              <a:t>What if supplier changes data, price, or inventory?</a:t>
             </a:r>
           </a:p>
         </p:txBody>
@@ -3407,7 +3407,7 @@
           <p:cNvPr id="12" name="">
             <a:extLst xmlns:a="http://schemas.openxmlformats.org/drawingml/2006/main">
               <a:ext uri="{FF2B5EF4-FFF2-40B4-BE49-F238E27FC236}">
-                <a16:creationId xmlns:a16="http://schemas.microsoft.com/office/drawing/2014/main" id="{4F45482F-BEB4-47D2-AA5B-891C11FD4B69}"/>
+                <a16:creationId xmlns:a16="http://schemas.microsoft.com/office/drawing/2014/main" id="{FBC93E31-448E-452B-8F0A-3785B51E2D8C}"/>
               </a:ext>
             </a:extLst>
           </p:cNvPr>
@@ -3447,7 +3447,7 @@
                   <a:srgbClr val="52615B"/>
                 </a:solidFill>
               </a:rPr>
-              <a:t>Inventory and cost price sync. Other content can sync depending on settings; retailer-side integrations should use product webhooks to mirror changes.</a:t>
+              <a:t>Synced fields update retailer data. Future orders use updated supplier cost, shipping, and inventory; paid orders keep order-time amounts unless adjusted.</a:t>
             </a:r>
           </a:p>
         </p:txBody>
@@ -3457,7 +3457,7 @@
           <p:cNvPr id="13" name="">
             <a:extLst xmlns:a="http://schemas.openxmlformats.org/drawingml/2006/main">
               <a:ext uri="{FF2B5EF4-FFF2-40B4-BE49-F238E27FC236}">
-                <a16:creationId xmlns:a16="http://schemas.microsoft.com/office/drawing/2014/main" id="{0ED86A96-1EE2-44B9-B9C1-FAC3E390B4B1}"/>
+                <a16:creationId xmlns:a16="http://schemas.microsoft.com/office/drawing/2014/main" id="{9EBF57CC-0761-4C5E-A7BE-E8A0D911048C}"/>
               </a:ext>
             </a:extLst>
           </p:cNvPr>
@@ -3488,7 +3488,7 @@
           <p:cNvPr id="14" name="">
             <a:extLst xmlns:a="http://schemas.openxmlformats.org/drawingml/2006/main">
               <a:ext uri="{FF2B5EF4-FFF2-40B4-BE49-F238E27FC236}">
-                <a16:creationId xmlns:a16="http://schemas.microsoft.com/office/drawing/2014/main" id="{5B5D24F1-ADEB-4DD9-A123-C2B6E9988C1F}"/>
+                <a16:creationId xmlns:a16="http://schemas.microsoft.com/office/drawing/2014/main" id="{FAE2B6EF-8360-41D5-93A6-9A93D52CB572}"/>
               </a:ext>
             </a:extLst>
           </p:cNvPr>
@@ -3538,7 +3538,7 @@
           <p:cNvPr id="15" name="">
             <a:extLst xmlns:a="http://schemas.openxmlformats.org/drawingml/2006/main">
               <a:ext uri="{FF2B5EF4-FFF2-40B4-BE49-F238E27FC236}">
-                <a16:creationId xmlns:a16="http://schemas.microsoft.com/office/drawing/2014/main" id="{5E81767A-834A-41F5-A25F-D39C5FD7F3D1}"/>
+                <a16:creationId xmlns:a16="http://schemas.microsoft.com/office/drawing/2014/main" id="{F1353B4F-D8C5-4B9A-B708-5718523E13A4}"/>
               </a:ext>
             </a:extLst>
           </p:cNvPr>
@@ -3586,7 +3586,7 @@
     </p:spTree>
     <p:extLst>
       <p:ext uri="{BB962C8B-B14F-4D97-AF65-F5344CB8AC3E}">
-        <p14:creationId xmlns:p14="http://schemas.microsoft.com/office/powerpoint/2010/main" val="475275336"/>
+        <p14:creationId xmlns:p14="http://schemas.microsoft.com/office/powerpoint/2010/main" val="1692399603"/>
       </p:ext>
     </p:extLst>
   </p:cSld>
@@ -3617,7 +3617,7 @@
           <p:cNvPr id="1" name="">
             <a:extLst xmlns:a="http://schemas.openxmlformats.org/drawingml/2006/main">
               <a:ext uri="{FF2B5EF4-FFF2-40B4-BE49-F238E27FC236}">
-                <a16:creationId xmlns:a16="http://schemas.microsoft.com/office/drawing/2014/main" id="{CBD55D33-FF72-4DBD-8726-E597127F41A3}"/>
+                <a16:creationId xmlns:a16="http://schemas.microsoft.com/office/drawing/2014/main" id="{A0A72106-12CF-49F1-BBEA-531C83FB311E}"/>
               </a:ext>
             </a:extLst>
           </p:cNvPr>
@@ -3667,7 +3667,7 @@
           <p:cNvPr id="2" name="">
             <a:extLst xmlns:a="http://schemas.openxmlformats.org/drawingml/2006/main">
               <a:ext uri="{FF2B5EF4-FFF2-40B4-BE49-F238E27FC236}">
-                <a16:creationId xmlns:a16="http://schemas.microsoft.com/office/drawing/2014/main" id="{819EF397-EBA0-4D69-8445-60379327F5F7}"/>
+                <a16:creationId xmlns:a16="http://schemas.microsoft.com/office/drawing/2014/main" id="{9303CF4E-A395-425D-942A-196B7895BD2C}"/>
               </a:ext>
             </a:extLst>
           </p:cNvPr>
@@ -3707,7 +3707,7 @@
                   <a:srgbClr val="101820"/>
                 </a:solidFill>
               </a:rPr>
-              <a:t>Retailer-side changes do not update supplier master data</a:t>
+              <a:t>Retailer-side changes do not update supplier data or cost price</a:t>
             </a:r>
           </a:p>
         </p:txBody>
@@ -3717,7 +3717,7 @@
           <p:cNvPr id="3" name="">
             <a:extLst xmlns:a="http://schemas.openxmlformats.org/drawingml/2006/main">
               <a:ext uri="{FF2B5EF4-FFF2-40B4-BE49-F238E27FC236}">
-                <a16:creationId xmlns:a16="http://schemas.microsoft.com/office/drawing/2014/main" id="{89D8A37F-C86A-4DC5-948F-3CE4D5DD0E78}"/>
+                <a16:creationId xmlns:a16="http://schemas.microsoft.com/office/drawing/2014/main" id="{5E1E3CE6-A215-4A7A-9465-BB664E86FA38}"/>
               </a:ext>
             </a:extLst>
           </p:cNvPr>
@@ -3757,7 +3757,7 @@
                   <a:srgbClr val="52615B"/>
                 </a:solidFill>
               </a:rPr>
-              <a:t>Treat retailer store webhooks as retailer-store events, not proof that the supplier source product changed.</a:t>
+              <a:t>Treat retailer store webhooks as retailer-store events, not proof that supplier source data or supplier economics changed.</a:t>
             </a:r>
           </a:p>
         </p:txBody>
@@ -3767,7 +3767,7 @@
           <p:cNvPr id="4" name="">
             <a:extLst xmlns:a="http://schemas.openxmlformats.org/drawingml/2006/main">
               <a:ext uri="{FF2B5EF4-FFF2-40B4-BE49-F238E27FC236}">
-                <a16:creationId xmlns:a16="http://schemas.microsoft.com/office/drawing/2014/main" id="{EECB1FD3-EA0F-4780-B6AB-0A7EAB8C36B0}"/>
+                <a16:creationId xmlns:a16="http://schemas.microsoft.com/office/drawing/2014/main" id="{3DABD251-AEB7-4863-AB84-A9E827AC9E14}"/>
               </a:ext>
             </a:extLst>
           </p:cNvPr>
@@ -3798,7 +3798,7 @@
           <p:cNvPr id="5" name="">
             <a:extLst xmlns:a="http://schemas.openxmlformats.org/drawingml/2006/main">
               <a:ext uri="{FF2B5EF4-FFF2-40B4-BE49-F238E27FC236}">
-                <a16:creationId xmlns:a16="http://schemas.microsoft.com/office/drawing/2014/main" id="{A8CE1309-0DF7-47AE-876C-8C8BB0C04012}"/>
+                <a16:creationId xmlns:a16="http://schemas.microsoft.com/office/drawing/2014/main" id="{D020FE41-B7BF-428F-8B2C-B2A5B89F2B4F}"/>
               </a:ext>
             </a:extLst>
           </p:cNvPr>
@@ -3838,7 +3838,7 @@
                   <a:srgbClr val="004C3F"/>
                 </a:solidFill>
               </a:rPr>
-              <a:t>What if retailer changes product data?</a:t>
+              <a:t>What if retailer changes data, price, or inventory?</a:t>
             </a:r>
           </a:p>
         </p:txBody>
@@ -3848,7 +3848,7 @@
           <p:cNvPr id="6" name="">
             <a:extLst xmlns:a="http://schemas.openxmlformats.org/drawingml/2006/main">
               <a:ext uri="{FF2B5EF4-FFF2-40B4-BE49-F238E27FC236}">
-                <a16:creationId xmlns:a16="http://schemas.microsoft.com/office/drawing/2014/main" id="{A981B73F-73BA-4515-B387-0CE7C9C29D0B}"/>
+                <a16:creationId xmlns:a16="http://schemas.microsoft.com/office/drawing/2014/main" id="{B5C66005-1A54-49C4-91BF-BDC79B14A1C8}"/>
               </a:ext>
             </a:extLst>
           </p:cNvPr>
@@ -3888,7 +3888,7 @@
                   <a:srgbClr val="52615B"/>
                 </a:solidFill>
               </a:rPr>
-              <a:t>Retailer edits do not update supplier source data. Supplier-managed fields remain supplier-controlled.</a:t>
+              <a:t>Supplier source data and cost price do not change. Supplier order amounts still use supplier cost, shipping, taxes, and adjustments.</a:t>
             </a:r>
           </a:p>
         </p:txBody>
@@ -3898,7 +3898,7 @@
           <p:cNvPr id="7" name="">
             <a:extLst xmlns:a="http://schemas.openxmlformats.org/drawingml/2006/main">
               <a:ext uri="{FF2B5EF4-FFF2-40B4-BE49-F238E27FC236}">
-                <a16:creationId xmlns:a16="http://schemas.microsoft.com/office/drawing/2014/main" id="{42722347-1D3C-4E1E-A7FB-51BEA90E0FA7}"/>
+                <a16:creationId xmlns:a16="http://schemas.microsoft.com/office/drawing/2014/main" id="{770CE3D4-0697-4246-A017-99C3C359EC40}"/>
               </a:ext>
             </a:extLst>
           </p:cNvPr>
@@ -3938,7 +3938,7 @@
                   <a:srgbClr val="004C3F"/>
                 </a:solidFill>
               </a:rPr>
-              <a:t>What if retailer changes price?</a:t>
+              <a:t>Can retailer edits be overwritten?</a:t>
             </a:r>
           </a:p>
         </p:txBody>
@@ -3948,7 +3948,7 @@
           <p:cNvPr id="8" name="">
             <a:extLst xmlns:a="http://schemas.openxmlformats.org/drawingml/2006/main">
               <a:ext uri="{FF2B5EF4-FFF2-40B4-BE49-F238E27FC236}">
-                <a16:creationId xmlns:a16="http://schemas.microsoft.com/office/drawing/2014/main" id="{ED1F1B09-2A71-45BB-B659-E70E97AD5776}"/>
+                <a16:creationId xmlns:a16="http://schemas.microsoft.com/office/drawing/2014/main" id="{EC34F290-F20D-4B4A-83CD-1C39134E6384}"/>
               </a:ext>
             </a:extLst>
           </p:cNvPr>
@@ -3988,7 +3988,7 @@
                   <a:srgbClr val="52615B"/>
                 </a:solidFill>
               </a:rPr>
-              <a:t>Retailer can manage retail price unless retail price sync is enabled. Supplier cost price remains supplier-controlled.</a:t>
+              <a:t>Supplier-managed or synced fields can be overwritten by supplier updates. Imported inventory remains supplier-managed.</a:t>
             </a:r>
           </a:p>
         </p:txBody>
@@ -3998,7 +3998,7 @@
           <p:cNvPr id="9" name="">
             <a:extLst xmlns:a="http://schemas.openxmlformats.org/drawingml/2006/main">
               <a:ext uri="{FF2B5EF4-FFF2-40B4-BE49-F238E27FC236}">
-                <a16:creationId xmlns:a16="http://schemas.microsoft.com/office/drawing/2014/main" id="{60570A65-BC9E-4E91-8006-4D8175AC4B47}"/>
+                <a16:creationId xmlns:a16="http://schemas.microsoft.com/office/drawing/2014/main" id="{83AED986-1633-41E0-932A-F4530E49AD67}"/>
               </a:ext>
             </a:extLst>
           </p:cNvPr>
@@ -4038,7 +4038,7 @@
                   <a:srgbClr val="004C3F"/>
                 </a:solidFill>
               </a:rPr>
-              <a:t>What if retailer changes inventory?</a:t>
+              <a:t>What if retailer changes buyer price?</a:t>
             </a:r>
           </a:p>
         </p:txBody>
@@ -4048,7 +4048,7 @@
           <p:cNvPr id="10" name="">
             <a:extLst xmlns:a="http://schemas.openxmlformats.org/drawingml/2006/main">
               <a:ext uri="{FF2B5EF4-FFF2-40B4-BE49-F238E27FC236}">
-                <a16:creationId xmlns:a16="http://schemas.microsoft.com/office/drawing/2014/main" id="{06B122D3-DE21-4FE0-B222-D3893B08E423}"/>
+                <a16:creationId xmlns:a16="http://schemas.microsoft.com/office/drawing/2014/main" id="{093D37A5-671B-4D6C-8406-9F2A3C6FF4DD}"/>
               </a:ext>
             </a:extLst>
           </p:cNvPr>
@@ -4088,7 +4088,7 @@
                   <a:srgbClr val="52615B"/>
                 </a:solidFill>
               </a:rPr>
-              <a:t>Imported Collective inventory is supplier-managed and read-only in the retailer admin.</a:t>
+              <a:t>Buyer charge and retailer margin change, but supplier cost price and supplier order amount remain supplier-controlled.</a:t>
             </a:r>
           </a:p>
         </p:txBody>
@@ -4098,7 +4098,7 @@
           <p:cNvPr id="11" name="">
             <a:extLst xmlns:a="http://schemas.openxmlformats.org/drawingml/2006/main">
               <a:ext uri="{FF2B5EF4-FFF2-40B4-BE49-F238E27FC236}">
-                <a16:creationId xmlns:a16="http://schemas.microsoft.com/office/drawing/2014/main" id="{AAEE9798-6AA5-4D28-9BC6-FB25A93580E2}"/>
+                <a16:creationId xmlns:a16="http://schemas.microsoft.com/office/drawing/2014/main" id="{32C53B1C-ABC5-45E9-B6C2-D1FD4B8F53CA}"/>
               </a:ext>
             </a:extLst>
           </p:cNvPr>
@@ -4148,7 +4148,7 @@
           <p:cNvPr id="12" name="">
             <a:extLst xmlns:a="http://schemas.openxmlformats.org/drawingml/2006/main">
               <a:ext uri="{FF2B5EF4-FFF2-40B4-BE49-F238E27FC236}">
-                <a16:creationId xmlns:a16="http://schemas.microsoft.com/office/drawing/2014/main" id="{7D169BBB-D482-48D6-B7CE-5B0AE097486A}"/>
+                <a16:creationId xmlns:a16="http://schemas.microsoft.com/office/drawing/2014/main" id="{6EAA9426-F7EB-43AF-A93B-12A052A2CD0F}"/>
               </a:ext>
             </a:extLst>
           </p:cNvPr>
@@ -4198,7 +4198,7 @@
           <p:cNvPr id="13" name="">
             <a:extLst xmlns:a="http://schemas.openxmlformats.org/drawingml/2006/main">
               <a:ext uri="{FF2B5EF4-FFF2-40B4-BE49-F238E27FC236}">
-                <a16:creationId xmlns:a16="http://schemas.microsoft.com/office/drawing/2014/main" id="{19CA9E70-04E9-4F54-8719-C8DB07441B19}"/>
+                <a16:creationId xmlns:a16="http://schemas.microsoft.com/office/drawing/2014/main" id="{9938D164-40A5-4950-9D51-EA7940C311E0}"/>
               </a:ext>
             </a:extLst>
           </p:cNvPr>
@@ -4229,7 +4229,7 @@
           <p:cNvPr id="14" name="">
             <a:extLst xmlns:a="http://schemas.openxmlformats.org/drawingml/2006/main">
               <a:ext uri="{FF2B5EF4-FFF2-40B4-BE49-F238E27FC236}">
-                <a16:creationId xmlns:a16="http://schemas.microsoft.com/office/drawing/2014/main" id="{5231707B-244F-4D47-B994-7554E7AABBA3}"/>
+                <a16:creationId xmlns:a16="http://schemas.microsoft.com/office/drawing/2014/main" id="{11E8429D-3E75-48F2-A181-4F7CB5A3DD05}"/>
               </a:ext>
             </a:extLst>
           </p:cNvPr>
@@ -4279,7 +4279,7 @@
           <p:cNvPr id="15" name="">
             <a:extLst xmlns:a="http://schemas.openxmlformats.org/drawingml/2006/main">
               <a:ext uri="{FF2B5EF4-FFF2-40B4-BE49-F238E27FC236}">
-                <a16:creationId xmlns:a16="http://schemas.microsoft.com/office/drawing/2014/main" id="{A3F7A402-48DD-4C0E-9CA4-8B1AA4DC3DFE}"/>
+                <a16:creationId xmlns:a16="http://schemas.microsoft.com/office/drawing/2014/main" id="{D78F8D2B-E5C2-499F-B133-17018B46FFB0}"/>
               </a:ext>
             </a:extLst>
           </p:cNvPr>
@@ -4327,7 +4327,7 @@
     </p:spTree>
     <p:extLst>
       <p:ext uri="{BB962C8B-B14F-4D97-AF65-F5344CB8AC3E}">
-        <p14:creationId xmlns:p14="http://schemas.microsoft.com/office/powerpoint/2010/main" val="477036347"/>
+        <p14:creationId xmlns:p14="http://schemas.microsoft.com/office/powerpoint/2010/main" val="1264207990"/>
       </p:ext>
     </p:extLst>
   </p:cSld>
@@ -4358,7 +4358,7 @@
           <p:cNvPr id="1" name="">
             <a:extLst xmlns:a="http://schemas.openxmlformats.org/drawingml/2006/main">
               <a:ext uri="{FF2B5EF4-FFF2-40B4-BE49-F238E27FC236}">
-                <a16:creationId xmlns:a16="http://schemas.microsoft.com/office/drawing/2014/main" id="{33183F6D-3A17-4B81-AB1B-2AF38F9546F8}"/>
+                <a16:creationId xmlns:a16="http://schemas.microsoft.com/office/drawing/2014/main" id="{8D422D9A-14F5-4401-9566-322D0AFEF051}"/>
               </a:ext>
             </a:extLst>
           </p:cNvPr>
@@ -4408,7 +4408,7 @@
           <p:cNvPr id="2" name="">
             <a:extLst xmlns:a="http://schemas.openxmlformats.org/drawingml/2006/main">
               <a:ext uri="{FF2B5EF4-FFF2-40B4-BE49-F238E27FC236}">
-                <a16:creationId xmlns:a16="http://schemas.microsoft.com/office/drawing/2014/main" id="{E6E37C38-04D8-45C5-977C-842C8A3E832F}"/>
+                <a16:creationId xmlns:a16="http://schemas.microsoft.com/office/drawing/2014/main" id="{22ECB4FC-F0C5-4E1B-AA22-47AB3CE124D7}"/>
               </a:ext>
             </a:extLst>
           </p:cNvPr>
@@ -4458,7 +4458,7 @@
           <p:cNvPr id="3" name="">
             <a:extLst xmlns:a="http://schemas.openxmlformats.org/drawingml/2006/main">
               <a:ext uri="{FF2B5EF4-FFF2-40B4-BE49-F238E27FC236}">
-                <a16:creationId xmlns:a16="http://schemas.microsoft.com/office/drawing/2014/main" id="{8A0EDC0A-D98D-4101-9687-5AFEBD50DDDA}"/>
+                <a16:creationId xmlns:a16="http://schemas.microsoft.com/office/drawing/2014/main" id="{18D05CBB-0049-4FFF-ACB9-473CBE68923E}"/>
               </a:ext>
             </a:extLst>
           </p:cNvPr>
@@ -4508,7 +4508,7 @@
           <p:cNvPr id="4" name="">
             <a:extLst xmlns:a="http://schemas.openxmlformats.org/drawingml/2006/main">
               <a:ext uri="{FF2B5EF4-FFF2-40B4-BE49-F238E27FC236}">
-                <a16:creationId xmlns:a16="http://schemas.microsoft.com/office/drawing/2014/main" id="{86448220-D54C-4324-87E1-E2494B33A889}"/>
+                <a16:creationId xmlns:a16="http://schemas.microsoft.com/office/drawing/2014/main" id="{37A84A8A-5D6E-44F4-8EB9-D225341967CB}"/>
               </a:ext>
             </a:extLst>
           </p:cNvPr>
@@ -4539,7 +4539,7 @@
           <p:cNvPr id="5" name="">
             <a:extLst xmlns:a="http://schemas.openxmlformats.org/drawingml/2006/main">
               <a:ext uri="{FF2B5EF4-FFF2-40B4-BE49-F238E27FC236}">
-                <a16:creationId xmlns:a16="http://schemas.microsoft.com/office/drawing/2014/main" id="{A3096BFC-F118-4253-9ECE-21DABD7C3CF6}"/>
+                <a16:creationId xmlns:a16="http://schemas.microsoft.com/office/drawing/2014/main" id="{EA73963B-D7EC-4106-93E0-10659D9CB573}"/>
               </a:ext>
             </a:extLst>
           </p:cNvPr>
@@ -4595,7 +4595,7 @@
           <p:cNvPr id="6" name="">
             <a:extLst xmlns:a="http://schemas.openxmlformats.org/drawingml/2006/main">
               <a:ext uri="{FF2B5EF4-FFF2-40B4-BE49-F238E27FC236}">
-                <a16:creationId xmlns:a16="http://schemas.microsoft.com/office/drawing/2014/main" id="{64C31B96-DEB1-4BEB-B336-0B6F99A25FE0}"/>
+                <a16:creationId xmlns:a16="http://schemas.microsoft.com/office/drawing/2014/main" id="{D0B67C93-9C64-4966-83DA-27AD29971F94}"/>
               </a:ext>
             </a:extLst>
           </p:cNvPr>
@@ -4645,7 +4645,7 @@
           <p:cNvPr id="7" name="">
             <a:extLst xmlns:a="http://schemas.openxmlformats.org/drawingml/2006/main">
               <a:ext uri="{FF2B5EF4-FFF2-40B4-BE49-F238E27FC236}">
-                <a16:creationId xmlns:a16="http://schemas.microsoft.com/office/drawing/2014/main" id="{C70C1265-ABF1-4F2A-B226-8DFB2B6D2218}"/>
+                <a16:creationId xmlns:a16="http://schemas.microsoft.com/office/drawing/2014/main" id="{34C4BB6D-1A3F-49EC-BA8E-C3C871934EBC}"/>
               </a:ext>
             </a:extLst>
           </p:cNvPr>
@@ -4701,7 +4701,7 @@
           <p:cNvPr id="8" name="">
             <a:extLst xmlns:a="http://schemas.openxmlformats.org/drawingml/2006/main">
               <a:ext uri="{FF2B5EF4-FFF2-40B4-BE49-F238E27FC236}">
-                <a16:creationId xmlns:a16="http://schemas.microsoft.com/office/drawing/2014/main" id="{1F996253-6716-42CF-BD21-FE205AB8B4CB}"/>
+                <a16:creationId xmlns:a16="http://schemas.microsoft.com/office/drawing/2014/main" id="{CD0807FA-16CA-4346-9D88-52745C6D75B8}"/>
               </a:ext>
             </a:extLst>
           </p:cNvPr>
@@ -4751,7 +4751,7 @@
           <p:cNvPr id="9" name="">
             <a:extLst xmlns:a="http://schemas.openxmlformats.org/drawingml/2006/main">
               <a:ext uri="{FF2B5EF4-FFF2-40B4-BE49-F238E27FC236}">
-                <a16:creationId xmlns:a16="http://schemas.microsoft.com/office/drawing/2014/main" id="{E2ED8BF9-41E0-4764-A621-8C2FE61EB889}"/>
+                <a16:creationId xmlns:a16="http://schemas.microsoft.com/office/drawing/2014/main" id="{ADED0F85-8BB1-4F18-BAD7-2D7DEACA9D50}"/>
               </a:ext>
             </a:extLst>
           </p:cNvPr>
@@ -4807,7 +4807,7 @@
           <p:cNvPr id="10" name="">
             <a:extLst xmlns:a="http://schemas.openxmlformats.org/drawingml/2006/main">
               <a:ext uri="{FF2B5EF4-FFF2-40B4-BE49-F238E27FC236}">
-                <a16:creationId xmlns:a16="http://schemas.microsoft.com/office/drawing/2014/main" id="{BE96DFFB-19DE-4414-84F2-EBAEDCDD30FE}"/>
+                <a16:creationId xmlns:a16="http://schemas.microsoft.com/office/drawing/2014/main" id="{567C86D0-3AA6-4A4C-A960-8508B1840967}"/>
               </a:ext>
             </a:extLst>
           </p:cNvPr>
@@ -4857,7 +4857,7 @@
           <p:cNvPr id="11" name="">
             <a:extLst xmlns:a="http://schemas.openxmlformats.org/drawingml/2006/main">
               <a:ext uri="{FF2B5EF4-FFF2-40B4-BE49-F238E27FC236}">
-                <a16:creationId xmlns:a16="http://schemas.microsoft.com/office/drawing/2014/main" id="{F2AF804F-E543-43E0-BB2D-3EC8C2BBBD10}"/>
+                <a16:creationId xmlns:a16="http://schemas.microsoft.com/office/drawing/2014/main" id="{48E4064D-8494-4D0D-BEC5-F88AA9A81561}"/>
               </a:ext>
             </a:extLst>
           </p:cNvPr>
@@ -4888,7 +4888,7 @@
           <p:cNvPr id="12" name="">
             <a:extLst xmlns:a="http://schemas.openxmlformats.org/drawingml/2006/main">
               <a:ext uri="{FF2B5EF4-FFF2-40B4-BE49-F238E27FC236}">
-                <a16:creationId xmlns:a16="http://schemas.microsoft.com/office/drawing/2014/main" id="{0E0D9A1F-3553-4D00-A056-A3461747BA50}"/>
+                <a16:creationId xmlns:a16="http://schemas.microsoft.com/office/drawing/2014/main" id="{DB317601-0301-43B8-8B62-B613409FA4BE}"/>
               </a:ext>
             </a:extLst>
           </p:cNvPr>
@@ -4938,7 +4938,7 @@
           <p:cNvPr id="13" name="">
             <a:extLst xmlns:a="http://schemas.openxmlformats.org/drawingml/2006/main">
               <a:ext uri="{FF2B5EF4-FFF2-40B4-BE49-F238E27FC236}">
-                <a16:creationId xmlns:a16="http://schemas.microsoft.com/office/drawing/2014/main" id="{5FA39913-EC94-4A9D-9E51-6E93907B9910}"/>
+                <a16:creationId xmlns:a16="http://schemas.microsoft.com/office/drawing/2014/main" id="{1C35A76F-9F59-4AE2-AC29-B8F59CEFF9AC}"/>
               </a:ext>
             </a:extLst>
           </p:cNvPr>
@@ -4986,7 +4986,7 @@
     </p:spTree>
     <p:extLst>
       <p:ext uri="{BB962C8B-B14F-4D97-AF65-F5344CB8AC3E}">
-        <p14:creationId xmlns:p14="http://schemas.microsoft.com/office/powerpoint/2010/main" val="138672461"/>
+        <p14:creationId xmlns:p14="http://schemas.microsoft.com/office/powerpoint/2010/main" val="1470199099"/>
       </p:ext>
     </p:extLst>
   </p:cSld>
@@ -5017,7 +5017,7 @@
           <p:cNvPr id="1" name="">
             <a:extLst xmlns:a="http://schemas.openxmlformats.org/drawingml/2006/main">
               <a:ext uri="{FF2B5EF4-FFF2-40B4-BE49-F238E27FC236}">
-                <a16:creationId xmlns:a16="http://schemas.microsoft.com/office/drawing/2014/main" id="{B8D8B57C-53A1-42EC-8FD4-47B076A1CE8C}"/>
+                <a16:creationId xmlns:a16="http://schemas.microsoft.com/office/drawing/2014/main" id="{E28B213A-E738-4BEE-9646-6E756C8FE967}"/>
               </a:ext>
             </a:extLst>
           </p:cNvPr>
@@ -5067,7 +5067,7 @@
           <p:cNvPr id="2" name="">
             <a:extLst xmlns:a="http://schemas.openxmlformats.org/drawingml/2006/main">
               <a:ext uri="{FF2B5EF4-FFF2-40B4-BE49-F238E27FC236}">
-                <a16:creationId xmlns:a16="http://schemas.microsoft.com/office/drawing/2014/main" id="{AD8654A7-4CA9-4406-B274-DA9259A127B2}"/>
+                <a16:creationId xmlns:a16="http://schemas.microsoft.com/office/drawing/2014/main" id="{8C8C1255-082E-49BC-B217-18AF84B175F3}"/>
               </a:ext>
             </a:extLst>
           </p:cNvPr>
@@ -5117,7 +5117,7 @@
           <p:cNvPr id="3" name="">
             <a:extLst xmlns:a="http://schemas.openxmlformats.org/drawingml/2006/main">
               <a:ext uri="{FF2B5EF4-FFF2-40B4-BE49-F238E27FC236}">
-                <a16:creationId xmlns:a16="http://schemas.microsoft.com/office/drawing/2014/main" id="{50EE7C17-D858-42D4-8041-C90F7F4A78EF}"/>
+                <a16:creationId xmlns:a16="http://schemas.microsoft.com/office/drawing/2014/main" id="{B2C67732-ED8E-4B38-8596-DE9FBCE47F3D}"/>
               </a:ext>
             </a:extLst>
           </p:cNvPr>
@@ -5167,7 +5167,7 @@
           <p:cNvPr id="4" name="">
             <a:extLst xmlns:a="http://schemas.openxmlformats.org/drawingml/2006/main">
               <a:ext uri="{FF2B5EF4-FFF2-40B4-BE49-F238E27FC236}">
-                <a16:creationId xmlns:a16="http://schemas.microsoft.com/office/drawing/2014/main" id="{05A2C9F7-AAB5-4E4E-B36A-B807914F5535}"/>
+                <a16:creationId xmlns:a16="http://schemas.microsoft.com/office/drawing/2014/main" id="{C7EAA68D-65D9-43E4-AD24-2CBBBC8201A4}"/>
               </a:ext>
             </a:extLst>
           </p:cNvPr>
@@ -5198,7 +5198,7 @@
           <p:cNvPr id="5" name="">
             <a:extLst xmlns:a="http://schemas.openxmlformats.org/drawingml/2006/main">
               <a:ext uri="{FF2B5EF4-FFF2-40B4-BE49-F238E27FC236}">
-                <a16:creationId xmlns:a16="http://schemas.microsoft.com/office/drawing/2014/main" id="{40501B0F-FE40-4439-B826-046E05335D18}"/>
+                <a16:creationId xmlns:a16="http://schemas.microsoft.com/office/drawing/2014/main" id="{1E006CA6-FAD0-4626-8CFC-013770F362CC}"/>
               </a:ext>
             </a:extLst>
           </p:cNvPr>
@@ -5254,7 +5254,7 @@
           <p:cNvPr id="6" name="">
             <a:extLst xmlns:a="http://schemas.openxmlformats.org/drawingml/2006/main">
               <a:ext uri="{FF2B5EF4-FFF2-40B4-BE49-F238E27FC236}">
-                <a16:creationId xmlns:a16="http://schemas.microsoft.com/office/drawing/2014/main" id="{BB4A69AD-DC6E-41B6-9F03-37C505E458EA}"/>
+                <a16:creationId xmlns:a16="http://schemas.microsoft.com/office/drawing/2014/main" id="{ECF03E1E-044D-471F-B94E-FA3A91D22533}"/>
               </a:ext>
             </a:extLst>
           </p:cNvPr>
@@ -5304,7 +5304,7 @@
           <p:cNvPr id="7" name="">
             <a:extLst xmlns:a="http://schemas.openxmlformats.org/drawingml/2006/main">
               <a:ext uri="{FF2B5EF4-FFF2-40B4-BE49-F238E27FC236}">
-                <a16:creationId xmlns:a16="http://schemas.microsoft.com/office/drawing/2014/main" id="{075F0441-D71B-4EA9-A775-1143FDFDB4E3}"/>
+                <a16:creationId xmlns:a16="http://schemas.microsoft.com/office/drawing/2014/main" id="{4AA8E98C-B34A-4FB8-8CDE-0B702ADD9B48}"/>
               </a:ext>
             </a:extLst>
           </p:cNvPr>
@@ -5354,7 +5354,7 @@
           <p:cNvPr id="8" name="">
             <a:extLst xmlns:a="http://schemas.openxmlformats.org/drawingml/2006/main">
               <a:ext uri="{FF2B5EF4-FFF2-40B4-BE49-F238E27FC236}">
-                <a16:creationId xmlns:a16="http://schemas.microsoft.com/office/drawing/2014/main" id="{FBE37360-37C3-4646-827F-03B16B363B55}"/>
+                <a16:creationId xmlns:a16="http://schemas.microsoft.com/office/drawing/2014/main" id="{3285AAC5-E39A-4E00-9F75-83CD0E509008}"/>
               </a:ext>
             </a:extLst>
           </p:cNvPr>
@@ -5410,7 +5410,7 @@
           <p:cNvPr id="9" name="">
             <a:extLst xmlns:a="http://schemas.openxmlformats.org/drawingml/2006/main">
               <a:ext uri="{FF2B5EF4-FFF2-40B4-BE49-F238E27FC236}">
-                <a16:creationId xmlns:a16="http://schemas.microsoft.com/office/drawing/2014/main" id="{BE858A6A-9042-4E57-9D2E-B5F39826E880}"/>
+                <a16:creationId xmlns:a16="http://schemas.microsoft.com/office/drawing/2014/main" id="{79332C32-B15C-4D33-AC7E-117A5DE83353}"/>
               </a:ext>
             </a:extLst>
           </p:cNvPr>
@@ -5460,7 +5460,7 @@
           <p:cNvPr id="10" name="">
             <a:extLst xmlns:a="http://schemas.openxmlformats.org/drawingml/2006/main">
               <a:ext uri="{FF2B5EF4-FFF2-40B4-BE49-F238E27FC236}">
-                <a16:creationId xmlns:a16="http://schemas.microsoft.com/office/drawing/2014/main" id="{C754059F-9D8B-4C30-9288-EBD3F5CF4943}"/>
+                <a16:creationId xmlns:a16="http://schemas.microsoft.com/office/drawing/2014/main" id="{BEC76BA9-73DD-4F19-8D09-B242C84C767F}"/>
               </a:ext>
             </a:extLst>
           </p:cNvPr>
@@ -5510,7 +5510,7 @@
           <p:cNvPr id="11" name="">
             <a:extLst xmlns:a="http://schemas.openxmlformats.org/drawingml/2006/main">
               <a:ext uri="{FF2B5EF4-FFF2-40B4-BE49-F238E27FC236}">
-                <a16:creationId xmlns:a16="http://schemas.microsoft.com/office/drawing/2014/main" id="{F36C218B-5F18-498C-9B47-4554CC7C8FD6}"/>
+                <a16:creationId xmlns:a16="http://schemas.microsoft.com/office/drawing/2014/main" id="{AD34D332-12FB-46E1-9E84-1550F73D2912}"/>
               </a:ext>
             </a:extLst>
           </p:cNvPr>
@@ -5566,7 +5566,7 @@
           <p:cNvPr id="12" name="">
             <a:extLst xmlns:a="http://schemas.openxmlformats.org/drawingml/2006/main">
               <a:ext uri="{FF2B5EF4-FFF2-40B4-BE49-F238E27FC236}">
-                <a16:creationId xmlns:a16="http://schemas.microsoft.com/office/drawing/2014/main" id="{63102D52-F8D4-4093-BFA1-0859B1914359}"/>
+                <a16:creationId xmlns:a16="http://schemas.microsoft.com/office/drawing/2014/main" id="{E86C9614-3468-48FD-91FE-C7E3F96E1586}"/>
               </a:ext>
             </a:extLst>
           </p:cNvPr>
@@ -5616,7 +5616,7 @@
           <p:cNvPr id="13" name="">
             <a:extLst xmlns:a="http://schemas.openxmlformats.org/drawingml/2006/main">
               <a:ext uri="{FF2B5EF4-FFF2-40B4-BE49-F238E27FC236}">
-                <a16:creationId xmlns:a16="http://schemas.microsoft.com/office/drawing/2014/main" id="{EA2EB810-3963-4DBB-BF50-765610199BDF}"/>
+                <a16:creationId xmlns:a16="http://schemas.microsoft.com/office/drawing/2014/main" id="{EA180EDD-64AD-499B-AE80-C468D4C48C8C}"/>
               </a:ext>
             </a:extLst>
           </p:cNvPr>
@@ -5666,7 +5666,7 @@
           <p:cNvPr id="14" name="">
             <a:extLst xmlns:a="http://schemas.openxmlformats.org/drawingml/2006/main">
               <a:ext uri="{FF2B5EF4-FFF2-40B4-BE49-F238E27FC236}">
-                <a16:creationId xmlns:a16="http://schemas.microsoft.com/office/drawing/2014/main" id="{F94D884A-DDCE-41DC-AEE8-AD3085772456}"/>
+                <a16:creationId xmlns:a16="http://schemas.microsoft.com/office/drawing/2014/main" id="{ACE5F6CD-6C70-4088-A86D-DA2B557ABD31}"/>
               </a:ext>
             </a:extLst>
           </p:cNvPr>
@@ -5722,7 +5722,7 @@
           <p:cNvPr id="15" name="">
             <a:extLst xmlns:a="http://schemas.openxmlformats.org/drawingml/2006/main">
               <a:ext uri="{FF2B5EF4-FFF2-40B4-BE49-F238E27FC236}">
-                <a16:creationId xmlns:a16="http://schemas.microsoft.com/office/drawing/2014/main" id="{FDFB8335-B184-4062-B59D-6C4B9B47DDCA}"/>
+                <a16:creationId xmlns:a16="http://schemas.microsoft.com/office/drawing/2014/main" id="{1FE1AF68-3FD1-4A90-ADB1-A23EE2F47941}"/>
               </a:ext>
             </a:extLst>
           </p:cNvPr>
@@ -5772,7 +5772,7 @@
           <p:cNvPr id="16" name="">
             <a:extLst xmlns:a="http://schemas.openxmlformats.org/drawingml/2006/main">
               <a:ext uri="{FF2B5EF4-FFF2-40B4-BE49-F238E27FC236}">
-                <a16:creationId xmlns:a16="http://schemas.microsoft.com/office/drawing/2014/main" id="{A833351C-832E-4566-AAEB-AF4699D04329}"/>
+                <a16:creationId xmlns:a16="http://schemas.microsoft.com/office/drawing/2014/main" id="{CE264E8D-C905-4054-B819-AB92E3B4D748}"/>
               </a:ext>
             </a:extLst>
           </p:cNvPr>
@@ -5822,7 +5822,7 @@
           <p:cNvPr id="17" name="">
             <a:extLst xmlns:a="http://schemas.openxmlformats.org/drawingml/2006/main">
               <a:ext uri="{FF2B5EF4-FFF2-40B4-BE49-F238E27FC236}">
-                <a16:creationId xmlns:a16="http://schemas.microsoft.com/office/drawing/2014/main" id="{59B18352-E810-4240-B62C-C020BAC62CC5}"/>
+                <a16:creationId xmlns:a16="http://schemas.microsoft.com/office/drawing/2014/main" id="{2182E50C-2678-456E-B453-9383D4CDAF0D}"/>
               </a:ext>
             </a:extLst>
           </p:cNvPr>
@@ -5872,7 +5872,7 @@
           <p:cNvPr id="18" name="">
             <a:extLst xmlns:a="http://schemas.openxmlformats.org/drawingml/2006/main">
               <a:ext uri="{FF2B5EF4-FFF2-40B4-BE49-F238E27FC236}">
-                <a16:creationId xmlns:a16="http://schemas.microsoft.com/office/drawing/2014/main" id="{EB39DC53-8ED5-4D24-A130-B7DB128B1AF2}"/>
+                <a16:creationId xmlns:a16="http://schemas.microsoft.com/office/drawing/2014/main" id="{9198040C-007E-4A54-A0CD-DD2B42F50805}"/>
               </a:ext>
             </a:extLst>
           </p:cNvPr>
@@ -5922,7 +5922,7 @@
           <p:cNvPr id="19" name="">
             <a:extLst xmlns:a="http://schemas.openxmlformats.org/drawingml/2006/main">
               <a:ext uri="{FF2B5EF4-FFF2-40B4-BE49-F238E27FC236}">
-                <a16:creationId xmlns:a16="http://schemas.microsoft.com/office/drawing/2014/main" id="{E6778FFC-E13C-4FAC-A708-92A3F0EB658C}"/>
+                <a16:creationId xmlns:a16="http://schemas.microsoft.com/office/drawing/2014/main" id="{01C7EEEB-D314-44CB-A894-F6C086AF8706}"/>
               </a:ext>
             </a:extLst>
           </p:cNvPr>
@@ -5953,7 +5953,7 @@
           <p:cNvPr id="20" name="">
             <a:extLst xmlns:a="http://schemas.openxmlformats.org/drawingml/2006/main">
               <a:ext uri="{FF2B5EF4-FFF2-40B4-BE49-F238E27FC236}">
-                <a16:creationId xmlns:a16="http://schemas.microsoft.com/office/drawing/2014/main" id="{BF515D2F-E433-475A-B85A-1E4DAE22729C}"/>
+                <a16:creationId xmlns:a16="http://schemas.microsoft.com/office/drawing/2014/main" id="{6D53373F-EB05-45DD-AE9F-0556595892E0}"/>
               </a:ext>
             </a:extLst>
           </p:cNvPr>
@@ -6003,7 +6003,7 @@
           <p:cNvPr id="21" name="">
             <a:extLst xmlns:a="http://schemas.openxmlformats.org/drawingml/2006/main">
               <a:ext uri="{FF2B5EF4-FFF2-40B4-BE49-F238E27FC236}">
-                <a16:creationId xmlns:a16="http://schemas.microsoft.com/office/drawing/2014/main" id="{707E51B4-087E-4233-9819-9FF3FC330CC7}"/>
+                <a16:creationId xmlns:a16="http://schemas.microsoft.com/office/drawing/2014/main" id="{7239F316-E3BA-409D-AA8E-A3D1C6F60972}"/>
               </a:ext>
             </a:extLst>
           </p:cNvPr>
@@ -6051,7 +6051,7 @@
     </p:spTree>
     <p:extLst>
       <p:ext uri="{BB962C8B-B14F-4D97-AF65-F5344CB8AC3E}">
-        <p14:creationId xmlns:p14="http://schemas.microsoft.com/office/powerpoint/2010/main" val="21840470"/>
+        <p14:creationId xmlns:p14="http://schemas.microsoft.com/office/powerpoint/2010/main" val="810753773"/>
       </p:ext>
     </p:extLst>
   </p:cSld>
@@ -6082,7 +6082,7 @@
           <p:cNvPr id="1" name="">
             <a:extLst xmlns:a="http://schemas.openxmlformats.org/drawingml/2006/main">
               <a:ext uri="{FF2B5EF4-FFF2-40B4-BE49-F238E27FC236}">
-                <a16:creationId xmlns:a16="http://schemas.microsoft.com/office/drawing/2014/main" id="{72662A92-ADC6-4AD0-8A8E-A00CF7FE2553}"/>
+                <a16:creationId xmlns:a16="http://schemas.microsoft.com/office/drawing/2014/main" id="{13AD6DC7-8D8E-4E15-9465-76281823B313}"/>
               </a:ext>
             </a:extLst>
           </p:cNvPr>
@@ -6132,7 +6132,7 @@
           <p:cNvPr id="2" name="">
             <a:extLst xmlns:a="http://schemas.openxmlformats.org/drawingml/2006/main">
               <a:ext uri="{FF2B5EF4-FFF2-40B4-BE49-F238E27FC236}">
-                <a16:creationId xmlns:a16="http://schemas.microsoft.com/office/drawing/2014/main" id="{8C9F0565-F9F0-4962-9392-1112557C9F44}"/>
+                <a16:creationId xmlns:a16="http://schemas.microsoft.com/office/drawing/2014/main" id="{517C4D52-9187-40B2-B401-92C1734C4CA8}"/>
               </a:ext>
             </a:extLst>
           </p:cNvPr>
@@ -6182,7 +6182,7 @@
           <p:cNvPr id="3" name="">
             <a:extLst xmlns:a="http://schemas.openxmlformats.org/drawingml/2006/main">
               <a:ext uri="{FF2B5EF4-FFF2-40B4-BE49-F238E27FC236}">
-                <a16:creationId xmlns:a16="http://schemas.microsoft.com/office/drawing/2014/main" id="{01477F81-1E5F-4323-9231-1ED9069B417B}"/>
+                <a16:creationId xmlns:a16="http://schemas.microsoft.com/office/drawing/2014/main" id="{FD2F929E-62AA-4E72-9F7D-C0A3EFED31C7}"/>
               </a:ext>
             </a:extLst>
           </p:cNvPr>
@@ -6232,7 +6232,7 @@
           <p:cNvPr id="4" name="">
             <a:extLst xmlns:a="http://schemas.openxmlformats.org/drawingml/2006/main">
               <a:ext uri="{FF2B5EF4-FFF2-40B4-BE49-F238E27FC236}">
-                <a16:creationId xmlns:a16="http://schemas.microsoft.com/office/drawing/2014/main" id="{444EA092-816C-4676-8E63-A298F988FD1E}"/>
+                <a16:creationId xmlns:a16="http://schemas.microsoft.com/office/drawing/2014/main" id="{ECCED06B-B7CC-4C18-9186-92FB19470E9C}"/>
               </a:ext>
             </a:extLst>
           </p:cNvPr>
@@ -6263,7 +6263,7 @@
           <p:cNvPr id="5" name="">
             <a:extLst xmlns:a="http://schemas.openxmlformats.org/drawingml/2006/main">
               <a:ext uri="{FF2B5EF4-FFF2-40B4-BE49-F238E27FC236}">
-                <a16:creationId xmlns:a16="http://schemas.microsoft.com/office/drawing/2014/main" id="{CD9F49E9-B967-444C-B88C-C618D9640875}"/>
+                <a16:creationId xmlns:a16="http://schemas.microsoft.com/office/drawing/2014/main" id="{D9CF402E-6993-42A4-8DB3-1B915C4247C5}"/>
               </a:ext>
             </a:extLst>
           </p:cNvPr>
@@ -6319,7 +6319,7 @@
           <p:cNvPr id="6" name="">
             <a:extLst xmlns:a="http://schemas.openxmlformats.org/drawingml/2006/main">
               <a:ext uri="{FF2B5EF4-FFF2-40B4-BE49-F238E27FC236}">
-                <a16:creationId xmlns:a16="http://schemas.microsoft.com/office/drawing/2014/main" id="{82192E32-B677-43BC-AFED-C42BCF3F8EE7}"/>
+                <a16:creationId xmlns:a16="http://schemas.microsoft.com/office/drawing/2014/main" id="{8D6603C0-1490-47D3-83E5-BCB09BAB456F}"/>
               </a:ext>
             </a:extLst>
           </p:cNvPr>
@@ -6369,7 +6369,7 @@
           <p:cNvPr id="7" name="">
             <a:extLst xmlns:a="http://schemas.openxmlformats.org/drawingml/2006/main">
               <a:ext uri="{FF2B5EF4-FFF2-40B4-BE49-F238E27FC236}">
-                <a16:creationId xmlns:a16="http://schemas.microsoft.com/office/drawing/2014/main" id="{25BD6029-CD09-4DEC-997A-8D3F085CE413}"/>
+                <a16:creationId xmlns:a16="http://schemas.microsoft.com/office/drawing/2014/main" id="{A6848745-7ACC-4DC0-944E-266B2AE4EBEC}"/>
               </a:ext>
             </a:extLst>
           </p:cNvPr>
@@ -6419,7 +6419,7 @@
           <p:cNvPr id="8" name="">
             <a:extLst xmlns:a="http://schemas.openxmlformats.org/drawingml/2006/main">
               <a:ext uri="{FF2B5EF4-FFF2-40B4-BE49-F238E27FC236}">
-                <a16:creationId xmlns:a16="http://schemas.microsoft.com/office/drawing/2014/main" id="{7EA8476E-CC70-4A8F-B791-C4384164DBF5}"/>
+                <a16:creationId xmlns:a16="http://schemas.microsoft.com/office/drawing/2014/main" id="{0148E768-45BE-4554-8BF3-056FFE258921}"/>
               </a:ext>
             </a:extLst>
           </p:cNvPr>
@@ -6475,7 +6475,7 @@
           <p:cNvPr id="9" name="">
             <a:extLst xmlns:a="http://schemas.openxmlformats.org/drawingml/2006/main">
               <a:ext uri="{FF2B5EF4-FFF2-40B4-BE49-F238E27FC236}">
-                <a16:creationId xmlns:a16="http://schemas.microsoft.com/office/drawing/2014/main" id="{F40D790F-A306-4956-B500-E686B23D9355}"/>
+                <a16:creationId xmlns:a16="http://schemas.microsoft.com/office/drawing/2014/main" id="{94175CE1-886B-4410-9D6E-268DAC72F475}"/>
               </a:ext>
             </a:extLst>
           </p:cNvPr>
@@ -6525,7 +6525,7 @@
           <p:cNvPr id="10" name="">
             <a:extLst xmlns:a="http://schemas.openxmlformats.org/drawingml/2006/main">
               <a:ext uri="{FF2B5EF4-FFF2-40B4-BE49-F238E27FC236}">
-                <a16:creationId xmlns:a16="http://schemas.microsoft.com/office/drawing/2014/main" id="{CB77D35E-340D-45B4-BB96-E72125282259}"/>
+                <a16:creationId xmlns:a16="http://schemas.microsoft.com/office/drawing/2014/main" id="{2777ED9A-5467-4E19-B11E-B0270B989A99}"/>
               </a:ext>
             </a:extLst>
           </p:cNvPr>
@@ -6575,7 +6575,7 @@
           <p:cNvPr id="11" name="">
             <a:extLst xmlns:a="http://schemas.openxmlformats.org/drawingml/2006/main">
               <a:ext uri="{FF2B5EF4-FFF2-40B4-BE49-F238E27FC236}">
-                <a16:creationId xmlns:a16="http://schemas.microsoft.com/office/drawing/2014/main" id="{DB6C72B4-7568-4E4E-B3E9-F2FD2DB2207B}"/>
+                <a16:creationId xmlns:a16="http://schemas.microsoft.com/office/drawing/2014/main" id="{96BCC1F0-AC4E-4EB9-A5C6-D93EF9AC7BCB}"/>
               </a:ext>
             </a:extLst>
           </p:cNvPr>
@@ -6631,7 +6631,7 @@
           <p:cNvPr id="12" name="">
             <a:extLst xmlns:a="http://schemas.openxmlformats.org/drawingml/2006/main">
               <a:ext uri="{FF2B5EF4-FFF2-40B4-BE49-F238E27FC236}">
-                <a16:creationId xmlns:a16="http://schemas.microsoft.com/office/drawing/2014/main" id="{5DA5E96B-56D2-4F3B-902E-3DBEA8F2F109}"/>
+                <a16:creationId xmlns:a16="http://schemas.microsoft.com/office/drawing/2014/main" id="{22351FD7-F85D-4170-970D-25890F68440B}"/>
               </a:ext>
             </a:extLst>
           </p:cNvPr>
@@ -6681,7 +6681,7 @@
           <p:cNvPr id="13" name="">
             <a:extLst xmlns:a="http://schemas.openxmlformats.org/drawingml/2006/main">
               <a:ext uri="{FF2B5EF4-FFF2-40B4-BE49-F238E27FC236}">
-                <a16:creationId xmlns:a16="http://schemas.microsoft.com/office/drawing/2014/main" id="{A731321B-EC3C-4D24-813C-B5DE2980F1D6}"/>
+                <a16:creationId xmlns:a16="http://schemas.microsoft.com/office/drawing/2014/main" id="{A2B08562-AB17-43A2-85F4-CA357170A2B7}"/>
               </a:ext>
             </a:extLst>
           </p:cNvPr>
@@ -6731,7 +6731,7 @@
           <p:cNvPr id="14" name="">
             <a:extLst xmlns:a="http://schemas.openxmlformats.org/drawingml/2006/main">
               <a:ext uri="{FF2B5EF4-FFF2-40B4-BE49-F238E27FC236}">
-                <a16:creationId xmlns:a16="http://schemas.microsoft.com/office/drawing/2014/main" id="{89F3BA1D-D54B-41CD-9DE7-CEBEBFB743C8}"/>
+                <a16:creationId xmlns:a16="http://schemas.microsoft.com/office/drawing/2014/main" id="{44935B40-588E-4B27-8532-3051AF9C47B8}"/>
               </a:ext>
             </a:extLst>
           </p:cNvPr>
@@ -6787,7 +6787,7 @@
           <p:cNvPr id="15" name="">
             <a:extLst xmlns:a="http://schemas.openxmlformats.org/drawingml/2006/main">
               <a:ext uri="{FF2B5EF4-FFF2-40B4-BE49-F238E27FC236}">
-                <a16:creationId xmlns:a16="http://schemas.microsoft.com/office/drawing/2014/main" id="{E1CF74D9-3E1F-4851-8DD4-597846647D2D}"/>
+                <a16:creationId xmlns:a16="http://schemas.microsoft.com/office/drawing/2014/main" id="{6DF96129-AB27-45AE-BB6F-F75A189DC192}"/>
               </a:ext>
             </a:extLst>
           </p:cNvPr>
@@ -6837,7 +6837,7 @@
           <p:cNvPr id="16" name="">
             <a:extLst xmlns:a="http://schemas.openxmlformats.org/drawingml/2006/main">
               <a:ext uri="{FF2B5EF4-FFF2-40B4-BE49-F238E27FC236}">
-                <a16:creationId xmlns:a16="http://schemas.microsoft.com/office/drawing/2014/main" id="{CC5DC0D6-DDD1-430B-9095-05158251C7DA}"/>
+                <a16:creationId xmlns:a16="http://schemas.microsoft.com/office/drawing/2014/main" id="{1DBA92D0-5BD5-4F80-B24B-650339170275}"/>
               </a:ext>
             </a:extLst>
           </p:cNvPr>
@@ -6887,7 +6887,7 @@
           <p:cNvPr id="17" name="">
             <a:extLst xmlns:a="http://schemas.openxmlformats.org/drawingml/2006/main">
               <a:ext uri="{FF2B5EF4-FFF2-40B4-BE49-F238E27FC236}">
-                <a16:creationId xmlns:a16="http://schemas.microsoft.com/office/drawing/2014/main" id="{A3897032-11C7-4B7F-97F4-094E09A61068}"/>
+                <a16:creationId xmlns:a16="http://schemas.microsoft.com/office/drawing/2014/main" id="{FD59443C-7505-466F-8EF3-16CACF9AB7EA}"/>
               </a:ext>
             </a:extLst>
           </p:cNvPr>
@@ -6943,7 +6943,7 @@
           <p:cNvPr id="18" name="">
             <a:extLst xmlns:a="http://schemas.openxmlformats.org/drawingml/2006/main">
               <a:ext uri="{FF2B5EF4-FFF2-40B4-BE49-F238E27FC236}">
-                <a16:creationId xmlns:a16="http://schemas.microsoft.com/office/drawing/2014/main" id="{C6E51EFE-BB1C-468C-A7B2-A966A2D881EA}"/>
+                <a16:creationId xmlns:a16="http://schemas.microsoft.com/office/drawing/2014/main" id="{0C5AEDE3-E8CB-46CE-9828-DBC930C3A2B4}"/>
               </a:ext>
             </a:extLst>
           </p:cNvPr>
@@ -6993,7 +6993,7 @@
           <p:cNvPr id="19" name="">
             <a:extLst xmlns:a="http://schemas.openxmlformats.org/drawingml/2006/main">
               <a:ext uri="{FF2B5EF4-FFF2-40B4-BE49-F238E27FC236}">
-                <a16:creationId xmlns:a16="http://schemas.microsoft.com/office/drawing/2014/main" id="{783DFF2C-1FB9-4E19-8DE1-6F20270CD1B3}"/>
+                <a16:creationId xmlns:a16="http://schemas.microsoft.com/office/drawing/2014/main" id="{1816FC33-69B5-4F4D-9B00-CDF70FEF2B0F}"/>
               </a:ext>
             </a:extLst>
           </p:cNvPr>
@@ -7043,7 +7043,7 @@
           <p:cNvPr id="20" name="">
             <a:extLst xmlns:a="http://schemas.openxmlformats.org/drawingml/2006/main">
               <a:ext uri="{FF2B5EF4-FFF2-40B4-BE49-F238E27FC236}">
-                <a16:creationId xmlns:a16="http://schemas.microsoft.com/office/drawing/2014/main" id="{366E2298-3D69-46B6-B69B-6250D10BDA72}"/>
+                <a16:creationId xmlns:a16="http://schemas.microsoft.com/office/drawing/2014/main" id="{033AE870-48D9-4F5C-AA44-A50850352D4E}"/>
               </a:ext>
             </a:extLst>
           </p:cNvPr>
@@ -7093,7 +7093,7 @@
           <p:cNvPr id="21" name="">
             <a:extLst xmlns:a="http://schemas.openxmlformats.org/drawingml/2006/main">
               <a:ext uri="{FF2B5EF4-FFF2-40B4-BE49-F238E27FC236}">
-                <a16:creationId xmlns:a16="http://schemas.microsoft.com/office/drawing/2014/main" id="{D4D1E73D-561C-4817-A521-F9D8DA79B030}"/>
+                <a16:creationId xmlns:a16="http://schemas.microsoft.com/office/drawing/2014/main" id="{29C8A3A9-ABF1-4646-80CE-E6E682512749}"/>
               </a:ext>
             </a:extLst>
           </p:cNvPr>
@@ -7143,7 +7143,7 @@
           <p:cNvPr id="22" name="">
             <a:extLst xmlns:a="http://schemas.openxmlformats.org/drawingml/2006/main">
               <a:ext uri="{FF2B5EF4-FFF2-40B4-BE49-F238E27FC236}">
-                <a16:creationId xmlns:a16="http://schemas.microsoft.com/office/drawing/2014/main" id="{B792E44D-C5F8-4B79-9CA1-A0B32F75ECBB}"/>
+                <a16:creationId xmlns:a16="http://schemas.microsoft.com/office/drawing/2014/main" id="{B375B488-BC0E-4F5E-BEA9-BF9A9A53C01E}"/>
               </a:ext>
             </a:extLst>
           </p:cNvPr>
@@ -7174,7 +7174,7 @@
           <p:cNvPr id="23" name="">
             <a:extLst xmlns:a="http://schemas.openxmlformats.org/drawingml/2006/main">
               <a:ext uri="{FF2B5EF4-FFF2-40B4-BE49-F238E27FC236}">
-                <a16:creationId xmlns:a16="http://schemas.microsoft.com/office/drawing/2014/main" id="{E280C5B0-6DD6-4B42-8B9E-FE577E4A1F1A}"/>
+                <a16:creationId xmlns:a16="http://schemas.microsoft.com/office/drawing/2014/main" id="{4C0D3662-F92A-47E8-B0E3-B959D25A6394}"/>
               </a:ext>
             </a:extLst>
           </p:cNvPr>
@@ -7224,7 +7224,7 @@
           <p:cNvPr id="24" name="">
             <a:extLst xmlns:a="http://schemas.openxmlformats.org/drawingml/2006/main">
               <a:ext uri="{FF2B5EF4-FFF2-40B4-BE49-F238E27FC236}">
-                <a16:creationId xmlns:a16="http://schemas.microsoft.com/office/drawing/2014/main" id="{F3E8C758-ACC6-4AA9-A9CE-80099F930AA3}"/>
+                <a16:creationId xmlns:a16="http://schemas.microsoft.com/office/drawing/2014/main" id="{8860CBED-9332-4CCD-BD19-8B5B7437E5C7}"/>
               </a:ext>
             </a:extLst>
           </p:cNvPr>
@@ -7272,7 +7272,7 @@
     </p:spTree>
     <p:extLst>
       <p:ext uri="{BB962C8B-B14F-4D97-AF65-F5344CB8AC3E}">
-        <p14:creationId xmlns:p14="http://schemas.microsoft.com/office/powerpoint/2010/main" val="1326495627"/>
+        <p14:creationId xmlns:p14="http://schemas.microsoft.com/office/powerpoint/2010/main" val="857757353"/>
       </p:ext>
     </p:extLst>
   </p:cSld>
@@ -7303,7 +7303,7 @@
           <p:cNvPr id="1" name="">
             <a:extLst xmlns:a="http://schemas.openxmlformats.org/drawingml/2006/main">
               <a:ext uri="{FF2B5EF4-FFF2-40B4-BE49-F238E27FC236}">
-                <a16:creationId xmlns:a16="http://schemas.microsoft.com/office/drawing/2014/main" id="{7EC9B238-37AE-406F-9040-C4FFEABCB4F0}"/>
+                <a16:creationId xmlns:a16="http://schemas.microsoft.com/office/drawing/2014/main" id="{49D734B0-08B7-4317-A888-149B980AD514}"/>
               </a:ext>
             </a:extLst>
           </p:cNvPr>
@@ -7353,7 +7353,7 @@
           <p:cNvPr id="2" name="">
             <a:extLst xmlns:a="http://schemas.openxmlformats.org/drawingml/2006/main">
               <a:ext uri="{FF2B5EF4-FFF2-40B4-BE49-F238E27FC236}">
-                <a16:creationId xmlns:a16="http://schemas.microsoft.com/office/drawing/2014/main" id="{DB132D92-BBE3-48C4-B208-A7358D1D19C7}"/>
+                <a16:creationId xmlns:a16="http://schemas.microsoft.com/office/drawing/2014/main" id="{7F52791A-FC15-4539-AACB-222C108F31A2}"/>
               </a:ext>
             </a:extLst>
           </p:cNvPr>
@@ -7403,7 +7403,7 @@
           <p:cNvPr id="3" name="">
             <a:extLst xmlns:a="http://schemas.openxmlformats.org/drawingml/2006/main">
               <a:ext uri="{FF2B5EF4-FFF2-40B4-BE49-F238E27FC236}">
-                <a16:creationId xmlns:a16="http://schemas.microsoft.com/office/drawing/2014/main" id="{1CA57F88-730A-442C-8BD6-D781211A1B85}"/>
+                <a16:creationId xmlns:a16="http://schemas.microsoft.com/office/drawing/2014/main" id="{2F9BBF95-033B-4756-91F9-D4B52B24AAF2}"/>
               </a:ext>
             </a:extLst>
           </p:cNvPr>
@@ -7453,7 +7453,7 @@
           <p:cNvPr id="4" name="">
             <a:extLst xmlns:a="http://schemas.openxmlformats.org/drawingml/2006/main">
               <a:ext uri="{FF2B5EF4-FFF2-40B4-BE49-F238E27FC236}">
-                <a16:creationId xmlns:a16="http://schemas.microsoft.com/office/drawing/2014/main" id="{94909E85-5514-4320-8355-9B148D955410}"/>
+                <a16:creationId xmlns:a16="http://schemas.microsoft.com/office/drawing/2014/main" id="{CD4287AB-94E8-4219-9B65-D5976952E087}"/>
               </a:ext>
             </a:extLst>
           </p:cNvPr>
@@ -7484,7 +7484,7 @@
           <p:cNvPr id="5" name="">
             <a:extLst xmlns:a="http://schemas.openxmlformats.org/drawingml/2006/main">
               <a:ext uri="{FF2B5EF4-FFF2-40B4-BE49-F238E27FC236}">
-                <a16:creationId xmlns:a16="http://schemas.microsoft.com/office/drawing/2014/main" id="{EFE85EE7-E5E2-4AE9-AC1B-95DCB71205BB}"/>
+                <a16:creationId xmlns:a16="http://schemas.microsoft.com/office/drawing/2014/main" id="{832D44BF-2A54-43F3-8F2F-047E928AE5D6}"/>
               </a:ext>
             </a:extLst>
           </p:cNvPr>
@@ -7540,7 +7540,7 @@
           <p:cNvPr id="6" name="">
             <a:extLst xmlns:a="http://schemas.openxmlformats.org/drawingml/2006/main">
               <a:ext uri="{FF2B5EF4-FFF2-40B4-BE49-F238E27FC236}">
-                <a16:creationId xmlns:a16="http://schemas.microsoft.com/office/drawing/2014/main" id="{A5944332-713C-418E-B7BA-4426D184C730}"/>
+                <a16:creationId xmlns:a16="http://schemas.microsoft.com/office/drawing/2014/main" id="{D5AFF873-F2ED-42B5-AA44-B5B1B6B82405}"/>
               </a:ext>
             </a:extLst>
           </p:cNvPr>
@@ -7590,7 +7590,7 @@
           <p:cNvPr id="7" name="">
             <a:extLst xmlns:a="http://schemas.openxmlformats.org/drawingml/2006/main">
               <a:ext uri="{FF2B5EF4-FFF2-40B4-BE49-F238E27FC236}">
-                <a16:creationId xmlns:a16="http://schemas.microsoft.com/office/drawing/2014/main" id="{E821CC71-45E4-4275-B70C-59B03C2E9DF1}"/>
+                <a16:creationId xmlns:a16="http://schemas.microsoft.com/office/drawing/2014/main" id="{628E0396-ABEF-483F-852D-A57D05E87ACE}"/>
               </a:ext>
             </a:extLst>
           </p:cNvPr>
@@ -7646,7 +7646,7 @@
           <p:cNvPr id="8" name="">
             <a:extLst xmlns:a="http://schemas.openxmlformats.org/drawingml/2006/main">
               <a:ext uri="{FF2B5EF4-FFF2-40B4-BE49-F238E27FC236}">
-                <a16:creationId xmlns:a16="http://schemas.microsoft.com/office/drawing/2014/main" id="{B3FF9CEB-C37B-4861-8148-014BB618601D}"/>
+                <a16:creationId xmlns:a16="http://schemas.microsoft.com/office/drawing/2014/main" id="{C4A2866F-F19D-437F-8112-1DBC10FD6030}"/>
               </a:ext>
             </a:extLst>
           </p:cNvPr>
@@ -7696,7 +7696,7 @@
           <p:cNvPr id="9" name="">
             <a:extLst xmlns:a="http://schemas.openxmlformats.org/drawingml/2006/main">
               <a:ext uri="{FF2B5EF4-FFF2-40B4-BE49-F238E27FC236}">
-                <a16:creationId xmlns:a16="http://schemas.microsoft.com/office/drawing/2014/main" id="{B44CC3B3-4489-4BC7-A021-D4156A8CFACA}"/>
+                <a16:creationId xmlns:a16="http://schemas.microsoft.com/office/drawing/2014/main" id="{FE57BC46-72EC-4A84-933F-7F8E8C66310A}"/>
               </a:ext>
             </a:extLst>
           </p:cNvPr>
@@ -7746,7 +7746,7 @@
           <p:cNvPr id="10" name="">
             <a:extLst xmlns:a="http://schemas.openxmlformats.org/drawingml/2006/main">
               <a:ext uri="{FF2B5EF4-FFF2-40B4-BE49-F238E27FC236}">
-                <a16:creationId xmlns:a16="http://schemas.microsoft.com/office/drawing/2014/main" id="{C429E3D1-772E-4926-9BA8-1FC04EBEB8BE}"/>
+                <a16:creationId xmlns:a16="http://schemas.microsoft.com/office/drawing/2014/main" id="{59E1A66A-F726-4188-A3B9-1846EDBB040B}"/>
               </a:ext>
             </a:extLst>
           </p:cNvPr>
@@ -7796,7 +7796,7 @@
           <p:cNvPr id="11" name="">
             <a:extLst xmlns:a="http://schemas.openxmlformats.org/drawingml/2006/main">
               <a:ext uri="{FF2B5EF4-FFF2-40B4-BE49-F238E27FC236}">
-                <a16:creationId xmlns:a16="http://schemas.microsoft.com/office/drawing/2014/main" id="{37ACB0AC-0F04-477B-9427-B8A0977F8F36}"/>
+                <a16:creationId xmlns:a16="http://schemas.microsoft.com/office/drawing/2014/main" id="{67E6E7F3-AA86-40B9-A058-438CD9DB20B9}"/>
               </a:ext>
             </a:extLst>
           </p:cNvPr>
@@ -7827,7 +7827,7 @@
           <p:cNvPr id="12" name="">
             <a:extLst xmlns:a="http://schemas.openxmlformats.org/drawingml/2006/main">
               <a:ext uri="{FF2B5EF4-FFF2-40B4-BE49-F238E27FC236}">
-                <a16:creationId xmlns:a16="http://schemas.microsoft.com/office/drawing/2014/main" id="{9D30F0BB-F051-47B0-96B3-3E43B4B1D65E}"/>
+                <a16:creationId xmlns:a16="http://schemas.microsoft.com/office/drawing/2014/main" id="{778191D6-3553-4E31-A8E2-09AEB044FC6D}"/>
               </a:ext>
             </a:extLst>
           </p:cNvPr>
@@ -7877,7 +7877,7 @@
           <p:cNvPr id="13" name="">
             <a:extLst xmlns:a="http://schemas.openxmlformats.org/drawingml/2006/main">
               <a:ext uri="{FF2B5EF4-FFF2-40B4-BE49-F238E27FC236}">
-                <a16:creationId xmlns:a16="http://schemas.microsoft.com/office/drawing/2014/main" id="{8ADDE3A2-46AB-4A96-A338-18DAF2B55D06}"/>
+                <a16:creationId xmlns:a16="http://schemas.microsoft.com/office/drawing/2014/main" id="{EC671F71-8796-40F1-A3F1-52B54D765BA2}"/>
               </a:ext>
             </a:extLst>
           </p:cNvPr>
@@ -7925,7 +7925,7 @@
     </p:spTree>
     <p:extLst>
       <p:ext uri="{BB962C8B-B14F-4D97-AF65-F5344CB8AC3E}">
-        <p14:creationId xmlns:p14="http://schemas.microsoft.com/office/powerpoint/2010/main" val="795282882"/>
+        <p14:creationId xmlns:p14="http://schemas.microsoft.com/office/powerpoint/2010/main" val="1244555666"/>
       </p:ext>
     </p:extLst>
   </p:cSld>
@@ -7956,7 +7956,7 @@
           <p:cNvPr id="1" name="">
             <a:extLst xmlns:a="http://schemas.openxmlformats.org/drawingml/2006/main">
               <a:ext uri="{FF2B5EF4-FFF2-40B4-BE49-F238E27FC236}">
-                <a16:creationId xmlns:a16="http://schemas.microsoft.com/office/drawing/2014/main" id="{C8441305-E99B-49C2-B933-CBBB6A9F84B9}"/>
+                <a16:creationId xmlns:a16="http://schemas.microsoft.com/office/drawing/2014/main" id="{87E46ABC-2073-4DA5-B552-4FF9EB553F4B}"/>
               </a:ext>
             </a:extLst>
           </p:cNvPr>
@@ -8006,7 +8006,7 @@
           <p:cNvPr id="2" name="">
             <a:extLst xmlns:a="http://schemas.openxmlformats.org/drawingml/2006/main">
               <a:ext uri="{FF2B5EF4-FFF2-40B4-BE49-F238E27FC236}">
-                <a16:creationId xmlns:a16="http://schemas.microsoft.com/office/drawing/2014/main" id="{873397BC-9732-49F8-BFE7-DAFCE0E4B93E}"/>
+                <a16:creationId xmlns:a16="http://schemas.microsoft.com/office/drawing/2014/main" id="{7A329793-326D-4B0E-B7FD-4A5CBC34BFDB}"/>
               </a:ext>
             </a:extLst>
           </p:cNvPr>
@@ -8056,7 +8056,7 @@
           <p:cNvPr id="3" name="">
             <a:extLst xmlns:a="http://schemas.openxmlformats.org/drawingml/2006/main">
               <a:ext uri="{FF2B5EF4-FFF2-40B4-BE49-F238E27FC236}">
-                <a16:creationId xmlns:a16="http://schemas.microsoft.com/office/drawing/2014/main" id="{117230B0-CC8B-4B00-B6C0-E9FC5C30AA14}"/>
+                <a16:creationId xmlns:a16="http://schemas.microsoft.com/office/drawing/2014/main" id="{022C0A66-89E3-427A-AEB3-588E102CA592}"/>
               </a:ext>
             </a:extLst>
           </p:cNvPr>
@@ -8106,7 +8106,7 @@
           <p:cNvPr id="4" name="">
             <a:extLst xmlns:a="http://schemas.openxmlformats.org/drawingml/2006/main">
               <a:ext uri="{FF2B5EF4-FFF2-40B4-BE49-F238E27FC236}">
-                <a16:creationId xmlns:a16="http://schemas.microsoft.com/office/drawing/2014/main" id="{9A353EDA-229C-4C5A-A64E-77747517DEDC}"/>
+                <a16:creationId xmlns:a16="http://schemas.microsoft.com/office/drawing/2014/main" id="{DCF1FC99-154C-436A-B99F-F9252C608FAD}"/>
               </a:ext>
             </a:extLst>
           </p:cNvPr>
@@ -8137,7 +8137,7 @@
           <p:cNvPr id="5" name="">
             <a:extLst xmlns:a="http://schemas.openxmlformats.org/drawingml/2006/main">
               <a:ext uri="{FF2B5EF4-FFF2-40B4-BE49-F238E27FC236}">
-                <a16:creationId xmlns:a16="http://schemas.microsoft.com/office/drawing/2014/main" id="{102CF546-A29C-4742-A05D-844ACCFFBE40}"/>
+                <a16:creationId xmlns:a16="http://schemas.microsoft.com/office/drawing/2014/main" id="{FD05F41A-3DD3-4510-9291-DDC41AA72603}"/>
               </a:ext>
             </a:extLst>
           </p:cNvPr>
@@ -8193,7 +8193,7 @@
           <p:cNvPr id="6" name="">
             <a:extLst xmlns:a="http://schemas.openxmlformats.org/drawingml/2006/main">
               <a:ext uri="{FF2B5EF4-FFF2-40B4-BE49-F238E27FC236}">
-                <a16:creationId xmlns:a16="http://schemas.microsoft.com/office/drawing/2014/main" id="{B447F61C-D763-43C1-A3F4-BF8D139B727C}"/>
+                <a16:creationId xmlns:a16="http://schemas.microsoft.com/office/drawing/2014/main" id="{D90D813C-8E22-4794-8402-2FC045C0F825}"/>
               </a:ext>
             </a:extLst>
           </p:cNvPr>
@@ -8243,7 +8243,7 @@
           <p:cNvPr id="7" name="">
             <a:extLst xmlns:a="http://schemas.openxmlformats.org/drawingml/2006/main">
               <a:ext uri="{FF2B5EF4-FFF2-40B4-BE49-F238E27FC236}">
-                <a16:creationId xmlns:a16="http://schemas.microsoft.com/office/drawing/2014/main" id="{F3AD2517-1D95-405B-A5C6-E4A8E8BB18CE}"/>
+                <a16:creationId xmlns:a16="http://schemas.microsoft.com/office/drawing/2014/main" id="{BD250AFB-6B51-429C-87A0-C48E326535E2}"/>
               </a:ext>
             </a:extLst>
           </p:cNvPr>
@@ -8299,7 +8299,7 @@
           <p:cNvPr id="8" name="">
             <a:extLst xmlns:a="http://schemas.openxmlformats.org/drawingml/2006/main">
               <a:ext uri="{FF2B5EF4-FFF2-40B4-BE49-F238E27FC236}">
-                <a16:creationId xmlns:a16="http://schemas.microsoft.com/office/drawing/2014/main" id="{263DDF4A-CB56-4CAE-9CB1-E07FC662C137}"/>
+                <a16:creationId xmlns:a16="http://schemas.microsoft.com/office/drawing/2014/main" id="{430756D1-EF28-4321-91B9-D176F3189529}"/>
               </a:ext>
             </a:extLst>
           </p:cNvPr>
@@ -8349,7 +8349,7 @@
           <p:cNvPr id="9" name="">
             <a:extLst xmlns:a="http://schemas.openxmlformats.org/drawingml/2006/main">
               <a:ext uri="{FF2B5EF4-FFF2-40B4-BE49-F238E27FC236}">
-                <a16:creationId xmlns:a16="http://schemas.microsoft.com/office/drawing/2014/main" id="{6EF13457-983F-43C8-A796-A4F2A8EF0E2C}"/>
+                <a16:creationId xmlns:a16="http://schemas.microsoft.com/office/drawing/2014/main" id="{CFFA0780-B25D-4BC0-81F5-8DA35E3008D1}"/>
               </a:ext>
             </a:extLst>
           </p:cNvPr>
@@ -8399,7 +8399,7 @@
           <p:cNvPr id="10" name="">
             <a:extLst xmlns:a="http://schemas.openxmlformats.org/drawingml/2006/main">
               <a:ext uri="{FF2B5EF4-FFF2-40B4-BE49-F238E27FC236}">
-                <a16:creationId xmlns:a16="http://schemas.microsoft.com/office/drawing/2014/main" id="{B652CE20-5333-4791-957A-12749523832B}"/>
+                <a16:creationId xmlns:a16="http://schemas.microsoft.com/office/drawing/2014/main" id="{388EF889-8D6A-4D9E-B03A-979D56150237}"/>
               </a:ext>
             </a:extLst>
           </p:cNvPr>
@@ -8449,7 +8449,7 @@
           <p:cNvPr id="11" name="">
             <a:extLst xmlns:a="http://schemas.openxmlformats.org/drawingml/2006/main">
               <a:ext uri="{FF2B5EF4-FFF2-40B4-BE49-F238E27FC236}">
-                <a16:creationId xmlns:a16="http://schemas.microsoft.com/office/drawing/2014/main" id="{51925927-DC5C-4D36-B2A5-CED0C301D033}"/>
+                <a16:creationId xmlns:a16="http://schemas.microsoft.com/office/drawing/2014/main" id="{C4897C19-09B6-4732-BFCF-0F0EEADFBE5C}"/>
               </a:ext>
             </a:extLst>
           </p:cNvPr>
@@ -8480,7 +8480,7 @@
           <p:cNvPr id="12" name="">
             <a:extLst xmlns:a="http://schemas.openxmlformats.org/drawingml/2006/main">
               <a:ext uri="{FF2B5EF4-FFF2-40B4-BE49-F238E27FC236}">
-                <a16:creationId xmlns:a16="http://schemas.microsoft.com/office/drawing/2014/main" id="{975D4690-D8EC-4EE0-8EAC-3806E97A94FB}"/>
+                <a16:creationId xmlns:a16="http://schemas.microsoft.com/office/drawing/2014/main" id="{6AFB7812-1226-4555-96FF-2D7ECC8690A5}"/>
               </a:ext>
             </a:extLst>
           </p:cNvPr>
@@ -8530,7 +8530,7 @@
           <p:cNvPr id="13" name="">
             <a:extLst xmlns:a="http://schemas.openxmlformats.org/drawingml/2006/main">
               <a:ext uri="{FF2B5EF4-FFF2-40B4-BE49-F238E27FC236}">
-                <a16:creationId xmlns:a16="http://schemas.microsoft.com/office/drawing/2014/main" id="{00AD10DA-CB1A-4B4D-9341-CA978202F8F8}"/>
+                <a16:creationId xmlns:a16="http://schemas.microsoft.com/office/drawing/2014/main" id="{B218DF4E-D790-4142-85C0-0FF049C5B6AE}"/>
               </a:ext>
             </a:extLst>
           </p:cNvPr>
@@ -8578,7 +8578,7 @@
     </p:spTree>
     <p:extLst>
       <p:ext uri="{BB962C8B-B14F-4D97-AF65-F5344CB8AC3E}">
-        <p14:creationId xmlns:p14="http://schemas.microsoft.com/office/powerpoint/2010/main" val="1398457189"/>
+        <p14:creationId xmlns:p14="http://schemas.microsoft.com/office/powerpoint/2010/main" val="311266262"/>
       </p:ext>
     </p:extLst>
   </p:cSld>
@@ -8609,7 +8609,7 @@
           <p:cNvPr id="1" name="">
             <a:extLst xmlns:a="http://schemas.openxmlformats.org/drawingml/2006/main">
               <a:ext uri="{FF2B5EF4-FFF2-40B4-BE49-F238E27FC236}">
-                <a16:creationId xmlns:a16="http://schemas.microsoft.com/office/drawing/2014/main" id="{DC3365E4-CA14-4A99-A342-51ED7BD43529}"/>
+                <a16:creationId xmlns:a16="http://schemas.microsoft.com/office/drawing/2014/main" id="{6C27E36F-F38D-4210-984F-9472F7AD1297}"/>
               </a:ext>
             </a:extLst>
           </p:cNvPr>
@@ -8659,7 +8659,7 @@
           <p:cNvPr id="2" name="">
             <a:extLst xmlns:a="http://schemas.openxmlformats.org/drawingml/2006/main">
               <a:ext uri="{FF2B5EF4-FFF2-40B4-BE49-F238E27FC236}">
-                <a16:creationId xmlns:a16="http://schemas.microsoft.com/office/drawing/2014/main" id="{E2EFBB7A-FA3E-4325-A12B-DE9DA3CC6A90}"/>
+                <a16:creationId xmlns:a16="http://schemas.microsoft.com/office/drawing/2014/main" id="{5EDED3F5-9B56-49F9-AC91-3F3399927F70}"/>
               </a:ext>
             </a:extLst>
           </p:cNvPr>
@@ -8709,7 +8709,7 @@
           <p:cNvPr id="3" name="">
             <a:extLst xmlns:a="http://schemas.openxmlformats.org/drawingml/2006/main">
               <a:ext uri="{FF2B5EF4-FFF2-40B4-BE49-F238E27FC236}">
-                <a16:creationId xmlns:a16="http://schemas.microsoft.com/office/drawing/2014/main" id="{6C7AA24E-3C42-41E8-8178-8997A754D733}"/>
+                <a16:creationId xmlns:a16="http://schemas.microsoft.com/office/drawing/2014/main" id="{41401741-694C-4E08-8630-A01C95437DBF}"/>
               </a:ext>
             </a:extLst>
           </p:cNvPr>
@@ -8759,7 +8759,7 @@
           <p:cNvPr id="4" name="">
             <a:extLst xmlns:a="http://schemas.openxmlformats.org/drawingml/2006/main">
               <a:ext uri="{FF2B5EF4-FFF2-40B4-BE49-F238E27FC236}">
-                <a16:creationId xmlns:a16="http://schemas.microsoft.com/office/drawing/2014/main" id="{81CCF18A-6487-4A54-A981-33246B21DF65}"/>
+                <a16:creationId xmlns:a16="http://schemas.microsoft.com/office/drawing/2014/main" id="{DE277C2A-3B83-4B0C-8506-7E24C3C8D6DB}"/>
               </a:ext>
             </a:extLst>
           </p:cNvPr>
@@ -8790,7 +8790,7 @@
           <p:cNvPr id="5" name="">
             <a:extLst xmlns:a="http://schemas.openxmlformats.org/drawingml/2006/main">
               <a:ext uri="{FF2B5EF4-FFF2-40B4-BE49-F238E27FC236}">
-                <a16:creationId xmlns:a16="http://schemas.microsoft.com/office/drawing/2014/main" id="{D4BFE595-4B1A-4290-921B-275733A4097E}"/>
+                <a16:creationId xmlns:a16="http://schemas.microsoft.com/office/drawing/2014/main" id="{69721680-CBC6-4276-9997-1FB810E0C712}"/>
               </a:ext>
             </a:extLst>
           </p:cNvPr>
@@ -8846,7 +8846,7 @@
           <p:cNvPr id="6" name="">
             <a:extLst xmlns:a="http://schemas.openxmlformats.org/drawingml/2006/main">
               <a:ext uri="{FF2B5EF4-FFF2-40B4-BE49-F238E27FC236}">
-                <a16:creationId xmlns:a16="http://schemas.microsoft.com/office/drawing/2014/main" id="{8AB9D602-92C2-4E7F-8AE3-A89B199C2201}"/>
+                <a16:creationId xmlns:a16="http://schemas.microsoft.com/office/drawing/2014/main" id="{4835B537-8232-4B21-8BC2-B64E4668CBAB}"/>
               </a:ext>
             </a:extLst>
           </p:cNvPr>
@@ -8896,7 +8896,7 @@
           <p:cNvPr id="7" name="">
             <a:extLst xmlns:a="http://schemas.openxmlformats.org/drawingml/2006/main">
               <a:ext uri="{FF2B5EF4-FFF2-40B4-BE49-F238E27FC236}">
-                <a16:creationId xmlns:a16="http://schemas.microsoft.com/office/drawing/2014/main" id="{AFED1023-6589-439F-8005-1CB2DB611D49}"/>
+                <a16:creationId xmlns:a16="http://schemas.microsoft.com/office/drawing/2014/main" id="{FC6D1DBD-D2CD-489A-A588-721A84D8456B}"/>
               </a:ext>
             </a:extLst>
           </p:cNvPr>
@@ -8946,7 +8946,7 @@
           <p:cNvPr id="8" name="">
             <a:extLst xmlns:a="http://schemas.openxmlformats.org/drawingml/2006/main">
               <a:ext uri="{FF2B5EF4-FFF2-40B4-BE49-F238E27FC236}">
-                <a16:creationId xmlns:a16="http://schemas.microsoft.com/office/drawing/2014/main" id="{C47B63C3-54EF-4659-AA2C-27A958D37880}"/>
+                <a16:creationId xmlns:a16="http://schemas.microsoft.com/office/drawing/2014/main" id="{E3B0D2F4-7B41-421E-AA92-4737EC7479B8}"/>
               </a:ext>
             </a:extLst>
           </p:cNvPr>
@@ -8996,7 +8996,7 @@
           <p:cNvPr id="9" name="">
             <a:extLst xmlns:a="http://schemas.openxmlformats.org/drawingml/2006/main">
               <a:ext uri="{FF2B5EF4-FFF2-40B4-BE49-F238E27FC236}">
-                <a16:creationId xmlns:a16="http://schemas.microsoft.com/office/drawing/2014/main" id="{4A842521-ED9E-4C9D-922C-08637E3FF037}"/>
+                <a16:creationId xmlns:a16="http://schemas.microsoft.com/office/drawing/2014/main" id="{ED7D8682-F813-42A8-884D-A6809EB4945D}"/>
               </a:ext>
             </a:extLst>
           </p:cNvPr>
@@ -9052,7 +9052,7 @@
           <p:cNvPr id="10" name="">
             <a:extLst xmlns:a="http://schemas.openxmlformats.org/drawingml/2006/main">
               <a:ext uri="{FF2B5EF4-FFF2-40B4-BE49-F238E27FC236}">
-                <a16:creationId xmlns:a16="http://schemas.microsoft.com/office/drawing/2014/main" id="{1B379771-F7B9-42BC-A600-C5D9FB99BDA9}"/>
+                <a16:creationId xmlns:a16="http://schemas.microsoft.com/office/drawing/2014/main" id="{E9EE1080-3BC3-43CE-AE6D-0B140DF0B7C8}"/>
               </a:ext>
             </a:extLst>
           </p:cNvPr>
@@ -9102,7 +9102,7 @@
           <p:cNvPr id="11" name="">
             <a:extLst xmlns:a="http://schemas.openxmlformats.org/drawingml/2006/main">
               <a:ext uri="{FF2B5EF4-FFF2-40B4-BE49-F238E27FC236}">
-                <a16:creationId xmlns:a16="http://schemas.microsoft.com/office/drawing/2014/main" id="{902285C9-404F-40A1-B864-AABA19269A50}"/>
+                <a16:creationId xmlns:a16="http://schemas.microsoft.com/office/drawing/2014/main" id="{38BD5681-6465-465B-B8C5-AD012EEE3ABC}"/>
               </a:ext>
             </a:extLst>
           </p:cNvPr>
@@ -9152,7 +9152,7 @@
           <p:cNvPr id="12" name="">
             <a:extLst xmlns:a="http://schemas.openxmlformats.org/drawingml/2006/main">
               <a:ext uri="{FF2B5EF4-FFF2-40B4-BE49-F238E27FC236}">
-                <a16:creationId xmlns:a16="http://schemas.microsoft.com/office/drawing/2014/main" id="{7432E043-7BAF-4AB8-B59F-CEE5D3C523D1}"/>
+                <a16:creationId xmlns:a16="http://schemas.microsoft.com/office/drawing/2014/main" id="{50ECB8F5-4DEC-4EAD-9D26-0F3809F8CD04}"/>
               </a:ext>
             </a:extLst>
           </p:cNvPr>
@@ -9202,7 +9202,7 @@
           <p:cNvPr id="13" name="">
             <a:extLst xmlns:a="http://schemas.openxmlformats.org/drawingml/2006/main">
               <a:ext uri="{FF2B5EF4-FFF2-40B4-BE49-F238E27FC236}">
-                <a16:creationId xmlns:a16="http://schemas.microsoft.com/office/drawing/2014/main" id="{63D13F09-B8D4-4712-8A84-06C435D6DA40}"/>
+                <a16:creationId xmlns:a16="http://schemas.microsoft.com/office/drawing/2014/main" id="{E99329AA-4B93-4CA5-8F64-021611E58446}"/>
               </a:ext>
             </a:extLst>
           </p:cNvPr>
@@ -9258,7 +9258,7 @@
           <p:cNvPr id="14" name="">
             <a:extLst xmlns:a="http://schemas.openxmlformats.org/drawingml/2006/main">
               <a:ext uri="{FF2B5EF4-FFF2-40B4-BE49-F238E27FC236}">
-                <a16:creationId xmlns:a16="http://schemas.microsoft.com/office/drawing/2014/main" id="{288984C1-0CA4-4238-BE5D-75CB91402326}"/>
+                <a16:creationId xmlns:a16="http://schemas.microsoft.com/office/drawing/2014/main" id="{B80F5FC4-EC85-4ACE-BA07-2AB6C0FBB78F}"/>
               </a:ext>
             </a:extLst>
           </p:cNvPr>
@@ -9308,7 +9308,7 @@
           <p:cNvPr id="15" name="">
             <a:extLst xmlns:a="http://schemas.openxmlformats.org/drawingml/2006/main">
               <a:ext uri="{FF2B5EF4-FFF2-40B4-BE49-F238E27FC236}">
-                <a16:creationId xmlns:a16="http://schemas.microsoft.com/office/drawing/2014/main" id="{22AB4739-C3C4-4D80-84A6-C580D9FBA5D6}"/>
+                <a16:creationId xmlns:a16="http://schemas.microsoft.com/office/drawing/2014/main" id="{F0ECD3A3-2241-4F41-86B0-FFD668A76C43}"/>
               </a:ext>
             </a:extLst>
           </p:cNvPr>
@@ -9358,7 +9358,7 @@
           <p:cNvPr id="16" name="">
             <a:extLst xmlns:a="http://schemas.openxmlformats.org/drawingml/2006/main">
               <a:ext uri="{FF2B5EF4-FFF2-40B4-BE49-F238E27FC236}">
-                <a16:creationId xmlns:a16="http://schemas.microsoft.com/office/drawing/2014/main" id="{03A63CFA-442E-4B3C-9421-5A1EEF4AF4F2}"/>
+                <a16:creationId xmlns:a16="http://schemas.microsoft.com/office/drawing/2014/main" id="{ED201835-121B-4777-BE7A-9A3E0B7CC33E}"/>
               </a:ext>
             </a:extLst>
           </p:cNvPr>
@@ -9408,7 +9408,7 @@
           <p:cNvPr id="17" name="">
             <a:extLst xmlns:a="http://schemas.openxmlformats.org/drawingml/2006/main">
               <a:ext uri="{FF2B5EF4-FFF2-40B4-BE49-F238E27FC236}">
-                <a16:creationId xmlns:a16="http://schemas.microsoft.com/office/drawing/2014/main" id="{70F3E946-F7A6-4C2C-9F35-C24BDB2D4BF5}"/>
+                <a16:creationId xmlns:a16="http://schemas.microsoft.com/office/drawing/2014/main" id="{25A3C20F-19F5-4166-9A66-08BF7064873D}"/>
               </a:ext>
             </a:extLst>
           </p:cNvPr>
@@ -9464,7 +9464,7 @@
           <p:cNvPr id="18" name="">
             <a:extLst xmlns:a="http://schemas.openxmlformats.org/drawingml/2006/main">
               <a:ext uri="{FF2B5EF4-FFF2-40B4-BE49-F238E27FC236}">
-                <a16:creationId xmlns:a16="http://schemas.microsoft.com/office/drawing/2014/main" id="{9C1A23D1-0475-4BC4-B6EA-A8A564F2D937}"/>
+                <a16:creationId xmlns:a16="http://schemas.microsoft.com/office/drawing/2014/main" id="{849AB2B6-7F86-4C6B-B43A-22E07CBB0463}"/>
               </a:ext>
             </a:extLst>
           </p:cNvPr>
@@ -9514,7 +9514,7 @@
           <p:cNvPr id="19" name="">
             <a:extLst xmlns:a="http://schemas.openxmlformats.org/drawingml/2006/main">
               <a:ext uri="{FF2B5EF4-FFF2-40B4-BE49-F238E27FC236}">
-                <a16:creationId xmlns:a16="http://schemas.microsoft.com/office/drawing/2014/main" id="{62EBA8FE-FB4F-4EE2-8809-22B28114E15F}"/>
+                <a16:creationId xmlns:a16="http://schemas.microsoft.com/office/drawing/2014/main" id="{3047464C-FDC1-4900-B029-DA52E5D59ED3}"/>
               </a:ext>
             </a:extLst>
           </p:cNvPr>
@@ -9564,7 +9564,7 @@
           <p:cNvPr id="20" name="">
             <a:extLst xmlns:a="http://schemas.openxmlformats.org/drawingml/2006/main">
               <a:ext uri="{FF2B5EF4-FFF2-40B4-BE49-F238E27FC236}">
-                <a16:creationId xmlns:a16="http://schemas.microsoft.com/office/drawing/2014/main" id="{810A5695-7D19-4222-921B-4F314A6788D6}"/>
+                <a16:creationId xmlns:a16="http://schemas.microsoft.com/office/drawing/2014/main" id="{9F734770-FDEA-404B-9279-CAC46C7F6B1D}"/>
               </a:ext>
             </a:extLst>
           </p:cNvPr>
@@ -9614,7 +9614,7 @@
           <p:cNvPr id="21" name="">
             <a:extLst xmlns:a="http://schemas.openxmlformats.org/drawingml/2006/main">
               <a:ext uri="{FF2B5EF4-FFF2-40B4-BE49-F238E27FC236}">
-                <a16:creationId xmlns:a16="http://schemas.microsoft.com/office/drawing/2014/main" id="{8B3DD677-52B9-41EF-86F7-8373A64CBE02}"/>
+                <a16:creationId xmlns:a16="http://schemas.microsoft.com/office/drawing/2014/main" id="{6486C5C7-D26F-4789-9727-C4166A6ECA6D}"/>
               </a:ext>
             </a:extLst>
           </p:cNvPr>
@@ -9670,7 +9670,7 @@
           <p:cNvPr id="22" name="">
             <a:extLst xmlns:a="http://schemas.openxmlformats.org/drawingml/2006/main">
               <a:ext uri="{FF2B5EF4-FFF2-40B4-BE49-F238E27FC236}">
-                <a16:creationId xmlns:a16="http://schemas.microsoft.com/office/drawing/2014/main" id="{5FB189AC-9B5D-42D8-89A5-B1E435A5013A}"/>
+                <a16:creationId xmlns:a16="http://schemas.microsoft.com/office/drawing/2014/main" id="{3E3864B6-655A-4949-88D1-1D986316DAE6}"/>
               </a:ext>
             </a:extLst>
           </p:cNvPr>
@@ -9720,7 +9720,7 @@
           <p:cNvPr id="23" name="">
             <a:extLst xmlns:a="http://schemas.openxmlformats.org/drawingml/2006/main">
               <a:ext uri="{FF2B5EF4-FFF2-40B4-BE49-F238E27FC236}">
-                <a16:creationId xmlns:a16="http://schemas.microsoft.com/office/drawing/2014/main" id="{7EF6F298-27FD-4E00-A122-F721CD15C8F8}"/>
+                <a16:creationId xmlns:a16="http://schemas.microsoft.com/office/drawing/2014/main" id="{ACEEDE44-9EEF-40C9-8D94-7407B3EB4780}"/>
               </a:ext>
             </a:extLst>
           </p:cNvPr>
@@ -9770,7 +9770,7 @@
           <p:cNvPr id="24" name="">
             <a:extLst xmlns:a="http://schemas.openxmlformats.org/drawingml/2006/main">
               <a:ext uri="{FF2B5EF4-FFF2-40B4-BE49-F238E27FC236}">
-                <a16:creationId xmlns:a16="http://schemas.microsoft.com/office/drawing/2014/main" id="{8DF85DED-0A7C-4E10-A8E5-8706A1903356}"/>
+                <a16:creationId xmlns:a16="http://schemas.microsoft.com/office/drawing/2014/main" id="{BBC23C15-3186-4E6F-BF4D-0553027712B4}"/>
               </a:ext>
             </a:extLst>
           </p:cNvPr>
@@ -9801,7 +9801,7 @@
           <p:cNvPr id="25" name="">
             <a:extLst xmlns:a="http://schemas.openxmlformats.org/drawingml/2006/main">
               <a:ext uri="{FF2B5EF4-FFF2-40B4-BE49-F238E27FC236}">
-                <a16:creationId xmlns:a16="http://schemas.microsoft.com/office/drawing/2014/main" id="{E425A475-BA62-43EB-950A-D98FED8D7F0D}"/>
+                <a16:creationId xmlns:a16="http://schemas.microsoft.com/office/drawing/2014/main" id="{85CC6ACF-0615-45D5-B919-8AB5CDED0F71}"/>
               </a:ext>
             </a:extLst>
           </p:cNvPr>
@@ -9851,7 +9851,7 @@
           <p:cNvPr id="26" name="">
             <a:extLst xmlns:a="http://schemas.openxmlformats.org/drawingml/2006/main">
               <a:ext uri="{FF2B5EF4-FFF2-40B4-BE49-F238E27FC236}">
-                <a16:creationId xmlns:a16="http://schemas.microsoft.com/office/drawing/2014/main" id="{FC7C7993-C803-4067-BBB0-A92C25B8B2D0}"/>
+                <a16:creationId xmlns:a16="http://schemas.microsoft.com/office/drawing/2014/main" id="{B0EADEBC-084B-4F6A-816F-5785C0D005C5}"/>
               </a:ext>
             </a:extLst>
           </p:cNvPr>
@@ -9899,7 +9899,7 @@
     </p:spTree>
     <p:extLst>
       <p:ext uri="{BB962C8B-B14F-4D97-AF65-F5344CB8AC3E}">
-        <p14:creationId xmlns:p14="http://schemas.microsoft.com/office/powerpoint/2010/main" val="1137087871"/>
+        <p14:creationId xmlns:p14="http://schemas.microsoft.com/office/powerpoint/2010/main" val="2120029005"/>
       </p:ext>
     </p:extLst>
   </p:cSld>
@@ -9930,7 +9930,7 @@
           <p:cNvPr id="1" name="">
             <a:extLst xmlns:a="http://schemas.openxmlformats.org/drawingml/2006/main">
               <a:ext uri="{FF2B5EF4-FFF2-40B4-BE49-F238E27FC236}">
-                <a16:creationId xmlns:a16="http://schemas.microsoft.com/office/drawing/2014/main" id="{F4F52F33-04EA-4EA1-8A1C-FC03F662D3F4}"/>
+                <a16:creationId xmlns:a16="http://schemas.microsoft.com/office/drawing/2014/main" id="{59CF8C55-6080-4C5F-A257-A4826F8CBD6D}"/>
               </a:ext>
             </a:extLst>
           </p:cNvPr>
@@ -9980,7 +9980,7 @@
           <p:cNvPr id="2" name="">
             <a:extLst xmlns:a="http://schemas.openxmlformats.org/drawingml/2006/main">
               <a:ext uri="{FF2B5EF4-FFF2-40B4-BE49-F238E27FC236}">
-                <a16:creationId xmlns:a16="http://schemas.microsoft.com/office/drawing/2014/main" id="{D129DF40-EA56-4AE4-A331-63033384411A}"/>
+                <a16:creationId xmlns:a16="http://schemas.microsoft.com/office/drawing/2014/main" id="{9E132CDD-46E2-4238-9389-5A7C2F7B7774}"/>
               </a:ext>
             </a:extLst>
           </p:cNvPr>
@@ -10030,7 +10030,7 @@
           <p:cNvPr id="3" name="">
             <a:extLst xmlns:a="http://schemas.openxmlformats.org/drawingml/2006/main">
               <a:ext uri="{FF2B5EF4-FFF2-40B4-BE49-F238E27FC236}">
-                <a16:creationId xmlns:a16="http://schemas.microsoft.com/office/drawing/2014/main" id="{6454B820-D627-428F-9AAA-DA7344A05E94}"/>
+                <a16:creationId xmlns:a16="http://schemas.microsoft.com/office/drawing/2014/main" id="{82C09093-327A-4D53-96B3-4022EB71263D}"/>
               </a:ext>
             </a:extLst>
           </p:cNvPr>
@@ -10080,7 +10080,7 @@
           <p:cNvPr id="4" name="">
             <a:extLst xmlns:a="http://schemas.openxmlformats.org/drawingml/2006/main">
               <a:ext uri="{FF2B5EF4-FFF2-40B4-BE49-F238E27FC236}">
-                <a16:creationId xmlns:a16="http://schemas.microsoft.com/office/drawing/2014/main" id="{A5B9B81D-1F22-43C6-8E0A-A42BD8408A33}"/>
+                <a16:creationId xmlns:a16="http://schemas.microsoft.com/office/drawing/2014/main" id="{1FFD2E5B-B1D0-40B8-A474-BF44C10C4DDC}"/>
               </a:ext>
             </a:extLst>
           </p:cNvPr>
@@ -10111,7 +10111,7 @@
           <p:cNvPr id="5" name="">
             <a:extLst xmlns:a="http://schemas.openxmlformats.org/drawingml/2006/main">
               <a:ext uri="{FF2B5EF4-FFF2-40B4-BE49-F238E27FC236}">
-                <a16:creationId xmlns:a16="http://schemas.microsoft.com/office/drawing/2014/main" id="{3BAC4BB1-B4A1-46EE-AEB9-43996C0404C2}"/>
+                <a16:creationId xmlns:a16="http://schemas.microsoft.com/office/drawing/2014/main" id="{913D36B2-3D32-4F28-BEBE-32D63D0509CA}"/>
               </a:ext>
             </a:extLst>
           </p:cNvPr>
@@ -10167,7 +10167,7 @@
           <p:cNvPr id="6" name="">
             <a:extLst xmlns:a="http://schemas.openxmlformats.org/drawingml/2006/main">
               <a:ext uri="{FF2B5EF4-FFF2-40B4-BE49-F238E27FC236}">
-                <a16:creationId xmlns:a16="http://schemas.microsoft.com/office/drawing/2014/main" id="{01FBDF77-9EBC-424F-BED9-96B5992B4BB7}"/>
+                <a16:creationId xmlns:a16="http://schemas.microsoft.com/office/drawing/2014/main" id="{9586E7EA-4D2A-465E-A59B-10FC173978F2}"/>
               </a:ext>
             </a:extLst>
           </p:cNvPr>
@@ -10217,7 +10217,7 @@
           <p:cNvPr id="7" name="">
             <a:extLst xmlns:a="http://schemas.openxmlformats.org/drawingml/2006/main">
               <a:ext uri="{FF2B5EF4-FFF2-40B4-BE49-F238E27FC236}">
-                <a16:creationId xmlns:a16="http://schemas.microsoft.com/office/drawing/2014/main" id="{E021B8B2-41E4-4EA9-885B-150E3A0192FA}"/>
+                <a16:creationId xmlns:a16="http://schemas.microsoft.com/office/drawing/2014/main" id="{CC364378-5004-4896-874C-1AAD25D1BB35}"/>
               </a:ext>
             </a:extLst>
           </p:cNvPr>
@@ -10267,7 +10267,7 @@
           <p:cNvPr id="8" name="">
             <a:extLst xmlns:a="http://schemas.openxmlformats.org/drawingml/2006/main">
               <a:ext uri="{FF2B5EF4-FFF2-40B4-BE49-F238E27FC236}">
-                <a16:creationId xmlns:a16="http://schemas.microsoft.com/office/drawing/2014/main" id="{4359CD11-2BCA-4511-A479-BC6FDC5131BB}"/>
+                <a16:creationId xmlns:a16="http://schemas.microsoft.com/office/drawing/2014/main" id="{7D7CE453-A404-438E-A56F-594AD42737EC}"/>
               </a:ext>
             </a:extLst>
           </p:cNvPr>
@@ -10317,7 +10317,7 @@
           <p:cNvPr id="9" name="">
             <a:extLst xmlns:a="http://schemas.openxmlformats.org/drawingml/2006/main">
               <a:ext uri="{FF2B5EF4-FFF2-40B4-BE49-F238E27FC236}">
-                <a16:creationId xmlns:a16="http://schemas.microsoft.com/office/drawing/2014/main" id="{19CF9446-6BCF-4E06-823F-05153B23C184}"/>
+                <a16:creationId xmlns:a16="http://schemas.microsoft.com/office/drawing/2014/main" id="{22DC3B33-0BAF-4CC3-AADB-00533278DFEB}"/>
               </a:ext>
             </a:extLst>
           </p:cNvPr>
@@ -10373,7 +10373,7 @@
           <p:cNvPr id="10" name="">
             <a:extLst xmlns:a="http://schemas.openxmlformats.org/drawingml/2006/main">
               <a:ext uri="{FF2B5EF4-FFF2-40B4-BE49-F238E27FC236}">
-                <a16:creationId xmlns:a16="http://schemas.microsoft.com/office/drawing/2014/main" id="{38940E17-32FF-42C6-AD81-72388CC0618C}"/>
+                <a16:creationId xmlns:a16="http://schemas.microsoft.com/office/drawing/2014/main" id="{9DFC9475-F2CE-4C46-A0F9-B249EB07815F}"/>
               </a:ext>
             </a:extLst>
           </p:cNvPr>
@@ -10423,7 +10423,7 @@
           <p:cNvPr id="11" name="">
             <a:extLst xmlns:a="http://schemas.openxmlformats.org/drawingml/2006/main">
               <a:ext uri="{FF2B5EF4-FFF2-40B4-BE49-F238E27FC236}">
-                <a16:creationId xmlns:a16="http://schemas.microsoft.com/office/drawing/2014/main" id="{926283AB-F886-4CF1-8011-ED6183ACC720}"/>
+                <a16:creationId xmlns:a16="http://schemas.microsoft.com/office/drawing/2014/main" id="{562139DE-C58F-4D61-B891-CA8E96BBE698}"/>
               </a:ext>
             </a:extLst>
           </p:cNvPr>
@@ -10473,7 +10473,7 @@
           <p:cNvPr id="12" name="">
             <a:extLst xmlns:a="http://schemas.openxmlformats.org/drawingml/2006/main">
               <a:ext uri="{FF2B5EF4-FFF2-40B4-BE49-F238E27FC236}">
-                <a16:creationId xmlns:a16="http://schemas.microsoft.com/office/drawing/2014/main" id="{F1297759-F340-45B8-8343-C38E78402300}"/>
+                <a16:creationId xmlns:a16="http://schemas.microsoft.com/office/drawing/2014/main" id="{BDBA9362-8DBB-45B6-B4BD-CB9D32F1BC2A}"/>
               </a:ext>
             </a:extLst>
           </p:cNvPr>
@@ -10523,7 +10523,7 @@
           <p:cNvPr id="13" name="">
             <a:extLst xmlns:a="http://schemas.openxmlformats.org/drawingml/2006/main">
               <a:ext uri="{FF2B5EF4-FFF2-40B4-BE49-F238E27FC236}">
-                <a16:creationId xmlns:a16="http://schemas.microsoft.com/office/drawing/2014/main" id="{1E4E31A6-F621-45BB-8BD2-01C41E059CA3}"/>
+                <a16:creationId xmlns:a16="http://schemas.microsoft.com/office/drawing/2014/main" id="{15AFEDDA-63C9-4FED-B407-C2791F893AC9}"/>
               </a:ext>
             </a:extLst>
           </p:cNvPr>
@@ -10579,7 +10579,7 @@
           <p:cNvPr id="14" name="">
             <a:extLst xmlns:a="http://schemas.openxmlformats.org/drawingml/2006/main">
               <a:ext uri="{FF2B5EF4-FFF2-40B4-BE49-F238E27FC236}">
-                <a16:creationId xmlns:a16="http://schemas.microsoft.com/office/drawing/2014/main" id="{542880FA-B972-4A41-AAF7-D68661FB8C73}"/>
+                <a16:creationId xmlns:a16="http://schemas.microsoft.com/office/drawing/2014/main" id="{DFD88349-298A-47A2-AF8C-7D149145DC6E}"/>
               </a:ext>
             </a:extLst>
           </p:cNvPr>
@@ -10629,7 +10629,7 @@
           <p:cNvPr id="15" name="">
             <a:extLst xmlns:a="http://schemas.openxmlformats.org/drawingml/2006/main">
               <a:ext uri="{FF2B5EF4-FFF2-40B4-BE49-F238E27FC236}">
-                <a16:creationId xmlns:a16="http://schemas.microsoft.com/office/drawing/2014/main" id="{18862897-79C3-41A9-A0F6-798A5FB9F5CA}"/>
+                <a16:creationId xmlns:a16="http://schemas.microsoft.com/office/drawing/2014/main" id="{BB1D8ED1-8A5A-4360-B980-0DBB3100B6A8}"/>
               </a:ext>
             </a:extLst>
           </p:cNvPr>
@@ -10679,7 +10679,7 @@
           <p:cNvPr id="16" name="">
             <a:extLst xmlns:a="http://schemas.openxmlformats.org/drawingml/2006/main">
               <a:ext uri="{FF2B5EF4-FFF2-40B4-BE49-F238E27FC236}">
-                <a16:creationId xmlns:a16="http://schemas.microsoft.com/office/drawing/2014/main" id="{E7213CDC-BE40-4FA1-957A-B681252A085F}"/>
+                <a16:creationId xmlns:a16="http://schemas.microsoft.com/office/drawing/2014/main" id="{E3D4EBD1-B6E7-49E7-B739-61D38A39AA57}"/>
               </a:ext>
             </a:extLst>
           </p:cNvPr>
@@ -10729,7 +10729,7 @@
           <p:cNvPr id="17" name="">
             <a:extLst xmlns:a="http://schemas.openxmlformats.org/drawingml/2006/main">
               <a:ext uri="{FF2B5EF4-FFF2-40B4-BE49-F238E27FC236}">
-                <a16:creationId xmlns:a16="http://schemas.microsoft.com/office/drawing/2014/main" id="{F6E9FA26-02DE-4C23-B6F6-8B308D33CEED}"/>
+                <a16:creationId xmlns:a16="http://schemas.microsoft.com/office/drawing/2014/main" id="{0B7A7342-D6AC-4859-876E-A9BFD8DD005A}"/>
               </a:ext>
             </a:extLst>
           </p:cNvPr>
@@ -10785,7 +10785,7 @@
           <p:cNvPr id="18" name="">
             <a:extLst xmlns:a="http://schemas.openxmlformats.org/drawingml/2006/main">
               <a:ext uri="{FF2B5EF4-FFF2-40B4-BE49-F238E27FC236}">
-                <a16:creationId xmlns:a16="http://schemas.microsoft.com/office/drawing/2014/main" id="{E0190966-FCF2-4853-B557-7B6CA6091607}"/>
+                <a16:creationId xmlns:a16="http://schemas.microsoft.com/office/drawing/2014/main" id="{8E4D5EF8-0A8E-40C6-BA59-80531B77FC95}"/>
               </a:ext>
             </a:extLst>
           </p:cNvPr>
@@ -10835,7 +10835,7 @@
           <p:cNvPr id="19" name="">
             <a:extLst xmlns:a="http://schemas.openxmlformats.org/drawingml/2006/main">
               <a:ext uri="{FF2B5EF4-FFF2-40B4-BE49-F238E27FC236}">
-                <a16:creationId xmlns:a16="http://schemas.microsoft.com/office/drawing/2014/main" id="{569D620D-E1B3-4747-900F-C5ECE5D19B82}"/>
+                <a16:creationId xmlns:a16="http://schemas.microsoft.com/office/drawing/2014/main" id="{53263542-D94F-4417-9B63-EE46844099B8}"/>
               </a:ext>
             </a:extLst>
           </p:cNvPr>
@@ -10885,7 +10885,7 @@
           <p:cNvPr id="20" name="">
             <a:extLst xmlns:a="http://schemas.openxmlformats.org/drawingml/2006/main">
               <a:ext uri="{FF2B5EF4-FFF2-40B4-BE49-F238E27FC236}">
-                <a16:creationId xmlns:a16="http://schemas.microsoft.com/office/drawing/2014/main" id="{910A063F-D784-4F60-85CC-F8BF0D4751F7}"/>
+                <a16:creationId xmlns:a16="http://schemas.microsoft.com/office/drawing/2014/main" id="{66438CAA-A002-4FA6-B94D-A23D54C9A461}"/>
               </a:ext>
             </a:extLst>
           </p:cNvPr>
@@ -10916,7 +10916,7 @@
           <p:cNvPr id="21" name="">
             <a:extLst xmlns:a="http://schemas.openxmlformats.org/drawingml/2006/main">
               <a:ext uri="{FF2B5EF4-FFF2-40B4-BE49-F238E27FC236}">
-                <a16:creationId xmlns:a16="http://schemas.microsoft.com/office/drawing/2014/main" id="{169B5B54-3288-47B3-AC83-803B4E848C4B}"/>
+                <a16:creationId xmlns:a16="http://schemas.microsoft.com/office/drawing/2014/main" id="{30F895DB-98DA-46DA-8E83-85450C96F503}"/>
               </a:ext>
             </a:extLst>
           </p:cNvPr>
@@ -10966,7 +10966,7 @@
           <p:cNvPr id="22" name="">
             <a:extLst xmlns:a="http://schemas.openxmlformats.org/drawingml/2006/main">
               <a:ext uri="{FF2B5EF4-FFF2-40B4-BE49-F238E27FC236}">
-                <a16:creationId xmlns:a16="http://schemas.microsoft.com/office/drawing/2014/main" id="{D35BA64B-F657-40AA-A871-E49CB2D26AD1}"/>
+                <a16:creationId xmlns:a16="http://schemas.microsoft.com/office/drawing/2014/main" id="{DE01CAB8-735A-456B-B24B-5F1669267FBC}"/>
               </a:ext>
             </a:extLst>
           </p:cNvPr>
@@ -11014,7 +11014,7 @@
     </p:spTree>
     <p:extLst>
       <p:ext uri="{BB962C8B-B14F-4D97-AF65-F5344CB8AC3E}">
-        <p14:creationId xmlns:p14="http://schemas.microsoft.com/office/powerpoint/2010/main" val="1853739516"/>
+        <p14:creationId xmlns:p14="http://schemas.microsoft.com/office/powerpoint/2010/main" val="462086894"/>
       </p:ext>
     </p:extLst>
   </p:cSld>
@@ -11045,7 +11045,7 @@
           <p:cNvPr id="1" name="">
             <a:extLst xmlns:a="http://schemas.openxmlformats.org/drawingml/2006/main">
               <a:ext uri="{FF2B5EF4-FFF2-40B4-BE49-F238E27FC236}">
-                <a16:creationId xmlns:a16="http://schemas.microsoft.com/office/drawing/2014/main" id="{75AB03CD-A280-480A-8700-F04BAABBB657}"/>
+                <a16:creationId xmlns:a16="http://schemas.microsoft.com/office/drawing/2014/main" id="{A42EEC0F-E1BB-492F-B022-8DE410C6B0CB}"/>
               </a:ext>
             </a:extLst>
           </p:cNvPr>
@@ -11095,7 +11095,7 @@
           <p:cNvPr id="2" name="">
             <a:extLst xmlns:a="http://schemas.openxmlformats.org/drawingml/2006/main">
               <a:ext uri="{FF2B5EF4-FFF2-40B4-BE49-F238E27FC236}">
-                <a16:creationId xmlns:a16="http://schemas.microsoft.com/office/drawing/2014/main" id="{2E992145-51B1-49B9-BD75-EF9A79F547DD}"/>
+                <a16:creationId xmlns:a16="http://schemas.microsoft.com/office/drawing/2014/main" id="{31A2C9BF-57B4-4CBF-8362-E9FA9187DF72}"/>
               </a:ext>
             </a:extLst>
           </p:cNvPr>
@@ -11145,7 +11145,7 @@
           <p:cNvPr id="3" name="">
             <a:extLst xmlns:a="http://schemas.openxmlformats.org/drawingml/2006/main">
               <a:ext uri="{FF2B5EF4-FFF2-40B4-BE49-F238E27FC236}">
-                <a16:creationId xmlns:a16="http://schemas.microsoft.com/office/drawing/2014/main" id="{81BD2715-CF47-41E1-9C38-4931820E8EFB}"/>
+                <a16:creationId xmlns:a16="http://schemas.microsoft.com/office/drawing/2014/main" id="{E1E991DB-F7BA-4F8B-A2A7-A77F0B4E7218}"/>
               </a:ext>
             </a:extLst>
           </p:cNvPr>
@@ -11195,7 +11195,7 @@
           <p:cNvPr id="4" name="">
             <a:extLst xmlns:a="http://schemas.openxmlformats.org/drawingml/2006/main">
               <a:ext uri="{FF2B5EF4-FFF2-40B4-BE49-F238E27FC236}">
-                <a16:creationId xmlns:a16="http://schemas.microsoft.com/office/drawing/2014/main" id="{FC257705-E7C7-459D-AE85-1DD5A2235A36}"/>
+                <a16:creationId xmlns:a16="http://schemas.microsoft.com/office/drawing/2014/main" id="{BE205768-6EC0-4AB2-AF16-FF2450BCAA70}"/>
               </a:ext>
             </a:extLst>
           </p:cNvPr>
@@ -11226,7 +11226,7 @@
           <p:cNvPr id="5" name="">
             <a:extLst xmlns:a="http://schemas.openxmlformats.org/drawingml/2006/main">
               <a:ext uri="{FF2B5EF4-FFF2-40B4-BE49-F238E27FC236}">
-                <a16:creationId xmlns:a16="http://schemas.microsoft.com/office/drawing/2014/main" id="{6DC5DA66-0976-4431-963A-261C3AD8D55B}"/>
+                <a16:creationId xmlns:a16="http://schemas.microsoft.com/office/drawing/2014/main" id="{26253590-DD0D-43F3-BE75-CD29277192D6}"/>
               </a:ext>
             </a:extLst>
           </p:cNvPr>
@@ -11282,7 +11282,7 @@
           <p:cNvPr id="6" name="">
             <a:extLst xmlns:a="http://schemas.openxmlformats.org/drawingml/2006/main">
               <a:ext uri="{FF2B5EF4-FFF2-40B4-BE49-F238E27FC236}">
-                <a16:creationId xmlns:a16="http://schemas.microsoft.com/office/drawing/2014/main" id="{469BD754-CBAC-4B1D-BA0C-FDC2287CED85}"/>
+                <a16:creationId xmlns:a16="http://schemas.microsoft.com/office/drawing/2014/main" id="{466E7445-0731-4C26-B81C-609D03C88659}"/>
               </a:ext>
             </a:extLst>
           </p:cNvPr>
@@ -11338,7 +11338,7 @@
           <p:cNvPr id="7" name="">
             <a:extLst xmlns:a="http://schemas.openxmlformats.org/drawingml/2006/main">
               <a:ext uri="{FF2B5EF4-FFF2-40B4-BE49-F238E27FC236}">
-                <a16:creationId xmlns:a16="http://schemas.microsoft.com/office/drawing/2014/main" id="{C749498B-9E13-4711-9DE1-D6DCD65AA9F4}"/>
+                <a16:creationId xmlns:a16="http://schemas.microsoft.com/office/drawing/2014/main" id="{3AC49653-A009-49D8-8552-B0E1733E73DE}"/>
               </a:ext>
             </a:extLst>
           </p:cNvPr>
@@ -11394,7 +11394,7 @@
           <p:cNvPr id="8" name="">
             <a:extLst xmlns:a="http://schemas.openxmlformats.org/drawingml/2006/main">
               <a:ext uri="{FF2B5EF4-FFF2-40B4-BE49-F238E27FC236}">
-                <a16:creationId xmlns:a16="http://schemas.microsoft.com/office/drawing/2014/main" id="{D40A4D4F-8112-455F-BBD9-C449BC85DDAB}"/>
+                <a16:creationId xmlns:a16="http://schemas.microsoft.com/office/drawing/2014/main" id="{B14AFBCC-F367-42D7-82B1-9C2197297EDA}"/>
               </a:ext>
             </a:extLst>
           </p:cNvPr>
@@ -11450,7 +11450,7 @@
           <p:cNvPr id="9" name="">
             <a:extLst xmlns:a="http://schemas.openxmlformats.org/drawingml/2006/main">
               <a:ext uri="{FF2B5EF4-FFF2-40B4-BE49-F238E27FC236}">
-                <a16:creationId xmlns:a16="http://schemas.microsoft.com/office/drawing/2014/main" id="{1B6BE4DB-8023-48F1-9EA8-56C93AD96169}"/>
+                <a16:creationId xmlns:a16="http://schemas.microsoft.com/office/drawing/2014/main" id="{4FA3978C-AE5E-4467-9021-48A63FF7956B}"/>
               </a:ext>
             </a:extLst>
           </p:cNvPr>
@@ -11506,7 +11506,7 @@
           <p:cNvPr id="10" name="">
             <a:extLst xmlns:a="http://schemas.openxmlformats.org/drawingml/2006/main">
               <a:ext uri="{FF2B5EF4-FFF2-40B4-BE49-F238E27FC236}">
-                <a16:creationId xmlns:a16="http://schemas.microsoft.com/office/drawing/2014/main" id="{8BD36572-0900-4322-836C-542CD3FD10B8}"/>
+                <a16:creationId xmlns:a16="http://schemas.microsoft.com/office/drawing/2014/main" id="{A06693EF-54E2-40A4-80D9-311E5EF43519}"/>
               </a:ext>
             </a:extLst>
           </p:cNvPr>
@@ -11562,7 +11562,7 @@
           <p:cNvPr id="11" name="">
             <a:extLst xmlns:a="http://schemas.openxmlformats.org/drawingml/2006/main">
               <a:ext uri="{FF2B5EF4-FFF2-40B4-BE49-F238E27FC236}">
-                <a16:creationId xmlns:a16="http://schemas.microsoft.com/office/drawing/2014/main" id="{EC79A09D-50B6-460E-8E90-59398ACA5603}"/>
+                <a16:creationId xmlns:a16="http://schemas.microsoft.com/office/drawing/2014/main" id="{2FDA73F3-20C6-4FFD-A9EE-EBE549C83581}"/>
               </a:ext>
             </a:extLst>
           </p:cNvPr>
@@ -11618,7 +11618,7 @@
           <p:cNvPr id="12" name="">
             <a:extLst xmlns:a="http://schemas.openxmlformats.org/drawingml/2006/main">
               <a:ext uri="{FF2B5EF4-FFF2-40B4-BE49-F238E27FC236}">
-                <a16:creationId xmlns:a16="http://schemas.microsoft.com/office/drawing/2014/main" id="{8C413AEB-6DBB-4F30-88E0-8915158413F5}"/>
+                <a16:creationId xmlns:a16="http://schemas.microsoft.com/office/drawing/2014/main" id="{07CF5BD0-83E4-454F-84ED-7C98DEA81EA9}"/>
               </a:ext>
             </a:extLst>
           </p:cNvPr>
@@ -11674,7 +11674,7 @@
           <p:cNvPr id="13" name="">
             <a:extLst xmlns:a="http://schemas.openxmlformats.org/drawingml/2006/main">
               <a:ext uri="{FF2B5EF4-FFF2-40B4-BE49-F238E27FC236}">
-                <a16:creationId xmlns:a16="http://schemas.microsoft.com/office/drawing/2014/main" id="{307EF48E-70BE-4BA8-843D-E58D411485EA}"/>
+                <a16:creationId xmlns:a16="http://schemas.microsoft.com/office/drawing/2014/main" id="{43A65529-2F91-4516-8692-271A2FBBD211}"/>
               </a:ext>
             </a:extLst>
           </p:cNvPr>
@@ -11730,7 +11730,7 @@
           <p:cNvPr id="14" name="">
             <a:extLst xmlns:a="http://schemas.openxmlformats.org/drawingml/2006/main">
               <a:ext uri="{FF2B5EF4-FFF2-40B4-BE49-F238E27FC236}">
-                <a16:creationId xmlns:a16="http://schemas.microsoft.com/office/drawing/2014/main" id="{C5B3DA3E-D943-4E9E-A43F-103E2A7050F8}"/>
+                <a16:creationId xmlns:a16="http://schemas.microsoft.com/office/drawing/2014/main" id="{BBC5AA40-D6CE-4703-A9AB-4BB99545F99B}"/>
               </a:ext>
             </a:extLst>
           </p:cNvPr>
@@ -11786,7 +11786,7 @@
           <p:cNvPr id="15" name="">
             <a:extLst xmlns:a="http://schemas.openxmlformats.org/drawingml/2006/main">
               <a:ext uri="{FF2B5EF4-FFF2-40B4-BE49-F238E27FC236}">
-                <a16:creationId xmlns:a16="http://schemas.microsoft.com/office/drawing/2014/main" id="{326F60B0-B96E-418A-A950-8DCC256A2444}"/>
+                <a16:creationId xmlns:a16="http://schemas.microsoft.com/office/drawing/2014/main" id="{E8A5365D-E15E-4B89-B466-9D9A903B8D24}"/>
               </a:ext>
             </a:extLst>
           </p:cNvPr>
@@ -11842,7 +11842,7 @@
           <p:cNvPr id="16" name="">
             <a:extLst xmlns:a="http://schemas.openxmlformats.org/drawingml/2006/main">
               <a:ext uri="{FF2B5EF4-FFF2-40B4-BE49-F238E27FC236}">
-                <a16:creationId xmlns:a16="http://schemas.microsoft.com/office/drawing/2014/main" id="{6ED0E840-938E-43CF-9D76-15463C79792B}"/>
+                <a16:creationId xmlns:a16="http://schemas.microsoft.com/office/drawing/2014/main" id="{537C892F-BBCD-4808-9495-D46CD441A95F}"/>
               </a:ext>
             </a:extLst>
           </p:cNvPr>
@@ -11898,7 +11898,7 @@
           <p:cNvPr id="17" name="">
             <a:extLst xmlns:a="http://schemas.openxmlformats.org/drawingml/2006/main">
               <a:ext uri="{FF2B5EF4-FFF2-40B4-BE49-F238E27FC236}">
-                <a16:creationId xmlns:a16="http://schemas.microsoft.com/office/drawing/2014/main" id="{76638FA1-F1CB-4F35-8202-635049CC071C}"/>
+                <a16:creationId xmlns:a16="http://schemas.microsoft.com/office/drawing/2014/main" id="{F7315257-FF31-4EE9-B906-CD07584FA406}"/>
               </a:ext>
             </a:extLst>
           </p:cNvPr>
@@ -11954,7 +11954,7 @@
           <p:cNvPr id="18" name="">
             <a:extLst xmlns:a="http://schemas.openxmlformats.org/drawingml/2006/main">
               <a:ext uri="{FF2B5EF4-FFF2-40B4-BE49-F238E27FC236}">
-                <a16:creationId xmlns:a16="http://schemas.microsoft.com/office/drawing/2014/main" id="{1EC94E40-830A-44B5-965E-FA708BFA5E0C}"/>
+                <a16:creationId xmlns:a16="http://schemas.microsoft.com/office/drawing/2014/main" id="{5D95003B-AA37-4A0F-8849-6E0757BC69F1}"/>
               </a:ext>
             </a:extLst>
           </p:cNvPr>
@@ -12010,7 +12010,7 @@
           <p:cNvPr id="19" name="">
             <a:extLst xmlns:a="http://schemas.openxmlformats.org/drawingml/2006/main">
               <a:ext uri="{FF2B5EF4-FFF2-40B4-BE49-F238E27FC236}">
-                <a16:creationId xmlns:a16="http://schemas.microsoft.com/office/drawing/2014/main" id="{76376178-8D45-4C91-BA83-E5EBBF0BDDD3}"/>
+                <a16:creationId xmlns:a16="http://schemas.microsoft.com/office/drawing/2014/main" id="{FC89CF20-4A85-42A9-A3DE-10C2306BD94A}"/>
               </a:ext>
             </a:extLst>
           </p:cNvPr>
@@ -12066,7 +12066,7 @@
           <p:cNvPr id="20" name="">
             <a:extLst xmlns:a="http://schemas.openxmlformats.org/drawingml/2006/main">
               <a:ext uri="{FF2B5EF4-FFF2-40B4-BE49-F238E27FC236}">
-                <a16:creationId xmlns:a16="http://schemas.microsoft.com/office/drawing/2014/main" id="{EF5D17BF-8377-441C-8665-D89C155BBA56}"/>
+                <a16:creationId xmlns:a16="http://schemas.microsoft.com/office/drawing/2014/main" id="{C91A687A-6926-4685-834A-1E045CF8EC86}"/>
               </a:ext>
             </a:extLst>
           </p:cNvPr>
@@ -12122,7 +12122,7 @@
           <p:cNvPr id="21" name="">
             <a:extLst xmlns:a="http://schemas.openxmlformats.org/drawingml/2006/main">
               <a:ext uri="{FF2B5EF4-FFF2-40B4-BE49-F238E27FC236}">
-                <a16:creationId xmlns:a16="http://schemas.microsoft.com/office/drawing/2014/main" id="{4C57D73E-826C-4E60-93EB-6C631BCC3212}"/>
+                <a16:creationId xmlns:a16="http://schemas.microsoft.com/office/drawing/2014/main" id="{611832BD-5D89-420B-BED5-4A79F4738583}"/>
               </a:ext>
             </a:extLst>
           </p:cNvPr>
@@ -12178,7 +12178,7 @@
           <p:cNvPr id="22" name="">
             <a:extLst xmlns:a="http://schemas.openxmlformats.org/drawingml/2006/main">
               <a:ext uri="{FF2B5EF4-FFF2-40B4-BE49-F238E27FC236}">
-                <a16:creationId xmlns:a16="http://schemas.microsoft.com/office/drawing/2014/main" id="{756BAFFF-2AC5-4EB8-92E6-EFBBC606D096}"/>
+                <a16:creationId xmlns:a16="http://schemas.microsoft.com/office/drawing/2014/main" id="{ECC67C51-FF40-4B28-9E5A-5A39278E0127}"/>
               </a:ext>
             </a:extLst>
           </p:cNvPr>
@@ -12234,7 +12234,7 @@
           <p:cNvPr id="23" name="">
             <a:extLst xmlns:a="http://schemas.openxmlformats.org/drawingml/2006/main">
               <a:ext uri="{FF2B5EF4-FFF2-40B4-BE49-F238E27FC236}">
-                <a16:creationId xmlns:a16="http://schemas.microsoft.com/office/drawing/2014/main" id="{3F4F5DDE-CC48-4058-8C7A-DC400A2273D3}"/>
+                <a16:creationId xmlns:a16="http://schemas.microsoft.com/office/drawing/2014/main" id="{E216934C-AFBB-43EE-9269-BE48F14AB632}"/>
               </a:ext>
             </a:extLst>
           </p:cNvPr>
@@ -12290,7 +12290,7 @@
           <p:cNvPr id="24" name="">
             <a:extLst xmlns:a="http://schemas.openxmlformats.org/drawingml/2006/main">
               <a:ext uri="{FF2B5EF4-FFF2-40B4-BE49-F238E27FC236}">
-                <a16:creationId xmlns:a16="http://schemas.microsoft.com/office/drawing/2014/main" id="{E2BDB4E7-2BA3-48DE-9D44-27C763D0625A}"/>
+                <a16:creationId xmlns:a16="http://schemas.microsoft.com/office/drawing/2014/main" id="{686B6FDF-6F8C-4A2B-9C18-53E6CDD03F05}"/>
               </a:ext>
             </a:extLst>
           </p:cNvPr>
@@ -12346,7 +12346,7 @@
           <p:cNvPr id="25" name="">
             <a:extLst xmlns:a="http://schemas.openxmlformats.org/drawingml/2006/main">
               <a:ext uri="{FF2B5EF4-FFF2-40B4-BE49-F238E27FC236}">
-                <a16:creationId xmlns:a16="http://schemas.microsoft.com/office/drawing/2014/main" id="{85E0991A-EC30-4471-ADE9-E3284631666E}"/>
+                <a16:creationId xmlns:a16="http://schemas.microsoft.com/office/drawing/2014/main" id="{4C8D2F94-F383-4946-B12F-FD92E5C22991}"/>
               </a:ext>
             </a:extLst>
           </p:cNvPr>
@@ -12377,7 +12377,7 @@
           <p:cNvPr id="26" name="">
             <a:extLst xmlns:a="http://schemas.openxmlformats.org/drawingml/2006/main">
               <a:ext uri="{FF2B5EF4-FFF2-40B4-BE49-F238E27FC236}">
-                <a16:creationId xmlns:a16="http://schemas.microsoft.com/office/drawing/2014/main" id="{D5DD9C77-0D3C-4A13-A731-2C4926038BEF}"/>
+                <a16:creationId xmlns:a16="http://schemas.microsoft.com/office/drawing/2014/main" id="{3DA75A58-68E7-4E16-AF2E-51C31B191703}"/>
               </a:ext>
             </a:extLst>
           </p:cNvPr>
@@ -12427,7 +12427,7 @@
           <p:cNvPr id="27" name="">
             <a:extLst xmlns:a="http://schemas.openxmlformats.org/drawingml/2006/main">
               <a:ext uri="{FF2B5EF4-FFF2-40B4-BE49-F238E27FC236}">
-                <a16:creationId xmlns:a16="http://schemas.microsoft.com/office/drawing/2014/main" id="{D03C2B47-1407-42C9-B779-FC18006631D4}"/>
+                <a16:creationId xmlns:a16="http://schemas.microsoft.com/office/drawing/2014/main" id="{269FE375-0F09-429D-8E77-9D974BB023EA}"/>
               </a:ext>
             </a:extLst>
           </p:cNvPr>
@@ -12475,7 +12475,7 @@
     </p:spTree>
     <p:extLst>
       <p:ext uri="{BB962C8B-B14F-4D97-AF65-F5344CB8AC3E}">
-        <p14:creationId xmlns:p14="http://schemas.microsoft.com/office/powerpoint/2010/main" val="632656655"/>
+        <p14:creationId xmlns:p14="http://schemas.microsoft.com/office/powerpoint/2010/main" val="169573855"/>
       </p:ext>
     </p:extLst>
   </p:cSld>

--- a/products/shopify-collective/shopify-collective-architecture.pptx
+++ b/products/shopify-collective/shopify-collective-architecture.pptx
@@ -2713,6 +2713,106 @@
       </p:sp>
       <p:sp>
         <p:nvSpPr>
+          <p:cNvPr id="16" name="">
+            <a:extLst xmlns:a="http://schemas.openxmlformats.org/drawingml/2006/main">
+              <a:ext uri="{FF2B5EF4-FFF2-40B4-BE49-F238E27FC236}">
+                <a16:creationId xmlns:a16="http://schemas.microsoft.com/office/drawing/2014/main" id="{AB855AF5-5908-4744-893A-4CEF2BD88AB5}"/>
+              </a:ext>
+            </a:extLst>
+          </p:cNvPr>
+          <p:cNvSpPr>
+            <a:spLocks xmlns:a="http://schemas.openxmlformats.org/drawingml/2006/main" noGrp="1"/>
+          </p:cNvSpPr>
+          <p:nvPr/>
+        </p:nvSpPr>
+        <p:spPr>
+          <a:xfrm xmlns:a="http://schemas.openxmlformats.org/drawingml/2006/main">
+            <a:off x="609600" y="5010150"/>
+            <a:ext cx="10972800" cy="361950"/>
+          </a:xfrm>
+          <a:prstGeom xmlns:a="http://schemas.openxmlformats.org/drawingml/2006/main" prst="rect">
+            <a:avLst/>
+          </a:prstGeom>
+          <a:noFill xmlns:a="http://schemas.openxmlformats.org/drawingml/2006/main"/>
+          <a:ln xmlns:a="http://schemas.openxmlformats.org/drawingml/2006/main" w="0">
+            <a:noFill/>
+            <a:prstDash val="solid"/>
+          </a:ln>
+        </p:spPr>
+        <p:txBody>
+          <a:bodyPr xmlns:a="http://schemas.openxmlformats.org/drawingml/2006/main"/>
+          <a:lstStyle xmlns:a="http://schemas.openxmlformats.org/drawingml/2006/main"/>
+          <a:p xmlns:a="http://schemas.openxmlformats.org/drawingml/2006/main">
+            <a:pPr algn="l">
+              <a:defRPr sz="1350" b="1">
+                <a:solidFill>
+                  <a:srgbClr val="004C3F"/>
+                </a:solidFill>
+              </a:defRPr>
+            </a:pPr>
+            <a:r>
+              <a:rPr sz="1350" b="1">
+                <a:solidFill>
+                  <a:srgbClr val="004C3F"/>
+                </a:solidFill>
+              </a:rPr>
+              <a:t>What changes if payment is not handled through Shopify Payments?</a:t>
+            </a:r>
+          </a:p>
+        </p:txBody>
+      </p:sp>
+      <p:sp>
+        <p:nvSpPr>
+          <p:cNvPr id="17" name="">
+            <a:extLst xmlns:a="http://schemas.openxmlformats.org/drawingml/2006/main">
+              <a:ext uri="{FF2B5EF4-FFF2-40B4-BE49-F238E27FC236}">
+                <a16:creationId xmlns:a16="http://schemas.microsoft.com/office/drawing/2014/main" id="{70A27365-8851-4A8F-902E-B9B6A8171E77}"/>
+              </a:ext>
+            </a:extLst>
+          </p:cNvPr>
+          <p:cNvSpPr>
+            <a:spLocks xmlns:a="http://schemas.openxmlformats.org/drawingml/2006/main" noGrp="1"/>
+          </p:cNvSpPr>
+          <p:nvPr/>
+        </p:nvSpPr>
+        <p:spPr>
+          <a:xfrm xmlns:a="http://schemas.openxmlformats.org/drawingml/2006/main">
+            <a:off x="609600" y="5410200"/>
+            <a:ext cx="10972800" cy="628650"/>
+          </a:xfrm>
+          <a:prstGeom xmlns:a="http://schemas.openxmlformats.org/drawingml/2006/main" prst="rect">
+            <a:avLst/>
+          </a:prstGeom>
+          <a:noFill xmlns:a="http://schemas.openxmlformats.org/drawingml/2006/main"/>
+          <a:ln xmlns:a="http://schemas.openxmlformats.org/drawingml/2006/main" w="0">
+            <a:noFill/>
+            <a:prstDash val="solid"/>
+          </a:ln>
+        </p:spPr>
+        <p:txBody>
+          <a:bodyPr xmlns:a="http://schemas.openxmlformats.org/drawingml/2006/main"/>
+          <a:lstStyle xmlns:a="http://schemas.openxmlformats.org/drawingml/2006/main"/>
+          <a:p xmlns:a="http://schemas.openxmlformats.org/drawingml/2006/main">
+            <a:pPr algn="l">
+              <a:defRPr sz="1088" b="0">
+                <a:solidFill>
+                  <a:srgbClr val="52615B"/>
+                </a:solidFill>
+              </a:defRPr>
+            </a:pPr>
+            <a:r>
+              <a:rPr sz="1088" b="0">
+                <a:solidFill>
+                  <a:srgbClr val="52615B"/>
+                </a:solidFill>
+              </a:rPr>
+              <a:t>Order data is the same: retailer order first, then supplier order and fulfillment after payment and fraud checks. Automatic Payments adds Shopify Payments debit and credit adjustments; without it, supplier payment remains manual or pending outside those adjustments.</a:t>
+            </a:r>
+          </a:p>
+        </p:txBody>
+      </p:sp>
+      <p:sp>
+        <p:nvSpPr>
           <p:cNvPr id="13" name="">
             <a:extLst xmlns:a="http://schemas.openxmlformats.org/drawingml/2006/main">
               <a:ext uri="{FF2B5EF4-FFF2-40B4-BE49-F238E27FC236}">
